--- a/STP/presentations/GCF and climate change adaptation concepts.pptx
+++ b/STP/presentations/GCF and climate change adaptation concepts.pptx
@@ -21,6 +21,15 @@
     <p:sldId id="294" r:id="rId15"/>
     <p:sldId id="296" r:id="rId16"/>
     <p:sldId id="298" r:id="rId17"/>
+    <p:sldId id="299" r:id="rId18"/>
+    <p:sldId id="300" r:id="rId19"/>
+    <p:sldId id="301" r:id="rId20"/>
+    <p:sldId id="302" r:id="rId21"/>
+    <p:sldId id="306" r:id="rId22"/>
+    <p:sldId id="307" r:id="rId23"/>
+    <p:sldId id="304" r:id="rId24"/>
+    <p:sldId id="303" r:id="rId25"/>
+    <p:sldId id="308" r:id="rId26"/>
   </p:sldIdLst>
   <p:sldSz cx="12192000" cy="6858000"/>
   <p:notesSz cx="6858000" cy="9144000"/>
@@ -5149,7 +5158,7 @@
           <a:p>
             <a:fld id="{F8A8B291-23C9-4CE5-96D0-E0118EB6230C}" type="datetimeFigureOut">
               <a:rPr lang="en-GB" smtClean="0"/>
-              <a:t>25/11/2025</a:t>
+              <a:t>26/11/2025</a:t>
             </a:fld>
             <a:endParaRPr lang="en-GB"/>
           </a:p>
@@ -5349,7 +5358,7 @@
           <a:p>
             <a:fld id="{F8A8B291-23C9-4CE5-96D0-E0118EB6230C}" type="datetimeFigureOut">
               <a:rPr lang="en-GB" smtClean="0"/>
-              <a:t>25/11/2025</a:t>
+              <a:t>26/11/2025</a:t>
             </a:fld>
             <a:endParaRPr lang="en-GB"/>
           </a:p>
@@ -5559,7 +5568,7 @@
           <a:p>
             <a:fld id="{F8A8B291-23C9-4CE5-96D0-E0118EB6230C}" type="datetimeFigureOut">
               <a:rPr lang="en-GB" smtClean="0"/>
-              <a:t>25/11/2025</a:t>
+              <a:t>26/11/2025</a:t>
             </a:fld>
             <a:endParaRPr lang="en-GB"/>
           </a:p>
@@ -5759,7 +5768,7 @@
           <a:p>
             <a:fld id="{F8A8B291-23C9-4CE5-96D0-E0118EB6230C}" type="datetimeFigureOut">
               <a:rPr lang="en-GB" smtClean="0"/>
-              <a:t>25/11/2025</a:t>
+              <a:t>26/11/2025</a:t>
             </a:fld>
             <a:endParaRPr lang="en-GB"/>
           </a:p>
@@ -6035,7 +6044,7 @@
           <a:p>
             <a:fld id="{F8A8B291-23C9-4CE5-96D0-E0118EB6230C}" type="datetimeFigureOut">
               <a:rPr lang="en-GB" smtClean="0"/>
-              <a:t>25/11/2025</a:t>
+              <a:t>26/11/2025</a:t>
             </a:fld>
             <a:endParaRPr lang="en-GB"/>
           </a:p>
@@ -6303,7 +6312,7 @@
           <a:p>
             <a:fld id="{F8A8B291-23C9-4CE5-96D0-E0118EB6230C}" type="datetimeFigureOut">
               <a:rPr lang="en-GB" smtClean="0"/>
-              <a:t>25/11/2025</a:t>
+              <a:t>26/11/2025</a:t>
             </a:fld>
             <a:endParaRPr lang="en-GB"/>
           </a:p>
@@ -6718,7 +6727,7 @@
           <a:p>
             <a:fld id="{F8A8B291-23C9-4CE5-96D0-E0118EB6230C}" type="datetimeFigureOut">
               <a:rPr lang="en-GB" smtClean="0"/>
-              <a:t>25/11/2025</a:t>
+              <a:t>26/11/2025</a:t>
             </a:fld>
             <a:endParaRPr lang="en-GB"/>
           </a:p>
@@ -6860,7 +6869,7 @@
           <a:p>
             <a:fld id="{F8A8B291-23C9-4CE5-96D0-E0118EB6230C}" type="datetimeFigureOut">
               <a:rPr lang="en-GB" smtClean="0"/>
-              <a:t>25/11/2025</a:t>
+              <a:t>26/11/2025</a:t>
             </a:fld>
             <a:endParaRPr lang="en-GB"/>
           </a:p>
@@ -6973,7 +6982,7 @@
           <a:p>
             <a:fld id="{F8A8B291-23C9-4CE5-96D0-E0118EB6230C}" type="datetimeFigureOut">
               <a:rPr lang="en-GB" smtClean="0"/>
-              <a:t>25/11/2025</a:t>
+              <a:t>26/11/2025</a:t>
             </a:fld>
             <a:endParaRPr lang="en-GB"/>
           </a:p>
@@ -7286,7 +7295,7 @@
           <a:p>
             <a:fld id="{F8A8B291-23C9-4CE5-96D0-E0118EB6230C}" type="datetimeFigureOut">
               <a:rPr lang="en-GB" smtClean="0"/>
-              <a:t>25/11/2025</a:t>
+              <a:t>26/11/2025</a:t>
             </a:fld>
             <a:endParaRPr lang="en-GB"/>
           </a:p>
@@ -7575,7 +7584,7 @@
           <a:p>
             <a:fld id="{F8A8B291-23C9-4CE5-96D0-E0118EB6230C}" type="datetimeFigureOut">
               <a:rPr lang="en-GB" smtClean="0"/>
-              <a:t>25/11/2025</a:t>
+              <a:t>26/11/2025</a:t>
             </a:fld>
             <a:endParaRPr lang="en-GB"/>
           </a:p>
@@ -7818,7 +7827,7 @@
           <a:p>
             <a:fld id="{F8A8B291-23C9-4CE5-96D0-E0118EB6230C}" type="datetimeFigureOut">
               <a:rPr lang="en-GB" smtClean="0"/>
-              <a:t>25/11/2025</a:t>
+              <a:t>26/11/2025</a:t>
             </a:fld>
             <a:endParaRPr lang="en-GB"/>
           </a:p>
@@ -13458,6 +13467,4906 @@
 </p:sld>
 </file>
 
+<file path=ppt/slides/slide17.xml><?xml version="1.0" encoding="utf-8"?>
+<p:sld xmlns:a="http://schemas.openxmlformats.org/drawingml/2006/main" xmlns:r="http://schemas.openxmlformats.org/officeDocument/2006/relationships" xmlns:p="http://schemas.openxmlformats.org/presentationml/2006/main">
+  <p:cSld>
+    <p:spTree>
+      <p:nvGrpSpPr>
+        <p:cNvPr id="1" name="">
+          <a:extLst>
+            <a:ext uri="{FF2B5EF4-FFF2-40B4-BE49-F238E27FC236}">
+              <a16:creationId xmlns:a16="http://schemas.microsoft.com/office/drawing/2014/main" id="{8EF2C6E9-6ECB-D831-93FE-F81CBDFF8C12}"/>
+            </a:ext>
+          </a:extLst>
+        </p:cNvPr>
+        <p:cNvGrpSpPr/>
+        <p:nvPr/>
+      </p:nvGrpSpPr>
+      <p:grpSpPr>
+        <a:xfrm>
+          <a:off x="0" y="0"/>
+          <a:ext cx="0" cy="0"/>
+          <a:chOff x="0" y="0"/>
+          <a:chExt cx="0" cy="0"/>
+        </a:xfrm>
+      </p:grpSpPr>
+      <p:sp>
+        <p:nvSpPr>
+          <p:cNvPr id="2" name="Title 1">
+            <a:extLst>
+              <a:ext uri="{FF2B5EF4-FFF2-40B4-BE49-F238E27FC236}">
+                <a16:creationId xmlns:a16="http://schemas.microsoft.com/office/drawing/2014/main" id="{F469DFCB-4984-6ACE-7874-79D3A468CDC4}"/>
+              </a:ext>
+            </a:extLst>
+          </p:cNvPr>
+          <p:cNvSpPr>
+            <a:spLocks noGrp="1"/>
+          </p:cNvSpPr>
+          <p:nvPr>
+            <p:ph type="title"/>
+          </p:nvPr>
+        </p:nvSpPr>
+        <p:spPr>
+          <a:xfrm>
+            <a:off x="582983" y="512502"/>
+            <a:ext cx="11208272" cy="1243578"/>
+          </a:xfrm>
+        </p:spPr>
+        <p:txBody>
+          <a:bodyPr>
+            <a:noAutofit/>
+          </a:bodyPr>
+          <a:lstStyle/>
+          <a:p>
+            <a:r>
+              <a:rPr lang="en-US" sz="2900" b="1" dirty="0">
+                <a:solidFill>
+                  <a:srgbClr val="0070C0"/>
+                </a:solidFill>
+                <a:latin typeface="Arial" panose="020B0604020202020204" pitchFamily="34" charset="0"/>
+                <a:cs typeface="Arial" panose="020B0604020202020204" pitchFamily="34" charset="0"/>
+              </a:rPr>
+              <a:t>CMIP in numbers</a:t>
+            </a:r>
+          </a:p>
+        </p:txBody>
+      </p:sp>
+      <p:grpSp>
+        <p:nvGrpSpPr>
+          <p:cNvPr id="6" name="Group 5">
+            <a:extLst>
+              <a:ext uri="{FF2B5EF4-FFF2-40B4-BE49-F238E27FC236}">
+                <a16:creationId xmlns:a16="http://schemas.microsoft.com/office/drawing/2014/main" id="{74D0C409-CB0E-485E-53D5-86297C5C1471}"/>
+              </a:ext>
+            </a:extLst>
+          </p:cNvPr>
+          <p:cNvGrpSpPr/>
+          <p:nvPr/>
+        </p:nvGrpSpPr>
+        <p:grpSpPr>
+          <a:xfrm>
+            <a:off x="-16329" y="-38779"/>
+            <a:ext cx="12393386" cy="316366"/>
+            <a:chOff x="-16329" y="5228994"/>
+            <a:chExt cx="12208329" cy="575436"/>
+          </a:xfrm>
+        </p:grpSpPr>
+        <p:sp>
+          <p:nvSpPr>
+            <p:cNvPr id="8" name="Rectangle 7">
+              <a:extLst>
+                <a:ext uri="{FF2B5EF4-FFF2-40B4-BE49-F238E27FC236}">
+                  <a16:creationId xmlns:a16="http://schemas.microsoft.com/office/drawing/2014/main" id="{0D109F52-5E90-6127-6356-A4C0341C6D27}"/>
+                </a:ext>
+              </a:extLst>
+            </p:cNvPr>
+            <p:cNvSpPr/>
+            <p:nvPr/>
+          </p:nvSpPr>
+          <p:spPr>
+            <a:xfrm>
+              <a:off x="-16329" y="5228994"/>
+              <a:ext cx="10205358" cy="575436"/>
+            </a:xfrm>
+            <a:prstGeom prst="rect">
+              <a:avLst/>
+            </a:prstGeom>
+            <a:solidFill>
+              <a:schemeClr val="accent5">
+                <a:lumMod val="50000"/>
+              </a:schemeClr>
+            </a:solidFill>
+            <a:ln>
+              <a:noFill/>
+            </a:ln>
+          </p:spPr>
+          <p:style>
+            <a:lnRef idx="2">
+              <a:schemeClr val="accent1">
+                <a:shade val="50000"/>
+              </a:schemeClr>
+            </a:lnRef>
+            <a:fillRef idx="1">
+              <a:schemeClr val="accent1"/>
+            </a:fillRef>
+            <a:effectRef idx="0">
+              <a:schemeClr val="accent1"/>
+            </a:effectRef>
+            <a:fontRef idx="minor">
+              <a:schemeClr val="lt1"/>
+            </a:fontRef>
+          </p:style>
+          <p:txBody>
+            <a:bodyPr rtlCol="0" anchor="ctr"/>
+            <a:lstStyle/>
+            <a:p>
+              <a:pPr algn="ctr"/>
+              <a:endParaRPr lang="en-US"/>
+            </a:p>
+          </p:txBody>
+        </p:sp>
+        <p:sp>
+          <p:nvSpPr>
+            <p:cNvPr id="9" name="Rectangle 8">
+              <a:extLst>
+                <a:ext uri="{FF2B5EF4-FFF2-40B4-BE49-F238E27FC236}">
+                  <a16:creationId xmlns:a16="http://schemas.microsoft.com/office/drawing/2014/main" id="{9CA929B9-4275-3F40-413D-BD6AC9CF5470}"/>
+                </a:ext>
+              </a:extLst>
+            </p:cNvPr>
+            <p:cNvSpPr/>
+            <p:nvPr/>
+          </p:nvSpPr>
+          <p:spPr>
+            <a:xfrm>
+              <a:off x="10189029" y="5228994"/>
+              <a:ext cx="2002971" cy="575435"/>
+            </a:xfrm>
+            <a:prstGeom prst="rect">
+              <a:avLst/>
+            </a:prstGeom>
+            <a:solidFill>
+              <a:schemeClr val="accent4"/>
+            </a:solidFill>
+            <a:ln>
+              <a:noFill/>
+            </a:ln>
+          </p:spPr>
+          <p:style>
+            <a:lnRef idx="2">
+              <a:schemeClr val="accent1">
+                <a:shade val="50000"/>
+              </a:schemeClr>
+            </a:lnRef>
+            <a:fillRef idx="1">
+              <a:schemeClr val="accent1"/>
+            </a:fillRef>
+            <a:effectRef idx="0">
+              <a:schemeClr val="accent1"/>
+            </a:effectRef>
+            <a:fontRef idx="minor">
+              <a:schemeClr val="lt1"/>
+            </a:fontRef>
+          </p:style>
+          <p:txBody>
+            <a:bodyPr rtlCol="0" anchor="ctr"/>
+            <a:lstStyle/>
+            <a:p>
+              <a:pPr algn="ctr"/>
+              <a:endParaRPr lang="en-US"/>
+            </a:p>
+          </p:txBody>
+        </p:sp>
+      </p:grpSp>
+      <p:cxnSp>
+        <p:nvCxnSpPr>
+          <p:cNvPr id="10" name="Connecteur droit 6">
+            <a:extLst>
+              <a:ext uri="{FF2B5EF4-FFF2-40B4-BE49-F238E27FC236}">
+                <a16:creationId xmlns:a16="http://schemas.microsoft.com/office/drawing/2014/main" id="{A1A93BBB-80BE-7AE4-5FD4-C85FCD81ED9B}"/>
+              </a:ext>
+            </a:extLst>
+          </p:cNvPr>
+          <p:cNvCxnSpPr>
+            <a:cxnSpLocks/>
+          </p:cNvCxnSpPr>
+          <p:nvPr/>
+        </p:nvCxnSpPr>
+        <p:spPr>
+          <a:xfrm>
+            <a:off x="-16329" y="395044"/>
+            <a:ext cx="12208329" cy="0"/>
+          </a:xfrm>
+          <a:prstGeom prst="line">
+            <a:avLst/>
+          </a:prstGeom>
+          <a:ln w="28575"/>
+        </p:spPr>
+        <p:style>
+          <a:lnRef idx="1">
+            <a:schemeClr val="accent1"/>
+          </a:lnRef>
+          <a:fillRef idx="0">
+            <a:schemeClr val="accent1"/>
+          </a:fillRef>
+          <a:effectRef idx="0">
+            <a:schemeClr val="accent1"/>
+          </a:effectRef>
+          <a:fontRef idx="minor">
+            <a:schemeClr val="tx1"/>
+          </a:fontRef>
+        </p:style>
+      </p:cxnSp>
+      <p:sp>
+        <p:nvSpPr>
+          <p:cNvPr id="13" name="object 4">
+            <a:extLst>
+              <a:ext uri="{FF2B5EF4-FFF2-40B4-BE49-F238E27FC236}">
+                <a16:creationId xmlns:a16="http://schemas.microsoft.com/office/drawing/2014/main" id="{2881CC1F-C219-B4A9-1DF2-0B2CC82383A4}"/>
+              </a:ext>
+            </a:extLst>
+          </p:cNvPr>
+          <p:cNvSpPr txBox="1"/>
+          <p:nvPr/>
+        </p:nvSpPr>
+        <p:spPr>
+          <a:xfrm>
+            <a:off x="479856" y="1349608"/>
+            <a:ext cx="6280785" cy="848360"/>
+          </a:xfrm>
+          <a:prstGeom prst="rect">
+            <a:avLst/>
+          </a:prstGeom>
+        </p:spPr>
+        <p:txBody>
+          <a:bodyPr vert="horz" wrap="square" lIns="0" tIns="149225" rIns="0" bIns="0" rtlCol="0">
+            <a:spAutoFit/>
+          </a:bodyPr>
+          <a:lstStyle/>
+          <a:p>
+            <a:pPr marL="299085" indent="-286385">
+              <a:lnSpc>
+                <a:spcPct val="100000"/>
+              </a:lnSpc>
+              <a:spcBef>
+                <a:spcPts val="1175"/>
+              </a:spcBef>
+              <a:buFont typeface="Wingdings"/>
+              <a:buChar char=""/>
+              <a:tabLst>
+                <a:tab pos="299085" algn="l"/>
+              </a:tabLst>
+            </a:pPr>
+            <a:r>
+              <a:rPr sz="1800" dirty="0">
+                <a:latin typeface="Calibri"/>
+                <a:cs typeface="Calibri"/>
+              </a:rPr>
+              <a:t>CMIP5</a:t>
+            </a:r>
+            <a:r>
+              <a:rPr sz="1800" spc="-30" dirty="0">
+                <a:latin typeface="Calibri"/>
+                <a:cs typeface="Calibri"/>
+              </a:rPr>
+              <a:t> </a:t>
+            </a:r>
+            <a:r>
+              <a:rPr sz="1800" dirty="0">
+                <a:latin typeface="Calibri"/>
+                <a:cs typeface="Calibri"/>
+              </a:rPr>
+              <a:t>(40</a:t>
+            </a:r>
+            <a:r>
+              <a:rPr sz="1800" spc="-5" dirty="0">
+                <a:latin typeface="Calibri"/>
+                <a:cs typeface="Calibri"/>
+              </a:rPr>
+              <a:t> </a:t>
+            </a:r>
+            <a:r>
+              <a:rPr sz="1800" dirty="0">
+                <a:latin typeface="Calibri"/>
+                <a:cs typeface="Calibri"/>
+              </a:rPr>
+              <a:t>models,</a:t>
+            </a:r>
+            <a:r>
+              <a:rPr sz="1800" spc="-25" dirty="0">
+                <a:latin typeface="Calibri"/>
+                <a:cs typeface="Calibri"/>
+              </a:rPr>
+              <a:t> </a:t>
+            </a:r>
+            <a:r>
+              <a:rPr sz="1800" dirty="0">
+                <a:latin typeface="Calibri"/>
+                <a:cs typeface="Calibri"/>
+              </a:rPr>
+              <a:t>1.5</a:t>
+            </a:r>
+            <a:r>
+              <a:rPr sz="1800" spc="-25" dirty="0">
+                <a:latin typeface="Calibri"/>
+                <a:cs typeface="Calibri"/>
+              </a:rPr>
+              <a:t> </a:t>
+            </a:r>
+            <a:r>
+              <a:rPr sz="1800" dirty="0">
+                <a:latin typeface="Calibri"/>
+                <a:cs typeface="Calibri"/>
+              </a:rPr>
+              <a:t>PB).</a:t>
+            </a:r>
+            <a:r>
+              <a:rPr sz="1800" spc="-30" dirty="0">
+                <a:latin typeface="Calibri"/>
+                <a:cs typeface="Calibri"/>
+              </a:rPr>
+              <a:t> </a:t>
+            </a:r>
+            <a:r>
+              <a:rPr sz="1800" dirty="0">
+                <a:latin typeface="Calibri"/>
+                <a:cs typeface="Calibri"/>
+              </a:rPr>
+              <a:t>1</a:t>
+            </a:r>
+            <a:r>
+              <a:rPr sz="1800" spc="-15" dirty="0">
+                <a:latin typeface="Calibri"/>
+                <a:cs typeface="Calibri"/>
+              </a:rPr>
+              <a:t> </a:t>
+            </a:r>
+            <a:r>
+              <a:rPr sz="1800" dirty="0">
+                <a:latin typeface="Calibri"/>
+                <a:cs typeface="Calibri"/>
+              </a:rPr>
+              <a:t>PB</a:t>
+            </a:r>
+            <a:r>
+              <a:rPr sz="1800" spc="-35" dirty="0">
+                <a:latin typeface="Calibri"/>
+                <a:cs typeface="Calibri"/>
+              </a:rPr>
+              <a:t> </a:t>
+            </a:r>
+            <a:r>
+              <a:rPr sz="1800" dirty="0">
+                <a:latin typeface="Calibri"/>
+                <a:cs typeface="Calibri"/>
+              </a:rPr>
+              <a:t>is</a:t>
+            </a:r>
+            <a:r>
+              <a:rPr sz="1800" spc="-15" dirty="0">
+                <a:latin typeface="Calibri"/>
+                <a:cs typeface="Calibri"/>
+              </a:rPr>
+              <a:t> </a:t>
+            </a:r>
+            <a:r>
+              <a:rPr sz="1800" dirty="0">
+                <a:latin typeface="Calibri"/>
+                <a:cs typeface="Calibri"/>
+              </a:rPr>
+              <a:t>1,000,000</a:t>
+            </a:r>
+            <a:r>
+              <a:rPr sz="1800" spc="-20" dirty="0">
+                <a:latin typeface="Calibri"/>
+                <a:cs typeface="Calibri"/>
+              </a:rPr>
+              <a:t> </a:t>
+            </a:r>
+            <a:r>
+              <a:rPr sz="1800" spc="-25" dirty="0">
+                <a:latin typeface="Calibri"/>
+                <a:cs typeface="Calibri"/>
+              </a:rPr>
+              <a:t>GB</a:t>
+            </a:r>
+            <a:endParaRPr sz="1800">
+              <a:latin typeface="Calibri"/>
+              <a:cs typeface="Calibri"/>
+            </a:endParaRPr>
+          </a:p>
+          <a:p>
+            <a:pPr marL="298450" indent="-285750">
+              <a:lnSpc>
+                <a:spcPct val="100000"/>
+              </a:lnSpc>
+              <a:spcBef>
+                <a:spcPts val="1080"/>
+              </a:spcBef>
+              <a:buFont typeface="Wingdings"/>
+              <a:buChar char=""/>
+              <a:tabLst>
+                <a:tab pos="298450" algn="l"/>
+              </a:tabLst>
+            </a:pPr>
+            <a:r>
+              <a:rPr sz="1800" dirty="0">
+                <a:latin typeface="Calibri"/>
+                <a:cs typeface="Calibri"/>
+              </a:rPr>
+              <a:t>CMIP6</a:t>
+            </a:r>
+            <a:r>
+              <a:rPr sz="1800" spc="-40" dirty="0">
+                <a:latin typeface="Calibri"/>
+                <a:cs typeface="Calibri"/>
+              </a:rPr>
+              <a:t> </a:t>
+            </a:r>
+            <a:r>
+              <a:rPr sz="1800" dirty="0">
+                <a:latin typeface="Calibri"/>
+                <a:cs typeface="Calibri"/>
+              </a:rPr>
+              <a:t>100+</a:t>
+            </a:r>
+            <a:r>
+              <a:rPr sz="1800" spc="-25" dirty="0">
+                <a:latin typeface="Calibri"/>
+                <a:cs typeface="Calibri"/>
+              </a:rPr>
+              <a:t> </a:t>
+            </a:r>
+            <a:r>
+              <a:rPr sz="1800" dirty="0">
+                <a:latin typeface="Calibri"/>
+                <a:cs typeface="Calibri"/>
+              </a:rPr>
+              <a:t>models</a:t>
+            </a:r>
+            <a:r>
+              <a:rPr sz="1800" spc="-35" dirty="0">
+                <a:latin typeface="Calibri"/>
+                <a:cs typeface="Calibri"/>
+              </a:rPr>
+              <a:t> </a:t>
+            </a:r>
+            <a:r>
+              <a:rPr sz="1800" dirty="0">
+                <a:latin typeface="Calibri"/>
+                <a:cs typeface="Calibri"/>
+              </a:rPr>
+              <a:t>from</a:t>
+            </a:r>
+            <a:r>
+              <a:rPr sz="1800" spc="-35" dirty="0">
+                <a:latin typeface="Calibri"/>
+                <a:cs typeface="Calibri"/>
+              </a:rPr>
+              <a:t> </a:t>
+            </a:r>
+            <a:r>
+              <a:rPr sz="1800" dirty="0">
+                <a:latin typeface="Calibri"/>
+                <a:cs typeface="Calibri"/>
+              </a:rPr>
+              <a:t>50</a:t>
+            </a:r>
+            <a:r>
+              <a:rPr sz="1800" spc="-40" dirty="0">
+                <a:latin typeface="Calibri"/>
+                <a:cs typeface="Calibri"/>
+              </a:rPr>
+              <a:t> </a:t>
+            </a:r>
+            <a:r>
+              <a:rPr sz="1800" dirty="0">
+                <a:latin typeface="Calibri"/>
+                <a:cs typeface="Calibri"/>
+              </a:rPr>
+              <a:t>modeling</a:t>
+            </a:r>
+            <a:r>
+              <a:rPr sz="1800" spc="-15" dirty="0">
+                <a:latin typeface="Calibri"/>
+                <a:cs typeface="Calibri"/>
+              </a:rPr>
+              <a:t> </a:t>
+            </a:r>
+            <a:r>
+              <a:rPr sz="1800" spc="-10" dirty="0">
+                <a:latin typeface="Calibri"/>
+                <a:cs typeface="Calibri"/>
+              </a:rPr>
+              <a:t>centers</a:t>
+            </a:r>
+            <a:r>
+              <a:rPr sz="1800" spc="-20" dirty="0">
+                <a:latin typeface="Calibri"/>
+                <a:cs typeface="Calibri"/>
+              </a:rPr>
+              <a:t> </a:t>
+            </a:r>
+            <a:r>
+              <a:rPr sz="1800" dirty="0">
+                <a:latin typeface="Calibri"/>
+                <a:cs typeface="Calibri"/>
+              </a:rPr>
+              <a:t>around</a:t>
+            </a:r>
+            <a:r>
+              <a:rPr sz="1800" spc="-40" dirty="0">
+                <a:latin typeface="Calibri"/>
+                <a:cs typeface="Calibri"/>
+              </a:rPr>
+              <a:t> </a:t>
+            </a:r>
+            <a:r>
+              <a:rPr sz="1800" dirty="0">
+                <a:latin typeface="Calibri"/>
+                <a:cs typeface="Calibri"/>
+              </a:rPr>
+              <a:t>the</a:t>
+            </a:r>
+            <a:r>
+              <a:rPr sz="1800" spc="-25" dirty="0">
+                <a:latin typeface="Calibri"/>
+                <a:cs typeface="Calibri"/>
+              </a:rPr>
+              <a:t> </a:t>
+            </a:r>
+            <a:r>
+              <a:rPr sz="1800" spc="-10" dirty="0">
+                <a:latin typeface="Calibri"/>
+                <a:cs typeface="Calibri"/>
+              </a:rPr>
+              <a:t>world</a:t>
+            </a:r>
+            <a:endParaRPr sz="1800">
+              <a:latin typeface="Calibri"/>
+              <a:cs typeface="Calibri"/>
+            </a:endParaRPr>
+          </a:p>
+        </p:txBody>
+      </p:sp>
+      <p:pic>
+        <p:nvPicPr>
+          <p:cNvPr id="14" name="object 5">
+            <a:extLst>
+              <a:ext uri="{FF2B5EF4-FFF2-40B4-BE49-F238E27FC236}">
+                <a16:creationId xmlns:a16="http://schemas.microsoft.com/office/drawing/2014/main" id="{58587040-9760-A447-B575-D3E33F926F6C}"/>
+              </a:ext>
+            </a:extLst>
+          </p:cNvPr>
+          <p:cNvPicPr/>
+          <p:nvPr/>
+        </p:nvPicPr>
+        <p:blipFill>
+          <a:blip r:embed="rId2" cstate="print"/>
+          <a:stretch>
+            <a:fillRect/>
+          </a:stretch>
+        </p:blipFill>
+        <p:spPr>
+          <a:xfrm>
+            <a:off x="204215" y="2388042"/>
+            <a:ext cx="7062216" cy="3340673"/>
+          </a:xfrm>
+          <a:prstGeom prst="rect">
+            <a:avLst/>
+          </a:prstGeom>
+        </p:spPr>
+      </p:pic>
+      <p:sp>
+        <p:nvSpPr>
+          <p:cNvPr id="15" name="object 6">
+            <a:extLst>
+              <a:ext uri="{FF2B5EF4-FFF2-40B4-BE49-F238E27FC236}">
+                <a16:creationId xmlns:a16="http://schemas.microsoft.com/office/drawing/2014/main" id="{F5183B31-DFB8-842F-5E17-F18AEF112FFA}"/>
+              </a:ext>
+            </a:extLst>
+          </p:cNvPr>
+          <p:cNvSpPr txBox="1"/>
+          <p:nvPr/>
+        </p:nvSpPr>
+        <p:spPr>
+          <a:xfrm>
+            <a:off x="120192" y="5567455"/>
+            <a:ext cx="7167880" cy="1123950"/>
+          </a:xfrm>
+          <a:prstGeom prst="rect">
+            <a:avLst/>
+          </a:prstGeom>
+        </p:spPr>
+        <p:txBody>
+          <a:bodyPr vert="horz" wrap="square" lIns="0" tIns="13335" rIns="0" bIns="0" rtlCol="0">
+            <a:spAutoFit/>
+          </a:bodyPr>
+          <a:lstStyle/>
+          <a:p>
+            <a:pPr marL="12700" marR="5080">
+              <a:lnSpc>
+                <a:spcPct val="150100"/>
+              </a:lnSpc>
+              <a:spcBef>
+                <a:spcPts val="105"/>
+              </a:spcBef>
+            </a:pPr>
+            <a:r>
+              <a:rPr sz="1200" dirty="0">
+                <a:solidFill>
+                  <a:srgbClr val="202429"/>
+                </a:solidFill>
+                <a:latin typeface="Calibri"/>
+                <a:cs typeface="Calibri"/>
+              </a:rPr>
+              <a:t>Global</a:t>
+            </a:r>
+            <a:r>
+              <a:rPr sz="1200" spc="-35" dirty="0">
+                <a:solidFill>
+                  <a:srgbClr val="202429"/>
+                </a:solidFill>
+                <a:latin typeface="Calibri"/>
+                <a:cs typeface="Calibri"/>
+              </a:rPr>
+              <a:t> </a:t>
+            </a:r>
+            <a:r>
+              <a:rPr sz="1200" dirty="0">
+                <a:solidFill>
+                  <a:srgbClr val="202429"/>
+                </a:solidFill>
+                <a:latin typeface="Calibri"/>
+                <a:cs typeface="Calibri"/>
+              </a:rPr>
+              <a:t>mean</a:t>
+            </a:r>
+            <a:r>
+              <a:rPr sz="1200" spc="-15" dirty="0">
+                <a:solidFill>
+                  <a:srgbClr val="202429"/>
+                </a:solidFill>
+                <a:latin typeface="Calibri"/>
+                <a:cs typeface="Calibri"/>
+              </a:rPr>
+              <a:t> </a:t>
+            </a:r>
+            <a:r>
+              <a:rPr sz="1200" spc="-10" dirty="0">
+                <a:solidFill>
+                  <a:srgbClr val="202429"/>
+                </a:solidFill>
+                <a:latin typeface="Calibri"/>
+                <a:cs typeface="Calibri"/>
+              </a:rPr>
+              <a:t>temperature</a:t>
+            </a:r>
+            <a:r>
+              <a:rPr sz="1200" spc="-50" dirty="0">
+                <a:solidFill>
+                  <a:srgbClr val="202429"/>
+                </a:solidFill>
+                <a:latin typeface="Calibri"/>
+                <a:cs typeface="Calibri"/>
+              </a:rPr>
+              <a:t> </a:t>
+            </a:r>
+            <a:r>
+              <a:rPr sz="1200" dirty="0">
+                <a:solidFill>
+                  <a:srgbClr val="202429"/>
+                </a:solidFill>
+                <a:latin typeface="Calibri"/>
+                <a:cs typeface="Calibri"/>
+              </a:rPr>
+              <a:t>between</a:t>
+            </a:r>
+            <a:r>
+              <a:rPr sz="1200" spc="-30" dirty="0">
+                <a:solidFill>
+                  <a:srgbClr val="202429"/>
+                </a:solidFill>
+                <a:latin typeface="Calibri"/>
+                <a:cs typeface="Calibri"/>
+              </a:rPr>
+              <a:t> </a:t>
+            </a:r>
+            <a:r>
+              <a:rPr sz="1200" dirty="0">
+                <a:solidFill>
+                  <a:srgbClr val="202429"/>
+                </a:solidFill>
+                <a:latin typeface="Calibri"/>
+                <a:cs typeface="Calibri"/>
+              </a:rPr>
+              <a:t>1850</a:t>
+            </a:r>
+            <a:r>
+              <a:rPr sz="1200" spc="-15" dirty="0">
+                <a:solidFill>
+                  <a:srgbClr val="202429"/>
+                </a:solidFill>
+                <a:latin typeface="Calibri"/>
+                <a:cs typeface="Calibri"/>
+              </a:rPr>
+              <a:t> </a:t>
+            </a:r>
+            <a:r>
+              <a:rPr sz="1200" dirty="0">
+                <a:solidFill>
+                  <a:srgbClr val="202429"/>
+                </a:solidFill>
+                <a:latin typeface="Calibri"/>
+                <a:cs typeface="Calibri"/>
+              </a:rPr>
+              <a:t>and</a:t>
+            </a:r>
+            <a:r>
+              <a:rPr sz="1200" spc="-40" dirty="0">
+                <a:solidFill>
+                  <a:srgbClr val="202429"/>
+                </a:solidFill>
+                <a:latin typeface="Calibri"/>
+                <a:cs typeface="Calibri"/>
+              </a:rPr>
+              <a:t> </a:t>
+            </a:r>
+            <a:r>
+              <a:rPr sz="1200" dirty="0">
+                <a:solidFill>
+                  <a:srgbClr val="202429"/>
+                </a:solidFill>
+                <a:latin typeface="Calibri"/>
+                <a:cs typeface="Calibri"/>
+              </a:rPr>
+              <a:t>2100</a:t>
+            </a:r>
+            <a:r>
+              <a:rPr sz="1200" spc="-20" dirty="0">
+                <a:solidFill>
+                  <a:srgbClr val="202429"/>
+                </a:solidFill>
+                <a:latin typeface="Calibri"/>
+                <a:cs typeface="Calibri"/>
+              </a:rPr>
+              <a:t> </a:t>
+            </a:r>
+            <a:r>
+              <a:rPr sz="1200" dirty="0">
+                <a:solidFill>
+                  <a:srgbClr val="202429"/>
+                </a:solidFill>
+                <a:latin typeface="Calibri"/>
+                <a:cs typeface="Calibri"/>
+              </a:rPr>
+              <a:t>for</a:t>
+            </a:r>
+            <a:r>
+              <a:rPr sz="1200" spc="-40" dirty="0">
+                <a:solidFill>
+                  <a:srgbClr val="202429"/>
+                </a:solidFill>
+                <a:latin typeface="Calibri"/>
+                <a:cs typeface="Calibri"/>
+              </a:rPr>
+              <a:t> </a:t>
+            </a:r>
+            <a:r>
+              <a:rPr sz="1200" dirty="0">
+                <a:solidFill>
+                  <a:srgbClr val="202429"/>
+                </a:solidFill>
+                <a:latin typeface="Calibri"/>
+                <a:cs typeface="Calibri"/>
+              </a:rPr>
+              <a:t>selected</a:t>
+            </a:r>
+            <a:r>
+              <a:rPr sz="1200" spc="-20" dirty="0">
+                <a:solidFill>
+                  <a:srgbClr val="202429"/>
+                </a:solidFill>
+                <a:latin typeface="Calibri"/>
+                <a:cs typeface="Calibri"/>
+              </a:rPr>
+              <a:t> </a:t>
+            </a:r>
+            <a:r>
+              <a:rPr sz="1200" dirty="0">
+                <a:solidFill>
+                  <a:srgbClr val="202429"/>
+                </a:solidFill>
+                <a:latin typeface="Calibri"/>
+                <a:cs typeface="Calibri"/>
+              </a:rPr>
+              <a:t>CMIP6</a:t>
+            </a:r>
+            <a:r>
+              <a:rPr sz="1200" spc="-30" dirty="0">
+                <a:solidFill>
+                  <a:srgbClr val="202429"/>
+                </a:solidFill>
+                <a:latin typeface="Calibri"/>
+                <a:cs typeface="Calibri"/>
+              </a:rPr>
+              <a:t> </a:t>
+            </a:r>
+            <a:r>
+              <a:rPr sz="1200" dirty="0">
+                <a:solidFill>
+                  <a:srgbClr val="202429"/>
+                </a:solidFill>
+                <a:latin typeface="Calibri"/>
+                <a:cs typeface="Calibri"/>
+              </a:rPr>
+              <a:t>models.</a:t>
+            </a:r>
+            <a:r>
+              <a:rPr sz="1200" spc="-25" dirty="0">
+                <a:solidFill>
+                  <a:srgbClr val="202429"/>
+                </a:solidFill>
+                <a:latin typeface="Calibri"/>
+                <a:cs typeface="Calibri"/>
+              </a:rPr>
+              <a:t> </a:t>
+            </a:r>
+            <a:r>
+              <a:rPr sz="1200" dirty="0">
+                <a:solidFill>
+                  <a:srgbClr val="202429"/>
+                </a:solidFill>
+                <a:latin typeface="Calibri"/>
+                <a:cs typeface="Calibri"/>
+              </a:rPr>
+              <a:t>The</a:t>
+            </a:r>
+            <a:r>
+              <a:rPr sz="1200" spc="-30" dirty="0">
+                <a:solidFill>
+                  <a:srgbClr val="202429"/>
+                </a:solidFill>
+                <a:latin typeface="Calibri"/>
+                <a:cs typeface="Calibri"/>
+              </a:rPr>
+              <a:t> </a:t>
+            </a:r>
+            <a:r>
+              <a:rPr sz="1200" dirty="0">
+                <a:solidFill>
+                  <a:srgbClr val="202429"/>
+                </a:solidFill>
+                <a:latin typeface="Calibri"/>
+                <a:cs typeface="Calibri"/>
+              </a:rPr>
+              <a:t>grey-shaded</a:t>
+            </a:r>
+            <a:r>
+              <a:rPr sz="1200" spc="-60" dirty="0">
+                <a:solidFill>
+                  <a:srgbClr val="202429"/>
+                </a:solidFill>
+                <a:latin typeface="Calibri"/>
+                <a:cs typeface="Calibri"/>
+              </a:rPr>
+              <a:t> </a:t>
+            </a:r>
+            <a:r>
+              <a:rPr sz="1200" dirty="0">
+                <a:solidFill>
+                  <a:srgbClr val="202429"/>
+                </a:solidFill>
+                <a:latin typeface="Calibri"/>
+                <a:cs typeface="Calibri"/>
+              </a:rPr>
+              <a:t>area</a:t>
+            </a:r>
+            <a:r>
+              <a:rPr sz="1200" spc="-30" dirty="0">
+                <a:solidFill>
+                  <a:srgbClr val="202429"/>
+                </a:solidFill>
+                <a:latin typeface="Calibri"/>
+                <a:cs typeface="Calibri"/>
+              </a:rPr>
+              <a:t> </a:t>
+            </a:r>
+            <a:r>
+              <a:rPr sz="1200" dirty="0">
+                <a:solidFill>
+                  <a:srgbClr val="202429"/>
+                </a:solidFill>
+                <a:latin typeface="Calibri"/>
+                <a:cs typeface="Calibri"/>
+              </a:rPr>
+              <a:t>shows</a:t>
+            </a:r>
+            <a:r>
+              <a:rPr sz="1200" spc="-15" dirty="0">
+                <a:solidFill>
+                  <a:srgbClr val="202429"/>
+                </a:solidFill>
+                <a:latin typeface="Calibri"/>
+                <a:cs typeface="Calibri"/>
+              </a:rPr>
+              <a:t> </a:t>
+            </a:r>
+            <a:r>
+              <a:rPr sz="1200" spc="-25" dirty="0">
+                <a:solidFill>
+                  <a:srgbClr val="202429"/>
+                </a:solidFill>
+                <a:latin typeface="Calibri"/>
+                <a:cs typeface="Calibri"/>
+              </a:rPr>
+              <a:t>the </a:t>
+            </a:r>
+            <a:r>
+              <a:rPr sz="1200" dirty="0">
+                <a:solidFill>
+                  <a:srgbClr val="202429"/>
+                </a:solidFill>
+                <a:latin typeface="Calibri"/>
+                <a:cs typeface="Calibri"/>
+              </a:rPr>
+              <a:t>range</a:t>
+            </a:r>
+            <a:r>
+              <a:rPr sz="1200" spc="-30" dirty="0">
+                <a:solidFill>
+                  <a:srgbClr val="202429"/>
+                </a:solidFill>
+                <a:latin typeface="Calibri"/>
+                <a:cs typeface="Calibri"/>
+              </a:rPr>
+              <a:t> </a:t>
+            </a:r>
+            <a:r>
+              <a:rPr sz="1200" dirty="0">
+                <a:solidFill>
+                  <a:srgbClr val="202429"/>
+                </a:solidFill>
+                <a:latin typeface="Calibri"/>
+                <a:cs typeface="Calibri"/>
+              </a:rPr>
+              <a:t>of</a:t>
+            </a:r>
+            <a:r>
+              <a:rPr sz="1200" spc="-5" dirty="0">
+                <a:solidFill>
+                  <a:srgbClr val="202429"/>
+                </a:solidFill>
+                <a:latin typeface="Calibri"/>
+                <a:cs typeface="Calibri"/>
+              </a:rPr>
+              <a:t> </a:t>
+            </a:r>
+            <a:r>
+              <a:rPr sz="1200" spc="-10" dirty="0">
+                <a:solidFill>
+                  <a:srgbClr val="202429"/>
+                </a:solidFill>
+                <a:latin typeface="Calibri"/>
+                <a:cs typeface="Calibri"/>
+              </a:rPr>
+              <a:t>historical</a:t>
+            </a:r>
+            <a:r>
+              <a:rPr sz="1200" spc="-20" dirty="0">
+                <a:solidFill>
+                  <a:srgbClr val="202429"/>
+                </a:solidFill>
+                <a:latin typeface="Calibri"/>
+                <a:cs typeface="Calibri"/>
+              </a:rPr>
+              <a:t> </a:t>
+            </a:r>
+            <a:r>
+              <a:rPr sz="1200" spc="-10" dirty="0">
+                <a:solidFill>
+                  <a:srgbClr val="202429"/>
+                </a:solidFill>
+                <a:latin typeface="Calibri"/>
+                <a:cs typeface="Calibri"/>
+              </a:rPr>
+              <a:t>simulations</a:t>
+            </a:r>
+            <a:r>
+              <a:rPr sz="1200" spc="-15" dirty="0">
+                <a:solidFill>
+                  <a:srgbClr val="202429"/>
+                </a:solidFill>
+                <a:latin typeface="Calibri"/>
+                <a:cs typeface="Calibri"/>
+              </a:rPr>
+              <a:t> </a:t>
+            </a:r>
+            <a:r>
+              <a:rPr sz="1200" dirty="0">
+                <a:solidFill>
+                  <a:srgbClr val="202429"/>
+                </a:solidFill>
+                <a:latin typeface="Calibri"/>
+                <a:cs typeface="Calibri"/>
+              </a:rPr>
+              <a:t>and</a:t>
+            </a:r>
+            <a:r>
+              <a:rPr sz="1200" spc="-25" dirty="0">
+                <a:solidFill>
+                  <a:srgbClr val="202429"/>
+                </a:solidFill>
+                <a:latin typeface="Calibri"/>
+                <a:cs typeface="Calibri"/>
+              </a:rPr>
+              <a:t> </a:t>
+            </a:r>
+            <a:r>
+              <a:rPr sz="1200" dirty="0">
+                <a:solidFill>
+                  <a:srgbClr val="202429"/>
+                </a:solidFill>
+                <a:latin typeface="Calibri"/>
+                <a:cs typeface="Calibri"/>
+              </a:rPr>
+              <a:t>the</a:t>
+            </a:r>
+            <a:r>
+              <a:rPr sz="1200" spc="-30" dirty="0">
+                <a:solidFill>
+                  <a:srgbClr val="202429"/>
+                </a:solidFill>
+                <a:latin typeface="Calibri"/>
+                <a:cs typeface="Calibri"/>
+              </a:rPr>
+              <a:t> </a:t>
+            </a:r>
+            <a:r>
+              <a:rPr sz="1200" dirty="0">
+                <a:solidFill>
+                  <a:srgbClr val="202429"/>
+                </a:solidFill>
+                <a:latin typeface="Calibri"/>
+                <a:cs typeface="Calibri"/>
+              </a:rPr>
+              <a:t>coloured</a:t>
+            </a:r>
+            <a:r>
+              <a:rPr sz="1200" spc="-15" dirty="0">
+                <a:solidFill>
+                  <a:srgbClr val="202429"/>
+                </a:solidFill>
+                <a:latin typeface="Calibri"/>
+                <a:cs typeface="Calibri"/>
+              </a:rPr>
+              <a:t> </a:t>
+            </a:r>
+            <a:r>
+              <a:rPr sz="1200" dirty="0">
+                <a:solidFill>
+                  <a:srgbClr val="202429"/>
+                </a:solidFill>
+                <a:latin typeface="Calibri"/>
+                <a:cs typeface="Calibri"/>
+              </a:rPr>
+              <a:t>areas</a:t>
+            </a:r>
+            <a:r>
+              <a:rPr sz="1200" spc="-20" dirty="0">
+                <a:solidFill>
+                  <a:srgbClr val="202429"/>
+                </a:solidFill>
+                <a:latin typeface="Calibri"/>
+                <a:cs typeface="Calibri"/>
+              </a:rPr>
+              <a:t> </a:t>
+            </a:r>
+            <a:r>
+              <a:rPr sz="1200" dirty="0">
+                <a:solidFill>
+                  <a:srgbClr val="202429"/>
+                </a:solidFill>
+                <a:latin typeface="Calibri"/>
+                <a:cs typeface="Calibri"/>
+              </a:rPr>
+              <a:t>show</a:t>
+            </a:r>
+            <a:r>
+              <a:rPr sz="1200" spc="-10" dirty="0">
+                <a:solidFill>
+                  <a:srgbClr val="202429"/>
+                </a:solidFill>
+                <a:latin typeface="Calibri"/>
+                <a:cs typeface="Calibri"/>
+              </a:rPr>
+              <a:t> potential</a:t>
+            </a:r>
+            <a:r>
+              <a:rPr sz="1200" spc="-40" dirty="0">
+                <a:solidFill>
+                  <a:srgbClr val="202429"/>
+                </a:solidFill>
+                <a:latin typeface="Calibri"/>
+                <a:cs typeface="Calibri"/>
+              </a:rPr>
+              <a:t> </a:t>
+            </a:r>
+            <a:r>
+              <a:rPr sz="1200" dirty="0">
+                <a:solidFill>
+                  <a:srgbClr val="202429"/>
+                </a:solidFill>
+                <a:latin typeface="Calibri"/>
+                <a:cs typeface="Calibri"/>
+              </a:rPr>
+              <a:t>future</a:t>
+            </a:r>
+            <a:r>
+              <a:rPr sz="1200" spc="-55" dirty="0">
+                <a:solidFill>
+                  <a:srgbClr val="202429"/>
+                </a:solidFill>
+                <a:latin typeface="Calibri"/>
+                <a:cs typeface="Calibri"/>
+              </a:rPr>
+              <a:t> </a:t>
+            </a:r>
+            <a:r>
+              <a:rPr sz="1200" spc="-10" dirty="0">
+                <a:solidFill>
+                  <a:srgbClr val="202429"/>
+                </a:solidFill>
+                <a:latin typeface="Calibri"/>
+                <a:cs typeface="Calibri"/>
+              </a:rPr>
+              <a:t>temperature</a:t>
+            </a:r>
+            <a:r>
+              <a:rPr sz="1200" spc="-40" dirty="0">
+                <a:solidFill>
+                  <a:srgbClr val="202429"/>
+                </a:solidFill>
+                <a:latin typeface="Calibri"/>
+                <a:cs typeface="Calibri"/>
+              </a:rPr>
+              <a:t> </a:t>
+            </a:r>
+            <a:r>
+              <a:rPr sz="1200" dirty="0">
+                <a:solidFill>
+                  <a:srgbClr val="202429"/>
+                </a:solidFill>
+                <a:latin typeface="Calibri"/>
+                <a:cs typeface="Calibri"/>
+              </a:rPr>
+              <a:t>change</a:t>
+            </a:r>
+            <a:r>
+              <a:rPr sz="1200" spc="-30" dirty="0">
+                <a:solidFill>
+                  <a:srgbClr val="202429"/>
+                </a:solidFill>
+                <a:latin typeface="Calibri"/>
+                <a:cs typeface="Calibri"/>
+              </a:rPr>
+              <a:t> </a:t>
+            </a:r>
+            <a:r>
+              <a:rPr sz="1200" dirty="0">
+                <a:solidFill>
+                  <a:srgbClr val="202429"/>
+                </a:solidFill>
+                <a:latin typeface="Calibri"/>
+                <a:cs typeface="Calibri"/>
+              </a:rPr>
+              <a:t>based</a:t>
+            </a:r>
+            <a:r>
+              <a:rPr sz="1200" spc="-15" dirty="0">
+                <a:solidFill>
+                  <a:srgbClr val="202429"/>
+                </a:solidFill>
+                <a:latin typeface="Calibri"/>
+                <a:cs typeface="Calibri"/>
+              </a:rPr>
+              <a:t> </a:t>
+            </a:r>
+            <a:r>
+              <a:rPr sz="1200" dirty="0">
+                <a:solidFill>
+                  <a:srgbClr val="202429"/>
+                </a:solidFill>
+                <a:latin typeface="Calibri"/>
+                <a:cs typeface="Calibri"/>
+              </a:rPr>
+              <a:t>on</a:t>
+            </a:r>
+            <a:r>
+              <a:rPr sz="1200" spc="-10" dirty="0">
+                <a:solidFill>
+                  <a:srgbClr val="202429"/>
+                </a:solidFill>
+                <a:latin typeface="Calibri"/>
+                <a:cs typeface="Calibri"/>
+              </a:rPr>
+              <a:t> different greenhouse</a:t>
+            </a:r>
+            <a:r>
+              <a:rPr sz="1200" spc="-35" dirty="0">
+                <a:solidFill>
+                  <a:srgbClr val="202429"/>
+                </a:solidFill>
+                <a:latin typeface="Calibri"/>
+                <a:cs typeface="Calibri"/>
+              </a:rPr>
+              <a:t> </a:t>
+            </a:r>
+            <a:r>
+              <a:rPr sz="1200" dirty="0">
+                <a:solidFill>
+                  <a:srgbClr val="202429"/>
+                </a:solidFill>
+                <a:latin typeface="Calibri"/>
+                <a:cs typeface="Calibri"/>
+              </a:rPr>
+              <a:t>gas</a:t>
+            </a:r>
+            <a:r>
+              <a:rPr sz="1200" spc="-15" dirty="0">
+                <a:solidFill>
+                  <a:srgbClr val="202429"/>
+                </a:solidFill>
+                <a:latin typeface="Calibri"/>
+                <a:cs typeface="Calibri"/>
+              </a:rPr>
+              <a:t> </a:t>
+            </a:r>
+            <a:r>
+              <a:rPr sz="1200" dirty="0">
+                <a:solidFill>
+                  <a:srgbClr val="202429"/>
+                </a:solidFill>
+                <a:latin typeface="Calibri"/>
+                <a:cs typeface="Calibri"/>
+              </a:rPr>
+              <a:t>emission</a:t>
+            </a:r>
+            <a:r>
+              <a:rPr sz="1200" spc="-5" dirty="0">
+                <a:solidFill>
+                  <a:srgbClr val="202429"/>
+                </a:solidFill>
+                <a:latin typeface="Calibri"/>
+                <a:cs typeface="Calibri"/>
+              </a:rPr>
+              <a:t> </a:t>
+            </a:r>
+            <a:r>
+              <a:rPr sz="1200" dirty="0">
+                <a:solidFill>
+                  <a:srgbClr val="202429"/>
+                </a:solidFill>
+                <a:latin typeface="Calibri"/>
+                <a:cs typeface="Calibri"/>
+              </a:rPr>
+              <a:t>scenarios</a:t>
+            </a:r>
+            <a:r>
+              <a:rPr sz="1200" spc="-15" dirty="0">
+                <a:solidFill>
+                  <a:srgbClr val="202429"/>
+                </a:solidFill>
+                <a:latin typeface="Calibri"/>
+                <a:cs typeface="Calibri"/>
+              </a:rPr>
+              <a:t> </a:t>
+            </a:r>
+            <a:r>
+              <a:rPr sz="1200" dirty="0">
+                <a:solidFill>
+                  <a:srgbClr val="202429"/>
+                </a:solidFill>
+                <a:latin typeface="Calibri"/>
+                <a:cs typeface="Calibri"/>
+              </a:rPr>
+              <a:t>(red</a:t>
+            </a:r>
+            <a:r>
+              <a:rPr sz="1200" spc="-30" dirty="0">
+                <a:solidFill>
+                  <a:srgbClr val="202429"/>
+                </a:solidFill>
+                <a:latin typeface="Calibri"/>
+                <a:cs typeface="Calibri"/>
+              </a:rPr>
+              <a:t> </a:t>
+            </a:r>
+            <a:r>
+              <a:rPr sz="1200" dirty="0">
+                <a:solidFill>
+                  <a:srgbClr val="202429"/>
+                </a:solidFill>
+                <a:latin typeface="Calibri"/>
+                <a:cs typeface="Calibri"/>
+              </a:rPr>
+              <a:t>is</a:t>
+            </a:r>
+            <a:r>
+              <a:rPr sz="1200" spc="-15" dirty="0">
+                <a:solidFill>
+                  <a:srgbClr val="202429"/>
+                </a:solidFill>
+                <a:latin typeface="Calibri"/>
+                <a:cs typeface="Calibri"/>
+              </a:rPr>
+              <a:t> </a:t>
+            </a:r>
+            <a:r>
+              <a:rPr sz="1200" spc="-10" dirty="0">
+                <a:solidFill>
+                  <a:srgbClr val="202429"/>
+                </a:solidFill>
+                <a:latin typeface="Calibri"/>
+                <a:cs typeface="Calibri"/>
+              </a:rPr>
+              <a:t>pessimistic,</a:t>
+            </a:r>
+            <a:r>
+              <a:rPr sz="1200" dirty="0">
+                <a:solidFill>
+                  <a:srgbClr val="202429"/>
+                </a:solidFill>
+                <a:latin typeface="Calibri"/>
+                <a:cs typeface="Calibri"/>
+              </a:rPr>
+              <a:t> blue</a:t>
+            </a:r>
+            <a:r>
+              <a:rPr sz="1200" spc="-35" dirty="0">
+                <a:solidFill>
+                  <a:srgbClr val="202429"/>
+                </a:solidFill>
+                <a:latin typeface="Calibri"/>
+                <a:cs typeface="Calibri"/>
+              </a:rPr>
+              <a:t> </a:t>
+            </a:r>
+            <a:r>
+              <a:rPr sz="1200" dirty="0">
+                <a:solidFill>
+                  <a:srgbClr val="202429"/>
+                </a:solidFill>
+                <a:latin typeface="Calibri"/>
+                <a:cs typeface="Calibri"/>
+              </a:rPr>
+              <a:t>is</a:t>
+            </a:r>
+            <a:r>
+              <a:rPr sz="1200" spc="20" dirty="0">
+                <a:solidFill>
+                  <a:srgbClr val="202429"/>
+                </a:solidFill>
+                <a:latin typeface="Calibri"/>
+                <a:cs typeface="Calibri"/>
+              </a:rPr>
+              <a:t> </a:t>
+            </a:r>
+            <a:r>
+              <a:rPr sz="1200" dirty="0">
+                <a:solidFill>
+                  <a:srgbClr val="202429"/>
+                </a:solidFill>
+                <a:latin typeface="Calibri"/>
+                <a:cs typeface="Calibri"/>
+              </a:rPr>
+              <a:t>realistic</a:t>
+            </a:r>
+            <a:r>
+              <a:rPr sz="1200" spc="-10" dirty="0">
+                <a:solidFill>
+                  <a:srgbClr val="202429"/>
+                </a:solidFill>
+                <a:latin typeface="Calibri"/>
+                <a:cs typeface="Calibri"/>
+              </a:rPr>
+              <a:t> </a:t>
+            </a:r>
+            <a:r>
+              <a:rPr sz="1200" dirty="0">
+                <a:solidFill>
+                  <a:srgbClr val="202429"/>
+                </a:solidFill>
+                <a:latin typeface="Calibri"/>
+                <a:cs typeface="Calibri"/>
+              </a:rPr>
+              <a:t>and</a:t>
+            </a:r>
+            <a:r>
+              <a:rPr sz="1200" spc="-30" dirty="0">
+                <a:solidFill>
+                  <a:srgbClr val="202429"/>
+                </a:solidFill>
+                <a:latin typeface="Calibri"/>
+                <a:cs typeface="Calibri"/>
+              </a:rPr>
+              <a:t> </a:t>
+            </a:r>
+            <a:r>
+              <a:rPr sz="1200" dirty="0">
+                <a:solidFill>
+                  <a:srgbClr val="202429"/>
+                </a:solidFill>
+                <a:latin typeface="Calibri"/>
+                <a:cs typeface="Calibri"/>
+              </a:rPr>
+              <a:t>green</a:t>
+            </a:r>
+            <a:r>
+              <a:rPr sz="1200" spc="-30" dirty="0">
+                <a:solidFill>
+                  <a:srgbClr val="202429"/>
+                </a:solidFill>
+                <a:latin typeface="Calibri"/>
+                <a:cs typeface="Calibri"/>
+              </a:rPr>
+              <a:t> </a:t>
+            </a:r>
+            <a:r>
+              <a:rPr sz="1200" dirty="0">
+                <a:solidFill>
+                  <a:srgbClr val="202429"/>
+                </a:solidFill>
+                <a:latin typeface="Calibri"/>
+                <a:cs typeface="Calibri"/>
+              </a:rPr>
+              <a:t>is</a:t>
+            </a:r>
+            <a:r>
+              <a:rPr sz="1200" spc="-15" dirty="0">
+                <a:solidFill>
+                  <a:srgbClr val="202429"/>
+                </a:solidFill>
+                <a:latin typeface="Calibri"/>
+                <a:cs typeface="Calibri"/>
+              </a:rPr>
+              <a:t> </a:t>
+            </a:r>
+            <a:r>
+              <a:rPr sz="1200" spc="-10" dirty="0">
+                <a:solidFill>
+                  <a:srgbClr val="202429"/>
+                </a:solidFill>
+                <a:latin typeface="Calibri"/>
+                <a:cs typeface="Calibri"/>
+              </a:rPr>
+              <a:t>optimistic).</a:t>
+            </a:r>
+            <a:r>
+              <a:rPr sz="1200" spc="-30" dirty="0">
+                <a:solidFill>
+                  <a:srgbClr val="202429"/>
+                </a:solidFill>
+                <a:latin typeface="Calibri"/>
+                <a:cs typeface="Calibri"/>
+              </a:rPr>
+              <a:t> </a:t>
+            </a:r>
+            <a:r>
+              <a:rPr sz="1200" dirty="0">
+                <a:solidFill>
+                  <a:srgbClr val="202429"/>
+                </a:solidFill>
+                <a:latin typeface="Calibri"/>
+                <a:cs typeface="Calibri"/>
+              </a:rPr>
+              <a:t>Credit:</a:t>
+            </a:r>
+            <a:r>
+              <a:rPr sz="1200" spc="-40" dirty="0">
+                <a:solidFill>
+                  <a:srgbClr val="202429"/>
+                </a:solidFill>
+                <a:latin typeface="Calibri"/>
+                <a:cs typeface="Calibri"/>
+              </a:rPr>
+              <a:t> </a:t>
+            </a:r>
+            <a:r>
+              <a:rPr sz="1200" spc="-10" dirty="0">
+                <a:solidFill>
+                  <a:srgbClr val="202429"/>
+                </a:solidFill>
+                <a:latin typeface="Calibri"/>
+                <a:cs typeface="Calibri"/>
+              </a:rPr>
+              <a:t>Copernicus </a:t>
+            </a:r>
+            <a:r>
+              <a:rPr sz="1200" dirty="0">
+                <a:solidFill>
+                  <a:srgbClr val="202429"/>
+                </a:solidFill>
+                <a:latin typeface="Calibri"/>
+                <a:cs typeface="Calibri"/>
+              </a:rPr>
+              <a:t>Climate</a:t>
+            </a:r>
+            <a:r>
+              <a:rPr sz="1200" spc="-45" dirty="0">
+                <a:solidFill>
+                  <a:srgbClr val="202429"/>
+                </a:solidFill>
+                <a:latin typeface="Calibri"/>
+                <a:cs typeface="Calibri"/>
+              </a:rPr>
+              <a:t> </a:t>
+            </a:r>
+            <a:r>
+              <a:rPr sz="1200" dirty="0">
+                <a:solidFill>
+                  <a:srgbClr val="202429"/>
+                </a:solidFill>
+                <a:latin typeface="Calibri"/>
+                <a:cs typeface="Calibri"/>
+              </a:rPr>
+              <a:t>Change</a:t>
+            </a:r>
+            <a:r>
+              <a:rPr sz="1200" spc="-55" dirty="0">
+                <a:solidFill>
+                  <a:srgbClr val="202429"/>
+                </a:solidFill>
+                <a:latin typeface="Calibri"/>
+                <a:cs typeface="Calibri"/>
+              </a:rPr>
+              <a:t> </a:t>
+            </a:r>
+            <a:r>
+              <a:rPr sz="1200" dirty="0">
+                <a:solidFill>
+                  <a:srgbClr val="202429"/>
+                </a:solidFill>
+                <a:latin typeface="Calibri"/>
+                <a:cs typeface="Calibri"/>
+              </a:rPr>
+              <a:t>Service,</a:t>
+            </a:r>
+            <a:r>
+              <a:rPr sz="1200" spc="-30" dirty="0">
+                <a:solidFill>
+                  <a:srgbClr val="202429"/>
+                </a:solidFill>
+                <a:latin typeface="Calibri"/>
+                <a:cs typeface="Calibri"/>
+              </a:rPr>
+              <a:t> </a:t>
+            </a:r>
+            <a:r>
+              <a:rPr sz="1200" spc="-10" dirty="0">
+                <a:solidFill>
+                  <a:srgbClr val="202429"/>
+                </a:solidFill>
+                <a:latin typeface="Calibri"/>
+                <a:cs typeface="Calibri"/>
+              </a:rPr>
+              <a:t>ECMWF.</a:t>
+            </a:r>
+            <a:endParaRPr sz="1200" dirty="0">
+              <a:latin typeface="Calibri"/>
+              <a:cs typeface="Calibri"/>
+            </a:endParaRPr>
+          </a:p>
+        </p:txBody>
+      </p:sp>
+      <p:pic>
+        <p:nvPicPr>
+          <p:cNvPr id="16" name="object 8">
+            <a:extLst>
+              <a:ext uri="{FF2B5EF4-FFF2-40B4-BE49-F238E27FC236}">
+                <a16:creationId xmlns:a16="http://schemas.microsoft.com/office/drawing/2014/main" id="{68F33FEA-C47C-CBA9-5603-B2F8EF0613EF}"/>
+              </a:ext>
+            </a:extLst>
+          </p:cNvPr>
+          <p:cNvPicPr/>
+          <p:nvPr/>
+        </p:nvPicPr>
+        <p:blipFill>
+          <a:blip r:embed="rId3" cstate="print"/>
+          <a:stretch>
+            <a:fillRect/>
+          </a:stretch>
+        </p:blipFill>
+        <p:spPr>
+          <a:xfrm>
+            <a:off x="7606283" y="2942993"/>
+            <a:ext cx="4234102" cy="1522906"/>
+          </a:xfrm>
+          <a:prstGeom prst="rect">
+            <a:avLst/>
+          </a:prstGeom>
+        </p:spPr>
+      </p:pic>
+      <p:sp>
+        <p:nvSpPr>
+          <p:cNvPr id="17" name="object 9">
+            <a:extLst>
+              <a:ext uri="{FF2B5EF4-FFF2-40B4-BE49-F238E27FC236}">
+                <a16:creationId xmlns:a16="http://schemas.microsoft.com/office/drawing/2014/main" id="{A0432627-36D3-A05C-8124-A7342B62B71C}"/>
+              </a:ext>
+            </a:extLst>
+          </p:cNvPr>
+          <p:cNvSpPr txBox="1"/>
+          <p:nvPr/>
+        </p:nvSpPr>
+        <p:spPr>
+          <a:xfrm>
+            <a:off x="8414766" y="5677916"/>
+            <a:ext cx="2545715" cy="208279"/>
+          </a:xfrm>
+          <a:prstGeom prst="rect">
+            <a:avLst/>
+          </a:prstGeom>
+        </p:spPr>
+        <p:txBody>
+          <a:bodyPr vert="horz" wrap="square" lIns="0" tIns="12700" rIns="0" bIns="0" rtlCol="0">
+            <a:spAutoFit/>
+          </a:bodyPr>
+          <a:lstStyle/>
+          <a:p>
+            <a:pPr marL="12700">
+              <a:lnSpc>
+                <a:spcPct val="100000"/>
+              </a:lnSpc>
+              <a:spcBef>
+                <a:spcPts val="100"/>
+              </a:spcBef>
+            </a:pPr>
+            <a:r>
+              <a:rPr sz="1200" dirty="0">
+                <a:solidFill>
+                  <a:srgbClr val="202429"/>
+                </a:solidFill>
+                <a:latin typeface="Calibri"/>
+                <a:cs typeface="Calibri"/>
+              </a:rPr>
+              <a:t>Relation</a:t>
+            </a:r>
+            <a:r>
+              <a:rPr sz="1200" spc="-35" dirty="0">
+                <a:solidFill>
+                  <a:srgbClr val="202429"/>
+                </a:solidFill>
+                <a:latin typeface="Calibri"/>
+                <a:cs typeface="Calibri"/>
+              </a:rPr>
+              <a:t> </a:t>
+            </a:r>
+            <a:r>
+              <a:rPr sz="1200" dirty="0">
+                <a:solidFill>
+                  <a:srgbClr val="202429"/>
+                </a:solidFill>
+                <a:latin typeface="Calibri"/>
+                <a:cs typeface="Calibri"/>
+              </a:rPr>
+              <a:t>between</a:t>
+            </a:r>
+            <a:r>
+              <a:rPr sz="1200" spc="-35" dirty="0">
+                <a:solidFill>
+                  <a:srgbClr val="202429"/>
+                </a:solidFill>
+                <a:latin typeface="Calibri"/>
+                <a:cs typeface="Calibri"/>
+              </a:rPr>
+              <a:t> </a:t>
+            </a:r>
+            <a:r>
+              <a:rPr sz="1200" dirty="0">
+                <a:solidFill>
+                  <a:srgbClr val="202429"/>
+                </a:solidFill>
+                <a:latin typeface="Calibri"/>
+                <a:cs typeface="Calibri"/>
+              </a:rPr>
+              <a:t>CMIP</a:t>
+            </a:r>
+            <a:r>
+              <a:rPr sz="1200" spc="-40" dirty="0">
+                <a:solidFill>
+                  <a:srgbClr val="202429"/>
+                </a:solidFill>
+                <a:latin typeface="Calibri"/>
+                <a:cs typeface="Calibri"/>
+              </a:rPr>
+              <a:t> </a:t>
+            </a:r>
+            <a:r>
+              <a:rPr sz="1200" dirty="0">
+                <a:solidFill>
+                  <a:srgbClr val="202429"/>
+                </a:solidFill>
+                <a:latin typeface="Calibri"/>
+                <a:cs typeface="Calibri"/>
+              </a:rPr>
+              <a:t>and</a:t>
+            </a:r>
+            <a:r>
+              <a:rPr sz="1200" spc="-45" dirty="0">
+                <a:solidFill>
+                  <a:srgbClr val="202429"/>
+                </a:solidFill>
+                <a:latin typeface="Calibri"/>
+                <a:cs typeface="Calibri"/>
+              </a:rPr>
+              <a:t> </a:t>
+            </a:r>
+            <a:r>
+              <a:rPr sz="1200" dirty="0">
+                <a:solidFill>
+                  <a:srgbClr val="202429"/>
+                </a:solidFill>
+                <a:latin typeface="Calibri"/>
+                <a:cs typeface="Calibri"/>
+              </a:rPr>
+              <a:t>IPCC</a:t>
+            </a:r>
+            <a:r>
+              <a:rPr sz="1200" spc="-35" dirty="0">
+                <a:solidFill>
+                  <a:srgbClr val="202429"/>
+                </a:solidFill>
+                <a:latin typeface="Calibri"/>
+                <a:cs typeface="Calibri"/>
+              </a:rPr>
+              <a:t> </a:t>
+            </a:r>
+            <a:r>
+              <a:rPr sz="1200" spc="-10" dirty="0">
+                <a:solidFill>
+                  <a:srgbClr val="202429"/>
+                </a:solidFill>
+                <a:latin typeface="Calibri"/>
+                <a:cs typeface="Calibri"/>
+              </a:rPr>
+              <a:t>reports</a:t>
+            </a:r>
+            <a:endParaRPr sz="1200">
+              <a:latin typeface="Calibri"/>
+              <a:cs typeface="Calibri"/>
+            </a:endParaRPr>
+          </a:p>
+        </p:txBody>
+      </p:sp>
+    </p:spTree>
+    <p:extLst>
+      <p:ext uri="{BB962C8B-B14F-4D97-AF65-F5344CB8AC3E}">
+        <p14:creationId xmlns:p14="http://schemas.microsoft.com/office/powerpoint/2010/main" val="1319629436"/>
+      </p:ext>
+    </p:extLst>
+  </p:cSld>
+  <p:clrMapOvr>
+    <a:masterClrMapping/>
+  </p:clrMapOvr>
+</p:sld>
+</file>
+
+<file path=ppt/slides/slide18.xml><?xml version="1.0" encoding="utf-8"?>
+<p:sld xmlns:a="http://schemas.openxmlformats.org/drawingml/2006/main" xmlns:r="http://schemas.openxmlformats.org/officeDocument/2006/relationships" xmlns:p="http://schemas.openxmlformats.org/presentationml/2006/main">
+  <p:cSld>
+    <p:spTree>
+      <p:nvGrpSpPr>
+        <p:cNvPr id="1" name="">
+          <a:extLst>
+            <a:ext uri="{FF2B5EF4-FFF2-40B4-BE49-F238E27FC236}">
+              <a16:creationId xmlns:a16="http://schemas.microsoft.com/office/drawing/2014/main" id="{141F2D25-2655-B77E-A649-1380C66EF4C2}"/>
+            </a:ext>
+          </a:extLst>
+        </p:cNvPr>
+        <p:cNvGrpSpPr/>
+        <p:nvPr/>
+      </p:nvGrpSpPr>
+      <p:grpSpPr>
+        <a:xfrm>
+          <a:off x="0" y="0"/>
+          <a:ext cx="0" cy="0"/>
+          <a:chOff x="0" y="0"/>
+          <a:chExt cx="0" cy="0"/>
+        </a:xfrm>
+      </p:grpSpPr>
+      <p:sp>
+        <p:nvSpPr>
+          <p:cNvPr id="2" name="Title 1">
+            <a:extLst>
+              <a:ext uri="{FF2B5EF4-FFF2-40B4-BE49-F238E27FC236}">
+                <a16:creationId xmlns:a16="http://schemas.microsoft.com/office/drawing/2014/main" id="{ABAD76EA-F026-693A-1D02-19F1D40EF8B6}"/>
+              </a:ext>
+            </a:extLst>
+          </p:cNvPr>
+          <p:cNvSpPr>
+            <a:spLocks noGrp="1"/>
+          </p:cNvSpPr>
+          <p:nvPr>
+            <p:ph type="title"/>
+          </p:nvPr>
+        </p:nvSpPr>
+        <p:spPr>
+          <a:xfrm>
+            <a:off x="582983" y="512502"/>
+            <a:ext cx="11208272" cy="1243578"/>
+          </a:xfrm>
+        </p:spPr>
+        <p:txBody>
+          <a:bodyPr>
+            <a:noAutofit/>
+          </a:bodyPr>
+          <a:lstStyle/>
+          <a:p>
+            <a:r>
+              <a:rPr lang="en-US" sz="2900" b="1" dirty="0">
+                <a:solidFill>
+                  <a:srgbClr val="0070C0"/>
+                </a:solidFill>
+                <a:latin typeface="Arial" panose="020B0604020202020204" pitchFamily="34" charset="0"/>
+                <a:cs typeface="Arial" panose="020B0604020202020204" pitchFamily="34" charset="0"/>
+              </a:rPr>
+              <a:t>Representative Concentration Pathways (RCPs)</a:t>
+            </a:r>
+          </a:p>
+        </p:txBody>
+      </p:sp>
+      <p:grpSp>
+        <p:nvGrpSpPr>
+          <p:cNvPr id="6" name="Group 5">
+            <a:extLst>
+              <a:ext uri="{FF2B5EF4-FFF2-40B4-BE49-F238E27FC236}">
+                <a16:creationId xmlns:a16="http://schemas.microsoft.com/office/drawing/2014/main" id="{DD27957B-BF63-1405-C061-D29D951CE786}"/>
+              </a:ext>
+            </a:extLst>
+          </p:cNvPr>
+          <p:cNvGrpSpPr/>
+          <p:nvPr/>
+        </p:nvGrpSpPr>
+        <p:grpSpPr>
+          <a:xfrm>
+            <a:off x="-16329" y="-38779"/>
+            <a:ext cx="12393386" cy="316366"/>
+            <a:chOff x="-16329" y="5228994"/>
+            <a:chExt cx="12208329" cy="575436"/>
+          </a:xfrm>
+        </p:grpSpPr>
+        <p:sp>
+          <p:nvSpPr>
+            <p:cNvPr id="8" name="Rectangle 7">
+              <a:extLst>
+                <a:ext uri="{FF2B5EF4-FFF2-40B4-BE49-F238E27FC236}">
+                  <a16:creationId xmlns:a16="http://schemas.microsoft.com/office/drawing/2014/main" id="{A52A2414-935C-40F8-99E8-C13946A2B157}"/>
+                </a:ext>
+              </a:extLst>
+            </p:cNvPr>
+            <p:cNvSpPr/>
+            <p:nvPr/>
+          </p:nvSpPr>
+          <p:spPr>
+            <a:xfrm>
+              <a:off x="-16329" y="5228994"/>
+              <a:ext cx="10205358" cy="575436"/>
+            </a:xfrm>
+            <a:prstGeom prst="rect">
+              <a:avLst/>
+            </a:prstGeom>
+            <a:solidFill>
+              <a:schemeClr val="accent5">
+                <a:lumMod val="50000"/>
+              </a:schemeClr>
+            </a:solidFill>
+            <a:ln>
+              <a:noFill/>
+            </a:ln>
+          </p:spPr>
+          <p:style>
+            <a:lnRef idx="2">
+              <a:schemeClr val="accent1">
+                <a:shade val="50000"/>
+              </a:schemeClr>
+            </a:lnRef>
+            <a:fillRef idx="1">
+              <a:schemeClr val="accent1"/>
+            </a:fillRef>
+            <a:effectRef idx="0">
+              <a:schemeClr val="accent1"/>
+            </a:effectRef>
+            <a:fontRef idx="minor">
+              <a:schemeClr val="lt1"/>
+            </a:fontRef>
+          </p:style>
+          <p:txBody>
+            <a:bodyPr rtlCol="0" anchor="ctr"/>
+            <a:lstStyle/>
+            <a:p>
+              <a:pPr algn="ctr"/>
+              <a:endParaRPr lang="en-US"/>
+            </a:p>
+          </p:txBody>
+        </p:sp>
+        <p:sp>
+          <p:nvSpPr>
+            <p:cNvPr id="9" name="Rectangle 8">
+              <a:extLst>
+                <a:ext uri="{FF2B5EF4-FFF2-40B4-BE49-F238E27FC236}">
+                  <a16:creationId xmlns:a16="http://schemas.microsoft.com/office/drawing/2014/main" id="{C52710C7-1CB9-59E8-933E-13EDB9CF2D45}"/>
+                </a:ext>
+              </a:extLst>
+            </p:cNvPr>
+            <p:cNvSpPr/>
+            <p:nvPr/>
+          </p:nvSpPr>
+          <p:spPr>
+            <a:xfrm>
+              <a:off x="10189029" y="5228994"/>
+              <a:ext cx="2002971" cy="575435"/>
+            </a:xfrm>
+            <a:prstGeom prst="rect">
+              <a:avLst/>
+            </a:prstGeom>
+            <a:solidFill>
+              <a:schemeClr val="accent4"/>
+            </a:solidFill>
+            <a:ln>
+              <a:noFill/>
+            </a:ln>
+          </p:spPr>
+          <p:style>
+            <a:lnRef idx="2">
+              <a:schemeClr val="accent1">
+                <a:shade val="50000"/>
+              </a:schemeClr>
+            </a:lnRef>
+            <a:fillRef idx="1">
+              <a:schemeClr val="accent1"/>
+            </a:fillRef>
+            <a:effectRef idx="0">
+              <a:schemeClr val="accent1"/>
+            </a:effectRef>
+            <a:fontRef idx="minor">
+              <a:schemeClr val="lt1"/>
+            </a:fontRef>
+          </p:style>
+          <p:txBody>
+            <a:bodyPr rtlCol="0" anchor="ctr"/>
+            <a:lstStyle/>
+            <a:p>
+              <a:pPr algn="ctr"/>
+              <a:endParaRPr lang="en-US"/>
+            </a:p>
+          </p:txBody>
+        </p:sp>
+      </p:grpSp>
+      <p:cxnSp>
+        <p:nvCxnSpPr>
+          <p:cNvPr id="10" name="Connecteur droit 6">
+            <a:extLst>
+              <a:ext uri="{FF2B5EF4-FFF2-40B4-BE49-F238E27FC236}">
+                <a16:creationId xmlns:a16="http://schemas.microsoft.com/office/drawing/2014/main" id="{BAA2B156-117A-96E7-AE29-1285BE80CA7F}"/>
+              </a:ext>
+            </a:extLst>
+          </p:cNvPr>
+          <p:cNvCxnSpPr>
+            <a:cxnSpLocks/>
+          </p:cNvCxnSpPr>
+          <p:nvPr/>
+        </p:nvCxnSpPr>
+        <p:spPr>
+          <a:xfrm>
+            <a:off x="-16329" y="395044"/>
+            <a:ext cx="12208329" cy="0"/>
+          </a:xfrm>
+          <a:prstGeom prst="line">
+            <a:avLst/>
+          </a:prstGeom>
+          <a:ln w="28575"/>
+        </p:spPr>
+        <p:style>
+          <a:lnRef idx="1">
+            <a:schemeClr val="accent1"/>
+          </a:lnRef>
+          <a:fillRef idx="0">
+            <a:schemeClr val="accent1"/>
+          </a:fillRef>
+          <a:effectRef idx="0">
+            <a:schemeClr val="accent1"/>
+          </a:effectRef>
+          <a:fontRef idx="minor">
+            <a:schemeClr val="tx1"/>
+          </a:fontRef>
+        </p:style>
+      </p:cxnSp>
+      <p:sp>
+        <p:nvSpPr>
+          <p:cNvPr id="3" name="object 4">
+            <a:extLst>
+              <a:ext uri="{FF2B5EF4-FFF2-40B4-BE49-F238E27FC236}">
+                <a16:creationId xmlns:a16="http://schemas.microsoft.com/office/drawing/2014/main" id="{F900CE6E-E3CC-4C1F-30D0-C61D2BD3DF1D}"/>
+              </a:ext>
+            </a:extLst>
+          </p:cNvPr>
+          <p:cNvSpPr txBox="1"/>
+          <p:nvPr/>
+        </p:nvSpPr>
+        <p:spPr>
+          <a:xfrm>
+            <a:off x="400745" y="1384703"/>
+            <a:ext cx="11658600" cy="1671955"/>
+          </a:xfrm>
+          <a:prstGeom prst="rect">
+            <a:avLst/>
+          </a:prstGeom>
+        </p:spPr>
+        <p:txBody>
+          <a:bodyPr vert="horz" wrap="square" lIns="0" tIns="149860" rIns="0" bIns="0" rtlCol="0">
+            <a:spAutoFit/>
+          </a:bodyPr>
+          <a:lstStyle/>
+          <a:p>
+            <a:pPr marL="324485" indent="-286385">
+              <a:lnSpc>
+                <a:spcPct val="100000"/>
+              </a:lnSpc>
+              <a:spcBef>
+                <a:spcPts val="1180"/>
+              </a:spcBef>
+              <a:buFont typeface="Wingdings"/>
+              <a:buChar char=""/>
+              <a:tabLst>
+                <a:tab pos="324485" algn="l"/>
+              </a:tabLst>
+            </a:pPr>
+            <a:r>
+              <a:rPr sz="1800" dirty="0">
+                <a:latin typeface="Calibri"/>
+                <a:cs typeface="Calibri"/>
+              </a:rPr>
+              <a:t>CMIP5</a:t>
+            </a:r>
+            <a:r>
+              <a:rPr sz="1800" spc="-50" dirty="0">
+                <a:latin typeface="Calibri"/>
+                <a:cs typeface="Calibri"/>
+              </a:rPr>
+              <a:t> </a:t>
+            </a:r>
+            <a:r>
+              <a:rPr sz="1800" dirty="0">
+                <a:latin typeface="Calibri"/>
+                <a:cs typeface="Calibri"/>
+              </a:rPr>
+              <a:t>models</a:t>
+            </a:r>
+            <a:r>
+              <a:rPr sz="1800" spc="-30" dirty="0">
+                <a:latin typeface="Calibri"/>
+                <a:cs typeface="Calibri"/>
+              </a:rPr>
+              <a:t> </a:t>
+            </a:r>
+            <a:r>
+              <a:rPr sz="1800" spc="-10" dirty="0">
+                <a:latin typeface="Calibri"/>
+                <a:cs typeface="Calibri"/>
+              </a:rPr>
+              <a:t>considered</a:t>
+            </a:r>
+            <a:r>
+              <a:rPr sz="1800" spc="-30" dirty="0">
+                <a:latin typeface="Calibri"/>
+                <a:cs typeface="Calibri"/>
+              </a:rPr>
+              <a:t> </a:t>
+            </a:r>
+            <a:r>
+              <a:rPr sz="1800" spc="-10" dirty="0">
+                <a:latin typeface="Calibri"/>
+                <a:cs typeface="Calibri"/>
+              </a:rPr>
+              <a:t>different</a:t>
+            </a:r>
+            <a:r>
+              <a:rPr sz="1800" spc="-50" dirty="0">
+                <a:latin typeface="Calibri"/>
+                <a:cs typeface="Calibri"/>
+              </a:rPr>
+              <a:t> </a:t>
+            </a:r>
+            <a:r>
+              <a:rPr sz="1800" spc="-10" dirty="0">
+                <a:latin typeface="Calibri"/>
+                <a:cs typeface="Calibri"/>
+              </a:rPr>
+              <a:t>radiative</a:t>
+            </a:r>
+            <a:r>
+              <a:rPr sz="1800" spc="-45" dirty="0">
+                <a:latin typeface="Calibri"/>
+                <a:cs typeface="Calibri"/>
+              </a:rPr>
+              <a:t> </a:t>
+            </a:r>
+            <a:r>
+              <a:rPr sz="1800" dirty="0">
+                <a:latin typeface="Calibri"/>
+                <a:cs typeface="Calibri"/>
+              </a:rPr>
+              <a:t>forcings</a:t>
+            </a:r>
+            <a:r>
+              <a:rPr sz="1800" spc="-45" dirty="0">
+                <a:latin typeface="Calibri"/>
+                <a:cs typeface="Calibri"/>
+              </a:rPr>
+              <a:t> </a:t>
+            </a:r>
+            <a:r>
+              <a:rPr sz="1800" dirty="0">
+                <a:latin typeface="Calibri"/>
+                <a:cs typeface="Calibri"/>
+              </a:rPr>
+              <a:t>(due</a:t>
+            </a:r>
+            <a:r>
+              <a:rPr sz="1800" spc="-25" dirty="0">
+                <a:latin typeface="Calibri"/>
+                <a:cs typeface="Calibri"/>
+              </a:rPr>
+              <a:t> </a:t>
+            </a:r>
+            <a:r>
+              <a:rPr sz="1800" dirty="0">
+                <a:latin typeface="Calibri"/>
+                <a:cs typeface="Calibri"/>
+              </a:rPr>
+              <a:t>to</a:t>
+            </a:r>
+            <a:r>
+              <a:rPr sz="1800" spc="-50" dirty="0">
+                <a:latin typeface="Calibri"/>
+                <a:cs typeface="Calibri"/>
+              </a:rPr>
+              <a:t> </a:t>
+            </a:r>
+            <a:r>
+              <a:rPr sz="1800" dirty="0">
+                <a:latin typeface="Calibri"/>
+                <a:cs typeface="Calibri"/>
+              </a:rPr>
+              <a:t>changes</a:t>
+            </a:r>
+            <a:r>
+              <a:rPr sz="1800" spc="-50" dirty="0">
+                <a:latin typeface="Calibri"/>
+                <a:cs typeface="Calibri"/>
+              </a:rPr>
+              <a:t> </a:t>
+            </a:r>
+            <a:r>
+              <a:rPr sz="1800" dirty="0">
+                <a:latin typeface="Calibri"/>
+                <a:cs typeface="Calibri"/>
+              </a:rPr>
+              <a:t>in</a:t>
+            </a:r>
+            <a:r>
+              <a:rPr sz="1800" spc="-35" dirty="0">
+                <a:latin typeface="Calibri"/>
+                <a:cs typeface="Calibri"/>
+              </a:rPr>
+              <a:t> </a:t>
+            </a:r>
+            <a:r>
+              <a:rPr sz="1800" dirty="0">
+                <a:latin typeface="Calibri"/>
+                <a:cs typeface="Calibri"/>
+              </a:rPr>
+              <a:t>CO</a:t>
+            </a:r>
+            <a:r>
+              <a:rPr sz="1600" dirty="0">
+                <a:latin typeface="Calibri"/>
+                <a:cs typeface="Calibri"/>
+              </a:rPr>
+              <a:t>2</a:t>
+            </a:r>
+            <a:r>
+              <a:rPr sz="1800" dirty="0">
+                <a:latin typeface="Calibri"/>
+                <a:cs typeface="Calibri"/>
+              </a:rPr>
+              <a:t>,</a:t>
+            </a:r>
+            <a:r>
+              <a:rPr sz="1800" spc="-40" dirty="0">
+                <a:latin typeface="Calibri"/>
+                <a:cs typeface="Calibri"/>
+              </a:rPr>
+              <a:t> </a:t>
+            </a:r>
+            <a:r>
+              <a:rPr sz="1800" dirty="0">
+                <a:latin typeface="Calibri"/>
+                <a:cs typeface="Calibri"/>
+              </a:rPr>
+              <a:t>methane,</a:t>
+            </a:r>
+            <a:r>
+              <a:rPr sz="1800" spc="-45" dirty="0">
+                <a:latin typeface="Calibri"/>
+                <a:cs typeface="Calibri"/>
+              </a:rPr>
+              <a:t> </a:t>
+            </a:r>
+            <a:r>
+              <a:rPr sz="1800" dirty="0">
+                <a:latin typeface="Calibri"/>
+                <a:cs typeface="Calibri"/>
+              </a:rPr>
+              <a:t>and</a:t>
+            </a:r>
+            <a:r>
+              <a:rPr sz="1800" spc="-30" dirty="0">
+                <a:latin typeface="Calibri"/>
+                <a:cs typeface="Calibri"/>
+              </a:rPr>
+              <a:t> </a:t>
+            </a:r>
+            <a:r>
+              <a:rPr sz="1800" spc="-10" dirty="0">
+                <a:latin typeface="Calibri"/>
+                <a:cs typeface="Calibri"/>
+              </a:rPr>
+              <a:t>aerosol)</a:t>
+            </a:r>
+            <a:r>
+              <a:rPr sz="1800" spc="-45" dirty="0">
+                <a:latin typeface="Calibri"/>
+                <a:cs typeface="Calibri"/>
+              </a:rPr>
+              <a:t> </a:t>
+            </a:r>
+            <a:r>
+              <a:rPr sz="1800" dirty="0">
+                <a:latin typeface="Calibri"/>
+                <a:cs typeface="Calibri"/>
+              </a:rPr>
+              <a:t>spanning</a:t>
+            </a:r>
+            <a:r>
+              <a:rPr sz="1800" spc="-40" dirty="0">
+                <a:latin typeface="Calibri"/>
+                <a:cs typeface="Calibri"/>
+              </a:rPr>
+              <a:t> </a:t>
+            </a:r>
+            <a:r>
+              <a:rPr sz="1800" dirty="0">
+                <a:latin typeface="Calibri"/>
+                <a:cs typeface="Calibri"/>
+              </a:rPr>
+              <a:t>from</a:t>
+            </a:r>
+            <a:r>
+              <a:rPr sz="1800" spc="-45" dirty="0">
+                <a:latin typeface="Calibri"/>
+                <a:cs typeface="Calibri"/>
+              </a:rPr>
+              <a:t> </a:t>
+            </a:r>
+            <a:r>
+              <a:rPr sz="1800" dirty="0">
+                <a:latin typeface="Calibri"/>
+                <a:cs typeface="Calibri"/>
+              </a:rPr>
+              <a:t>2.6</a:t>
+            </a:r>
+            <a:r>
+              <a:rPr sz="1800" spc="-45" dirty="0">
+                <a:latin typeface="Calibri"/>
+                <a:cs typeface="Calibri"/>
+              </a:rPr>
+              <a:t> </a:t>
+            </a:r>
+            <a:r>
+              <a:rPr sz="1800" spc="-25" dirty="0">
+                <a:latin typeface="Calibri"/>
+                <a:cs typeface="Calibri"/>
+              </a:rPr>
+              <a:t>to</a:t>
+            </a:r>
+            <a:endParaRPr sz="1800" dirty="0">
+              <a:latin typeface="Calibri"/>
+              <a:cs typeface="Calibri"/>
+            </a:endParaRPr>
+          </a:p>
+          <a:p>
+            <a:pPr marL="324485">
+              <a:lnSpc>
+                <a:spcPct val="100000"/>
+              </a:lnSpc>
+              <a:spcBef>
+                <a:spcPts val="1080"/>
+              </a:spcBef>
+            </a:pPr>
+            <a:r>
+              <a:rPr sz="1800" dirty="0">
+                <a:latin typeface="Calibri"/>
+                <a:cs typeface="Calibri"/>
+              </a:rPr>
+              <a:t>8.5 </a:t>
+            </a:r>
+            <a:r>
+              <a:rPr sz="1800" spc="-20" dirty="0">
+                <a:latin typeface="Calibri"/>
+                <a:cs typeface="Calibri"/>
+              </a:rPr>
+              <a:t>W/m</a:t>
+            </a:r>
+            <a:r>
+              <a:rPr sz="1800" spc="-30" baseline="25462" dirty="0">
+                <a:latin typeface="Calibri"/>
+                <a:cs typeface="Calibri"/>
+              </a:rPr>
+              <a:t>2</a:t>
+            </a:r>
+            <a:endParaRPr sz="1800" baseline="25462" dirty="0">
+              <a:latin typeface="Calibri"/>
+              <a:cs typeface="Calibri"/>
+            </a:endParaRPr>
+          </a:p>
+          <a:p>
+            <a:pPr marL="323850" indent="-285750">
+              <a:lnSpc>
+                <a:spcPct val="100000"/>
+              </a:lnSpc>
+              <a:spcBef>
+                <a:spcPts val="1080"/>
+              </a:spcBef>
+              <a:buFont typeface="Wingdings"/>
+              <a:buChar char=""/>
+              <a:tabLst>
+                <a:tab pos="323850" algn="l"/>
+              </a:tabLst>
+            </a:pPr>
+            <a:r>
+              <a:rPr sz="1800" dirty="0">
+                <a:latin typeface="Calibri"/>
+                <a:cs typeface="Calibri"/>
+              </a:rPr>
+              <a:t>In</a:t>
+            </a:r>
+            <a:r>
+              <a:rPr sz="1800" spc="-45" dirty="0">
+                <a:latin typeface="Calibri"/>
+                <a:cs typeface="Calibri"/>
+              </a:rPr>
+              <a:t> </a:t>
+            </a:r>
+            <a:r>
+              <a:rPr sz="1800" dirty="0">
+                <a:latin typeface="Calibri"/>
+                <a:cs typeface="Calibri"/>
+              </a:rPr>
+              <a:t>other</a:t>
+            </a:r>
+            <a:r>
+              <a:rPr sz="1800" spc="-25" dirty="0">
+                <a:latin typeface="Calibri"/>
+                <a:cs typeface="Calibri"/>
+              </a:rPr>
+              <a:t> </a:t>
+            </a:r>
+            <a:r>
+              <a:rPr sz="1800" dirty="0">
+                <a:latin typeface="Calibri"/>
+                <a:cs typeface="Calibri"/>
+              </a:rPr>
+              <a:t>words,</a:t>
+            </a:r>
+            <a:r>
+              <a:rPr sz="1800" spc="-30" dirty="0">
+                <a:latin typeface="Calibri"/>
+                <a:cs typeface="Calibri"/>
+              </a:rPr>
+              <a:t> </a:t>
+            </a:r>
+            <a:r>
+              <a:rPr sz="1800" dirty="0">
+                <a:latin typeface="Calibri"/>
+                <a:cs typeface="Calibri"/>
+              </a:rPr>
+              <a:t>what</a:t>
+            </a:r>
+            <a:r>
+              <a:rPr sz="1800" spc="-30" dirty="0">
+                <a:latin typeface="Calibri"/>
+                <a:cs typeface="Calibri"/>
+              </a:rPr>
+              <a:t> </a:t>
+            </a:r>
+            <a:r>
+              <a:rPr sz="1800" dirty="0">
+                <a:latin typeface="Calibri"/>
+                <a:cs typeface="Calibri"/>
+              </a:rPr>
+              <a:t>would</a:t>
+            </a:r>
+            <a:r>
+              <a:rPr sz="1800" spc="-25" dirty="0">
+                <a:latin typeface="Calibri"/>
+                <a:cs typeface="Calibri"/>
+              </a:rPr>
+              <a:t> </a:t>
+            </a:r>
+            <a:r>
+              <a:rPr sz="1800" dirty="0">
+                <a:latin typeface="Calibri"/>
+                <a:cs typeface="Calibri"/>
+              </a:rPr>
+              <a:t>happen</a:t>
+            </a:r>
+            <a:r>
+              <a:rPr sz="1800" spc="-25" dirty="0">
+                <a:latin typeface="Calibri"/>
+                <a:cs typeface="Calibri"/>
+              </a:rPr>
+              <a:t> </a:t>
+            </a:r>
+            <a:r>
+              <a:rPr sz="1800" dirty="0">
+                <a:latin typeface="Calibri"/>
+                <a:cs typeface="Calibri"/>
+              </a:rPr>
+              <a:t>to</a:t>
+            </a:r>
+            <a:r>
+              <a:rPr sz="1800" spc="-35" dirty="0">
+                <a:latin typeface="Calibri"/>
+                <a:cs typeface="Calibri"/>
+              </a:rPr>
+              <a:t> </a:t>
+            </a:r>
+            <a:r>
+              <a:rPr sz="1800" dirty="0">
+                <a:latin typeface="Calibri"/>
+                <a:cs typeface="Calibri"/>
+              </a:rPr>
+              <a:t>the</a:t>
+            </a:r>
+            <a:r>
+              <a:rPr sz="1800" spc="-35" dirty="0">
+                <a:latin typeface="Calibri"/>
+                <a:cs typeface="Calibri"/>
+              </a:rPr>
+              <a:t> </a:t>
+            </a:r>
+            <a:r>
+              <a:rPr sz="1800" dirty="0">
+                <a:latin typeface="Calibri"/>
+                <a:cs typeface="Calibri"/>
+              </a:rPr>
+              <a:t>global</a:t>
+            </a:r>
+            <a:r>
+              <a:rPr sz="1800" spc="-20" dirty="0">
+                <a:latin typeface="Calibri"/>
+                <a:cs typeface="Calibri"/>
+              </a:rPr>
+              <a:t> </a:t>
+            </a:r>
+            <a:r>
+              <a:rPr sz="1800" dirty="0">
+                <a:latin typeface="Calibri"/>
+                <a:cs typeface="Calibri"/>
+              </a:rPr>
+              <a:t>climate</a:t>
+            </a:r>
+            <a:r>
+              <a:rPr sz="1800" spc="-25" dirty="0">
+                <a:latin typeface="Calibri"/>
+                <a:cs typeface="Calibri"/>
+              </a:rPr>
+              <a:t> </a:t>
+            </a:r>
+            <a:r>
+              <a:rPr sz="1800" dirty="0">
+                <a:latin typeface="Calibri"/>
+                <a:cs typeface="Calibri"/>
+              </a:rPr>
+              <a:t>with</a:t>
+            </a:r>
+            <a:r>
+              <a:rPr sz="1800" spc="-30" dirty="0">
+                <a:latin typeface="Calibri"/>
+                <a:cs typeface="Calibri"/>
+              </a:rPr>
+              <a:t> </a:t>
+            </a:r>
+            <a:r>
+              <a:rPr sz="1800" dirty="0">
+                <a:latin typeface="Calibri"/>
+                <a:cs typeface="Calibri"/>
+              </a:rPr>
+              <a:t>a</a:t>
+            </a:r>
+            <a:r>
+              <a:rPr sz="1800" spc="-30" dirty="0">
+                <a:latin typeface="Calibri"/>
+                <a:cs typeface="Calibri"/>
+              </a:rPr>
+              <a:t> </a:t>
+            </a:r>
+            <a:r>
+              <a:rPr sz="1800" dirty="0">
+                <a:latin typeface="Calibri"/>
+                <a:cs typeface="Calibri"/>
+              </a:rPr>
+              <a:t>certain</a:t>
+            </a:r>
+            <a:r>
+              <a:rPr sz="1800" spc="-5" dirty="0">
+                <a:latin typeface="Calibri"/>
+                <a:cs typeface="Calibri"/>
+              </a:rPr>
+              <a:t> </a:t>
+            </a:r>
+            <a:r>
+              <a:rPr sz="1800" u="sng" spc="-10" dirty="0">
+                <a:solidFill>
+                  <a:srgbClr val="0462C1"/>
+                </a:solidFill>
+                <a:uFill>
+                  <a:solidFill>
+                    <a:srgbClr val="0462C1"/>
+                  </a:solidFill>
+                </a:uFill>
+                <a:latin typeface="Calibri"/>
+                <a:cs typeface="Calibri"/>
+                <a:hlinkClick r:id="rId2"/>
+              </a:rPr>
+              <a:t>concentration</a:t>
+            </a:r>
+            <a:r>
+              <a:rPr sz="1800" u="sng" spc="-20" dirty="0">
+                <a:solidFill>
+                  <a:srgbClr val="0462C1"/>
+                </a:solidFill>
+                <a:uFill>
+                  <a:solidFill>
+                    <a:srgbClr val="0462C1"/>
+                  </a:solidFill>
+                </a:uFill>
+                <a:latin typeface="Calibri"/>
+                <a:cs typeface="Calibri"/>
+                <a:hlinkClick r:id="rId2"/>
+              </a:rPr>
+              <a:t> </a:t>
+            </a:r>
+            <a:r>
+              <a:rPr sz="1800" u="sng" dirty="0">
+                <a:solidFill>
+                  <a:srgbClr val="0462C1"/>
+                </a:solidFill>
+                <a:uFill>
+                  <a:solidFill>
+                    <a:srgbClr val="0462C1"/>
+                  </a:solidFill>
+                </a:uFill>
+                <a:latin typeface="Calibri"/>
+                <a:cs typeface="Calibri"/>
+                <a:hlinkClick r:id="rId2"/>
+              </a:rPr>
+              <a:t>of</a:t>
+            </a:r>
+            <a:r>
+              <a:rPr sz="1800" u="sng" spc="-25" dirty="0">
+                <a:solidFill>
+                  <a:srgbClr val="0462C1"/>
+                </a:solidFill>
+                <a:uFill>
+                  <a:solidFill>
+                    <a:srgbClr val="0462C1"/>
+                  </a:solidFill>
+                </a:uFill>
+                <a:latin typeface="Calibri"/>
+                <a:cs typeface="Calibri"/>
+                <a:hlinkClick r:id="rId2"/>
+              </a:rPr>
+              <a:t> </a:t>
+            </a:r>
+            <a:r>
+              <a:rPr sz="1800" u="sng" dirty="0">
+                <a:solidFill>
+                  <a:srgbClr val="0462C1"/>
+                </a:solidFill>
+                <a:uFill>
+                  <a:solidFill>
+                    <a:srgbClr val="0462C1"/>
+                  </a:solidFill>
+                </a:uFill>
+                <a:latin typeface="Calibri"/>
+                <a:cs typeface="Calibri"/>
+                <a:hlinkClick r:id="rId2"/>
+              </a:rPr>
+              <a:t>greenhouse</a:t>
+            </a:r>
+            <a:r>
+              <a:rPr sz="1800" u="sng" spc="-35" dirty="0">
+                <a:solidFill>
+                  <a:srgbClr val="0462C1"/>
+                </a:solidFill>
+                <a:uFill>
+                  <a:solidFill>
+                    <a:srgbClr val="0462C1"/>
+                  </a:solidFill>
+                </a:uFill>
+                <a:latin typeface="Calibri"/>
+                <a:cs typeface="Calibri"/>
+                <a:hlinkClick r:id="rId2"/>
+              </a:rPr>
+              <a:t> </a:t>
+            </a:r>
+            <a:r>
+              <a:rPr sz="1800" u="sng" spc="-10" dirty="0">
+                <a:solidFill>
+                  <a:srgbClr val="0462C1"/>
+                </a:solidFill>
+                <a:uFill>
+                  <a:solidFill>
+                    <a:srgbClr val="0462C1"/>
+                  </a:solidFill>
+                </a:uFill>
+                <a:latin typeface="Calibri"/>
+                <a:cs typeface="Calibri"/>
+                <a:hlinkClick r:id="rId2"/>
+              </a:rPr>
+              <a:t>gasses</a:t>
+            </a:r>
+            <a:r>
+              <a:rPr sz="1800" spc="-90" dirty="0">
+                <a:solidFill>
+                  <a:srgbClr val="0462C1"/>
+                </a:solidFill>
+                <a:latin typeface="Calibri"/>
+                <a:cs typeface="Calibri"/>
+              </a:rPr>
+              <a:t> </a:t>
+            </a:r>
+            <a:r>
+              <a:rPr sz="1800" dirty="0">
+                <a:latin typeface="Calibri"/>
+                <a:cs typeface="Calibri"/>
+              </a:rPr>
+              <a:t>in</a:t>
+            </a:r>
+            <a:r>
+              <a:rPr sz="1800" spc="-25" dirty="0">
+                <a:latin typeface="Calibri"/>
+                <a:cs typeface="Calibri"/>
+              </a:rPr>
+              <a:t> the</a:t>
+            </a:r>
+            <a:endParaRPr sz="1800" dirty="0">
+              <a:latin typeface="Calibri"/>
+              <a:cs typeface="Calibri"/>
+            </a:endParaRPr>
+          </a:p>
+          <a:p>
+            <a:pPr marL="324485">
+              <a:lnSpc>
+                <a:spcPct val="100000"/>
+              </a:lnSpc>
+              <a:spcBef>
+                <a:spcPts val="1080"/>
+              </a:spcBef>
+            </a:pPr>
+            <a:r>
+              <a:rPr sz="1800" spc="-10" dirty="0">
+                <a:latin typeface="Calibri"/>
+                <a:cs typeface="Calibri"/>
+              </a:rPr>
+              <a:t>atmosphere</a:t>
+            </a:r>
+            <a:endParaRPr sz="1800" dirty="0">
+              <a:latin typeface="Calibri"/>
+              <a:cs typeface="Calibri"/>
+            </a:endParaRPr>
+          </a:p>
+        </p:txBody>
+      </p:sp>
+      <p:sp>
+        <p:nvSpPr>
+          <p:cNvPr id="4" name="object 6">
+            <a:extLst>
+              <a:ext uri="{FF2B5EF4-FFF2-40B4-BE49-F238E27FC236}">
+                <a16:creationId xmlns:a16="http://schemas.microsoft.com/office/drawing/2014/main" id="{5F40E563-3B33-5FCD-8853-14957043CF5D}"/>
+              </a:ext>
+            </a:extLst>
+          </p:cNvPr>
+          <p:cNvSpPr txBox="1"/>
+          <p:nvPr/>
+        </p:nvSpPr>
+        <p:spPr>
+          <a:xfrm>
+            <a:off x="939123" y="5448322"/>
+            <a:ext cx="5623560" cy="1144270"/>
+          </a:xfrm>
+          <a:prstGeom prst="rect">
+            <a:avLst/>
+          </a:prstGeom>
+        </p:spPr>
+        <p:txBody>
+          <a:bodyPr vert="horz" wrap="square" lIns="0" tIns="145415" rIns="0" bIns="0" rtlCol="0">
+            <a:spAutoFit/>
+          </a:bodyPr>
+          <a:lstStyle/>
+          <a:p>
+            <a:pPr marL="12700">
+              <a:lnSpc>
+                <a:spcPct val="100000"/>
+              </a:lnSpc>
+              <a:spcBef>
+                <a:spcPts val="1145"/>
+              </a:spcBef>
+            </a:pPr>
+            <a:r>
+              <a:rPr sz="1600" b="1" spc="-10" dirty="0">
+                <a:latin typeface="Calibri"/>
+                <a:cs typeface="Calibri"/>
+              </a:rPr>
+              <a:t>Resources:</a:t>
+            </a:r>
+            <a:endParaRPr sz="1600">
+              <a:latin typeface="Calibri"/>
+              <a:cs typeface="Calibri"/>
+            </a:endParaRPr>
+          </a:p>
+          <a:p>
+            <a:pPr marL="12700" marR="5080">
+              <a:lnSpc>
+                <a:spcPct val="150000"/>
+              </a:lnSpc>
+              <a:spcBef>
+                <a:spcPts val="80"/>
+              </a:spcBef>
+            </a:pPr>
+            <a:r>
+              <a:rPr sz="1600" u="sng" spc="-20" dirty="0">
+                <a:solidFill>
+                  <a:srgbClr val="0462C1"/>
+                </a:solidFill>
+                <a:uFill>
+                  <a:solidFill>
+                    <a:srgbClr val="0462C1"/>
+                  </a:solidFill>
+                </a:uFill>
+                <a:latin typeface="Calibri"/>
+                <a:cs typeface="Calibri"/>
+                <a:hlinkClick r:id="rId3"/>
+              </a:rPr>
+              <a:t>https://link.springer.com/article/10.1007/s10584-</a:t>
+            </a:r>
+            <a:r>
+              <a:rPr sz="1600" u="sng" spc="-10" dirty="0">
+                <a:solidFill>
+                  <a:srgbClr val="0462C1"/>
+                </a:solidFill>
+                <a:uFill>
+                  <a:solidFill>
+                    <a:srgbClr val="0462C1"/>
+                  </a:solidFill>
+                </a:uFill>
+                <a:latin typeface="Calibri"/>
+                <a:cs typeface="Calibri"/>
+                <a:hlinkClick r:id="rId3"/>
+              </a:rPr>
+              <a:t>011-0148-</a:t>
+            </a:r>
+            <a:r>
+              <a:rPr sz="1600" u="sng" dirty="0">
+                <a:solidFill>
+                  <a:srgbClr val="0462C1"/>
+                </a:solidFill>
+                <a:uFill>
+                  <a:solidFill>
+                    <a:srgbClr val="0462C1"/>
+                  </a:solidFill>
+                </a:uFill>
+                <a:latin typeface="Calibri"/>
+                <a:cs typeface="Calibri"/>
+                <a:hlinkClick r:id="rId3"/>
+              </a:rPr>
+              <a:t>z</a:t>
+            </a:r>
+            <a:r>
+              <a:rPr sz="1600" spc="455" dirty="0">
+                <a:solidFill>
+                  <a:srgbClr val="0462C1"/>
+                </a:solidFill>
+                <a:latin typeface="Calibri"/>
+                <a:cs typeface="Calibri"/>
+              </a:rPr>
+              <a:t> </a:t>
+            </a:r>
+            <a:r>
+              <a:rPr sz="1600" spc="-10" dirty="0">
+                <a:latin typeface="Calibri"/>
+                <a:cs typeface="Calibri"/>
+              </a:rPr>
+              <a:t>(RCPs) </a:t>
+            </a:r>
+            <a:r>
+              <a:rPr sz="1600" u="sng" spc="-20" dirty="0">
+                <a:solidFill>
+                  <a:srgbClr val="0462C1"/>
+                </a:solidFill>
+                <a:uFill>
+                  <a:solidFill>
+                    <a:srgbClr val="0462C1"/>
+                  </a:solidFill>
+                </a:uFill>
+                <a:latin typeface="Calibri"/>
+                <a:cs typeface="Calibri"/>
+                <a:hlinkClick r:id="rId4"/>
+              </a:rPr>
+              <a:t>https://link.springer.com/article/10.1007/s10584-</a:t>
+            </a:r>
+            <a:r>
+              <a:rPr sz="1600" u="sng" spc="-10" dirty="0">
+                <a:solidFill>
+                  <a:srgbClr val="0462C1"/>
+                </a:solidFill>
+                <a:uFill>
+                  <a:solidFill>
+                    <a:srgbClr val="0462C1"/>
+                  </a:solidFill>
+                </a:uFill>
+                <a:latin typeface="Calibri"/>
+                <a:cs typeface="Calibri"/>
+                <a:hlinkClick r:id="rId4"/>
+              </a:rPr>
+              <a:t>013-0904-</a:t>
+            </a:r>
+            <a:r>
+              <a:rPr sz="1600" u="sng" dirty="0">
+                <a:solidFill>
+                  <a:srgbClr val="0462C1"/>
+                </a:solidFill>
+                <a:uFill>
+                  <a:solidFill>
+                    <a:srgbClr val="0462C1"/>
+                  </a:solidFill>
+                </a:uFill>
+                <a:latin typeface="Calibri"/>
+                <a:cs typeface="Calibri"/>
+                <a:hlinkClick r:id="rId4"/>
+              </a:rPr>
+              <a:t>3</a:t>
+            </a:r>
+            <a:r>
+              <a:rPr sz="1600" spc="450" dirty="0">
+                <a:solidFill>
+                  <a:srgbClr val="0462C1"/>
+                </a:solidFill>
+                <a:latin typeface="Calibri"/>
+                <a:cs typeface="Calibri"/>
+              </a:rPr>
+              <a:t> </a:t>
+            </a:r>
+            <a:r>
+              <a:rPr sz="1600" spc="-10" dirty="0">
+                <a:latin typeface="Calibri"/>
+                <a:cs typeface="Calibri"/>
+              </a:rPr>
+              <a:t>(SSPs)</a:t>
+            </a:r>
+            <a:endParaRPr sz="1600">
+              <a:latin typeface="Calibri"/>
+              <a:cs typeface="Calibri"/>
+            </a:endParaRPr>
+          </a:p>
+        </p:txBody>
+      </p:sp>
+      <p:graphicFrame>
+        <p:nvGraphicFramePr>
+          <p:cNvPr id="5" name="object 7">
+            <a:extLst>
+              <a:ext uri="{FF2B5EF4-FFF2-40B4-BE49-F238E27FC236}">
+                <a16:creationId xmlns:a16="http://schemas.microsoft.com/office/drawing/2014/main" id="{7A0D84EA-814A-43C2-4018-CC35EAA5E751}"/>
+              </a:ext>
+            </a:extLst>
+          </p:cNvPr>
+          <p:cNvGraphicFramePr>
+            <a:graphicFrameLocks noGrp="1"/>
+          </p:cNvGraphicFramePr>
+          <p:nvPr>
+            <p:extLst>
+              <p:ext uri="{D42A27DB-BD31-4B8C-83A1-F6EECF244321}">
+                <p14:modId xmlns:p14="http://schemas.microsoft.com/office/powerpoint/2010/main" val="2093588823"/>
+              </p:ext>
+            </p:extLst>
+          </p:nvPr>
+        </p:nvGraphicFramePr>
+        <p:xfrm>
+          <a:off x="1754082" y="3272939"/>
+          <a:ext cx="8127364" cy="2060575"/>
+        </p:xfrm>
+        <a:graphic>
+          <a:graphicData uri="http://schemas.openxmlformats.org/drawingml/2006/table">
+            <a:tbl>
+              <a:tblPr firstRow="1" bandRow="1">
+                <a:tableStyleId>{2D5ABB26-0587-4C30-8999-92F81FD0307C}</a:tableStyleId>
+              </a:tblPr>
+              <a:tblGrid>
+                <a:gridCol w="1068705">
+                  <a:extLst>
+                    <a:ext uri="{9D8B030D-6E8A-4147-A177-3AD203B41FA5}">
+                      <a16:colId xmlns:a16="http://schemas.microsoft.com/office/drawing/2014/main" val="20000"/>
+                    </a:ext>
+                  </a:extLst>
+                </a:gridCol>
+                <a:gridCol w="2144395">
+                  <a:extLst>
+                    <a:ext uri="{9D8B030D-6E8A-4147-A177-3AD203B41FA5}">
+                      <a16:colId xmlns:a16="http://schemas.microsoft.com/office/drawing/2014/main" val="20001"/>
+                    </a:ext>
+                  </a:extLst>
+                </a:gridCol>
+                <a:gridCol w="1360170">
+                  <a:extLst>
+                    <a:ext uri="{9D8B030D-6E8A-4147-A177-3AD203B41FA5}">
+                      <a16:colId xmlns:a16="http://schemas.microsoft.com/office/drawing/2014/main" val="20002"/>
+                    </a:ext>
+                  </a:extLst>
+                </a:gridCol>
+                <a:gridCol w="1875789">
+                  <a:extLst>
+                    <a:ext uri="{9D8B030D-6E8A-4147-A177-3AD203B41FA5}">
+                      <a16:colId xmlns:a16="http://schemas.microsoft.com/office/drawing/2014/main" val="20003"/>
+                    </a:ext>
+                  </a:extLst>
+                </a:gridCol>
+                <a:gridCol w="1678305">
+                  <a:extLst>
+                    <a:ext uri="{9D8B030D-6E8A-4147-A177-3AD203B41FA5}">
+                      <a16:colId xmlns:a16="http://schemas.microsoft.com/office/drawing/2014/main" val="20004"/>
+                    </a:ext>
+                  </a:extLst>
+                </a:gridCol>
+              </a:tblGrid>
+              <a:tr h="578485">
+                <a:tc>
+                  <a:txBody>
+                    <a:bodyPr/>
+                    <a:lstStyle/>
+                    <a:p>
+                      <a:pPr marL="91440">
+                        <a:lnSpc>
+                          <a:spcPct val="100000"/>
+                        </a:lnSpc>
+                        <a:spcBef>
+                          <a:spcPts val="265"/>
+                        </a:spcBef>
+                      </a:pPr>
+                      <a:r>
+                        <a:rPr sz="1600" b="1" spc="-25" dirty="0">
+                          <a:latin typeface="Calibri"/>
+                          <a:cs typeface="Calibri"/>
+                        </a:rPr>
+                        <a:t>RCP</a:t>
+                      </a:r>
+                      <a:endParaRPr sz="1600">
+                        <a:latin typeface="Calibri"/>
+                        <a:cs typeface="Calibri"/>
+                      </a:endParaRPr>
+                    </a:p>
+                  </a:txBody>
+                  <a:tcPr marL="0" marR="0" marT="33655" marB="0">
+                    <a:lnT w="12700">
+                      <a:solidFill>
+                        <a:srgbClr val="000000"/>
+                      </a:solidFill>
+                      <a:prstDash val="solid"/>
+                    </a:lnT>
+                    <a:lnB w="12700">
+                      <a:solidFill>
+                        <a:srgbClr val="000000"/>
+                      </a:solidFill>
+                      <a:prstDash val="solid"/>
+                    </a:lnB>
+                  </a:tcPr>
+                </a:tc>
+                <a:tc>
+                  <a:txBody>
+                    <a:bodyPr/>
+                    <a:lstStyle/>
+                    <a:p>
+                      <a:pPr marL="648970" marR="122555">
+                        <a:lnSpc>
+                          <a:spcPct val="100000"/>
+                        </a:lnSpc>
+                        <a:spcBef>
+                          <a:spcPts val="265"/>
+                        </a:spcBef>
+                      </a:pPr>
+                      <a:r>
+                        <a:rPr sz="1600" b="1" spc="-10" dirty="0">
+                          <a:latin typeface="Calibri"/>
+                          <a:cs typeface="Calibri"/>
+                        </a:rPr>
+                        <a:t>Relative radiative</a:t>
+                      </a:r>
+                      <a:r>
+                        <a:rPr sz="1600" b="1" spc="-35" dirty="0">
+                          <a:latin typeface="Calibri"/>
+                          <a:cs typeface="Calibri"/>
+                        </a:rPr>
+                        <a:t> </a:t>
+                      </a:r>
+                      <a:r>
+                        <a:rPr sz="1600" b="1" spc="-10" dirty="0">
+                          <a:latin typeface="Calibri"/>
+                          <a:cs typeface="Calibri"/>
+                        </a:rPr>
+                        <a:t>forcing</a:t>
+                      </a:r>
+                      <a:endParaRPr sz="1600">
+                        <a:latin typeface="Calibri"/>
+                        <a:cs typeface="Calibri"/>
+                      </a:endParaRPr>
+                    </a:p>
+                  </a:txBody>
+                  <a:tcPr marL="0" marR="0" marT="33655" marB="0">
+                    <a:lnT w="12700">
+                      <a:solidFill>
+                        <a:srgbClr val="000000"/>
+                      </a:solidFill>
+                      <a:prstDash val="solid"/>
+                    </a:lnT>
+                    <a:lnB w="12700">
+                      <a:solidFill>
+                        <a:srgbClr val="000000"/>
+                      </a:solidFill>
+                      <a:prstDash val="solid"/>
+                    </a:lnB>
+                  </a:tcPr>
+                </a:tc>
+                <a:tc>
+                  <a:txBody>
+                    <a:bodyPr/>
+                    <a:lstStyle/>
+                    <a:p>
+                      <a:pPr marL="130175">
+                        <a:lnSpc>
+                          <a:spcPct val="100000"/>
+                        </a:lnSpc>
+                        <a:spcBef>
+                          <a:spcPts val="265"/>
+                        </a:spcBef>
+                      </a:pPr>
+                      <a:r>
+                        <a:rPr sz="1600" b="1" dirty="0">
+                          <a:latin typeface="Calibri"/>
+                          <a:cs typeface="Calibri"/>
+                        </a:rPr>
+                        <a:t>CO</a:t>
+                      </a:r>
+                      <a:r>
+                        <a:rPr sz="1575" b="1" baseline="-21164" dirty="0">
+                          <a:latin typeface="Calibri"/>
+                          <a:cs typeface="Calibri"/>
+                        </a:rPr>
+                        <a:t>2</a:t>
+                      </a:r>
+                      <a:r>
+                        <a:rPr sz="1575" b="1" spc="135" baseline="-21164" dirty="0">
+                          <a:latin typeface="Calibri"/>
+                          <a:cs typeface="Calibri"/>
+                        </a:rPr>
+                        <a:t> </a:t>
+                      </a:r>
+                      <a:r>
+                        <a:rPr sz="1600" b="1" spc="-25" dirty="0">
+                          <a:latin typeface="Calibri"/>
+                          <a:cs typeface="Calibri"/>
+                        </a:rPr>
+                        <a:t>ppm</a:t>
+                      </a:r>
+                      <a:endParaRPr sz="1600">
+                        <a:latin typeface="Calibri"/>
+                        <a:cs typeface="Calibri"/>
+                      </a:endParaRPr>
+                    </a:p>
+                  </a:txBody>
+                  <a:tcPr marL="0" marR="0" marT="33655" marB="0">
+                    <a:lnT w="12700">
+                      <a:solidFill>
+                        <a:srgbClr val="000000"/>
+                      </a:solidFill>
+                      <a:prstDash val="solid"/>
+                    </a:lnT>
+                    <a:lnB w="12700">
+                      <a:solidFill>
+                        <a:srgbClr val="000000"/>
+                      </a:solidFill>
+                      <a:prstDash val="solid"/>
+                    </a:lnB>
+                  </a:tcPr>
+                </a:tc>
+                <a:tc>
+                  <a:txBody>
+                    <a:bodyPr/>
+                    <a:lstStyle/>
+                    <a:p>
+                      <a:pPr marL="395605">
+                        <a:lnSpc>
+                          <a:spcPct val="100000"/>
+                        </a:lnSpc>
+                        <a:spcBef>
+                          <a:spcPts val="265"/>
+                        </a:spcBef>
+                      </a:pPr>
+                      <a:r>
+                        <a:rPr sz="1600" b="1" dirty="0">
+                          <a:latin typeface="Calibri"/>
+                          <a:cs typeface="Calibri"/>
+                        </a:rPr>
+                        <a:t>Global</a:t>
+                      </a:r>
+                      <a:r>
+                        <a:rPr sz="1600" b="1" spc="-35" dirty="0">
+                          <a:latin typeface="Calibri"/>
+                          <a:cs typeface="Calibri"/>
+                        </a:rPr>
+                        <a:t> </a:t>
+                      </a:r>
+                      <a:r>
+                        <a:rPr sz="1600" b="1" spc="-10" dirty="0">
+                          <a:latin typeface="Calibri"/>
+                          <a:cs typeface="Calibri"/>
+                        </a:rPr>
+                        <a:t>warming</a:t>
+                      </a:r>
+                      <a:endParaRPr sz="1600">
+                        <a:latin typeface="Calibri"/>
+                        <a:cs typeface="Calibri"/>
+                      </a:endParaRPr>
+                    </a:p>
+                  </a:txBody>
+                  <a:tcPr marL="0" marR="0" marT="33655" marB="0">
+                    <a:lnT w="12700">
+                      <a:solidFill>
+                        <a:srgbClr val="000000"/>
+                      </a:solidFill>
+                      <a:prstDash val="solid"/>
+                    </a:lnT>
+                    <a:lnB w="12700">
+                      <a:solidFill>
+                        <a:srgbClr val="000000"/>
+                      </a:solidFill>
+                      <a:prstDash val="solid"/>
+                    </a:lnB>
+                  </a:tcPr>
+                </a:tc>
+                <a:tc>
+                  <a:txBody>
+                    <a:bodyPr/>
+                    <a:lstStyle/>
+                    <a:p>
+                      <a:pPr marL="145415" marR="419734">
+                        <a:lnSpc>
+                          <a:spcPct val="100000"/>
+                        </a:lnSpc>
+                        <a:spcBef>
+                          <a:spcPts val="265"/>
+                        </a:spcBef>
+                      </a:pPr>
+                      <a:r>
+                        <a:rPr sz="1600" b="1" dirty="0">
+                          <a:latin typeface="Calibri"/>
+                          <a:cs typeface="Calibri"/>
+                        </a:rPr>
+                        <a:t>CO</a:t>
+                      </a:r>
+                      <a:r>
+                        <a:rPr sz="1575" b="1" baseline="-21164" dirty="0">
+                          <a:latin typeface="Calibri"/>
+                          <a:cs typeface="Calibri"/>
+                        </a:rPr>
+                        <a:t>2</a:t>
+                      </a:r>
+                      <a:r>
+                        <a:rPr sz="1575" b="1" spc="135" baseline="-21164" dirty="0">
+                          <a:latin typeface="Calibri"/>
+                          <a:cs typeface="Calibri"/>
+                        </a:rPr>
+                        <a:t> </a:t>
+                      </a:r>
+                      <a:r>
+                        <a:rPr sz="1600" b="1" spc="-10" dirty="0">
+                          <a:latin typeface="Calibri"/>
+                          <a:cs typeface="Calibri"/>
+                        </a:rPr>
+                        <a:t>emission pathway</a:t>
+                      </a:r>
+                      <a:endParaRPr sz="1600">
+                        <a:latin typeface="Calibri"/>
+                        <a:cs typeface="Calibri"/>
+                      </a:endParaRPr>
+                    </a:p>
+                  </a:txBody>
+                  <a:tcPr marL="0" marR="0" marT="33655" marB="0">
+                    <a:lnT w="12700">
+                      <a:solidFill>
+                        <a:srgbClr val="000000"/>
+                      </a:solidFill>
+                      <a:prstDash val="solid"/>
+                    </a:lnT>
+                    <a:lnB w="12700">
+                      <a:solidFill>
+                        <a:srgbClr val="000000"/>
+                      </a:solidFill>
+                      <a:prstDash val="solid"/>
+                    </a:lnB>
+                  </a:tcPr>
+                </a:tc>
+                <a:extLst>
+                  <a:ext uri="{0D108BD9-81ED-4DB2-BD59-A6C34878D82A}">
+                    <a16:rowId xmlns:a16="http://schemas.microsoft.com/office/drawing/2014/main" val="10000"/>
+                  </a:ext>
+                </a:extLst>
+              </a:tr>
+              <a:tr h="370840">
+                <a:tc>
+                  <a:txBody>
+                    <a:bodyPr/>
+                    <a:lstStyle/>
+                    <a:p>
+                      <a:pPr marL="91440">
+                        <a:lnSpc>
+                          <a:spcPct val="100000"/>
+                        </a:lnSpc>
+                        <a:spcBef>
+                          <a:spcPts val="265"/>
+                        </a:spcBef>
+                      </a:pPr>
+                      <a:r>
+                        <a:rPr sz="1600" spc="-25" dirty="0">
+                          <a:latin typeface="Calibri"/>
+                          <a:cs typeface="Calibri"/>
+                        </a:rPr>
+                        <a:t>1.9</a:t>
+                      </a:r>
+                      <a:endParaRPr sz="1600">
+                        <a:latin typeface="Calibri"/>
+                        <a:cs typeface="Calibri"/>
+                      </a:endParaRPr>
+                    </a:p>
+                  </a:txBody>
+                  <a:tcPr marL="0" marR="0" marT="33655" marB="0">
+                    <a:lnT w="12700">
+                      <a:solidFill>
+                        <a:srgbClr val="000000"/>
+                      </a:solidFill>
+                      <a:prstDash val="solid"/>
+                    </a:lnT>
+                    <a:solidFill>
+                      <a:srgbClr val="000000">
+                        <a:alpha val="19999"/>
+                      </a:srgbClr>
+                    </a:solidFill>
+                  </a:tcPr>
+                </a:tc>
+                <a:tc>
+                  <a:txBody>
+                    <a:bodyPr/>
+                    <a:lstStyle/>
+                    <a:p>
+                      <a:pPr marL="648970">
+                        <a:lnSpc>
+                          <a:spcPct val="100000"/>
+                        </a:lnSpc>
+                        <a:spcBef>
+                          <a:spcPts val="265"/>
+                        </a:spcBef>
+                      </a:pPr>
+                      <a:r>
+                        <a:rPr sz="1600" dirty="0">
+                          <a:latin typeface="Calibri"/>
+                          <a:cs typeface="Calibri"/>
+                        </a:rPr>
+                        <a:t>1.9</a:t>
+                      </a:r>
+                      <a:r>
+                        <a:rPr sz="1600" spc="-25" dirty="0">
+                          <a:latin typeface="Calibri"/>
+                          <a:cs typeface="Calibri"/>
+                        </a:rPr>
+                        <a:t> </a:t>
+                      </a:r>
+                      <a:r>
+                        <a:rPr sz="1600" spc="-20" dirty="0">
+                          <a:latin typeface="Calibri"/>
+                          <a:cs typeface="Calibri"/>
+                        </a:rPr>
+                        <a:t>W/m</a:t>
+                      </a:r>
+                      <a:r>
+                        <a:rPr sz="1575" spc="-30" baseline="26455" dirty="0">
+                          <a:latin typeface="Calibri"/>
+                          <a:cs typeface="Calibri"/>
+                        </a:rPr>
+                        <a:t>2</a:t>
+                      </a:r>
+                      <a:endParaRPr sz="1575" baseline="26455">
+                        <a:latin typeface="Calibri"/>
+                        <a:cs typeface="Calibri"/>
+                      </a:endParaRPr>
+                    </a:p>
+                  </a:txBody>
+                  <a:tcPr marL="0" marR="0" marT="33655" marB="0">
+                    <a:lnT w="12700">
+                      <a:solidFill>
+                        <a:srgbClr val="000000"/>
+                      </a:solidFill>
+                      <a:prstDash val="solid"/>
+                    </a:lnT>
+                    <a:solidFill>
+                      <a:srgbClr val="000000">
+                        <a:alpha val="19999"/>
+                      </a:srgbClr>
+                    </a:solidFill>
+                  </a:tcPr>
+                </a:tc>
+                <a:tc>
+                  <a:txBody>
+                    <a:bodyPr/>
+                    <a:lstStyle/>
+                    <a:p>
+                      <a:pPr marL="130175">
+                        <a:lnSpc>
+                          <a:spcPct val="100000"/>
+                        </a:lnSpc>
+                        <a:spcBef>
+                          <a:spcPts val="265"/>
+                        </a:spcBef>
+                      </a:pPr>
+                      <a:r>
+                        <a:rPr sz="1600" dirty="0">
+                          <a:latin typeface="Calibri"/>
+                          <a:cs typeface="Calibri"/>
+                        </a:rPr>
+                        <a:t>450</a:t>
+                      </a:r>
+                      <a:r>
+                        <a:rPr sz="1600" spc="-20" dirty="0">
+                          <a:latin typeface="Calibri"/>
+                          <a:cs typeface="Calibri"/>
+                        </a:rPr>
+                        <a:t> </a:t>
+                      </a:r>
+                      <a:r>
+                        <a:rPr sz="1600" spc="-25" dirty="0">
+                          <a:latin typeface="Calibri"/>
+                          <a:cs typeface="Calibri"/>
+                        </a:rPr>
+                        <a:t>ppm</a:t>
+                      </a:r>
+                      <a:endParaRPr sz="1600">
+                        <a:latin typeface="Calibri"/>
+                        <a:cs typeface="Calibri"/>
+                      </a:endParaRPr>
+                    </a:p>
+                  </a:txBody>
+                  <a:tcPr marL="0" marR="0" marT="33655" marB="0">
+                    <a:lnT w="12700">
+                      <a:solidFill>
+                        <a:srgbClr val="000000"/>
+                      </a:solidFill>
+                      <a:prstDash val="solid"/>
+                    </a:lnT>
+                    <a:solidFill>
+                      <a:srgbClr val="000000">
+                        <a:alpha val="19999"/>
+                      </a:srgbClr>
+                    </a:solidFill>
+                  </a:tcPr>
+                </a:tc>
+                <a:tc>
+                  <a:txBody>
+                    <a:bodyPr/>
+                    <a:lstStyle/>
+                    <a:p>
+                      <a:pPr marL="395605">
+                        <a:lnSpc>
+                          <a:spcPct val="100000"/>
+                        </a:lnSpc>
+                        <a:spcBef>
+                          <a:spcPts val="265"/>
+                        </a:spcBef>
+                      </a:pPr>
+                      <a:r>
+                        <a:rPr sz="1600" dirty="0">
+                          <a:latin typeface="Calibri"/>
+                          <a:cs typeface="Calibri"/>
+                        </a:rPr>
+                        <a:t>1.5</a:t>
+                      </a:r>
+                      <a:r>
+                        <a:rPr sz="1600" spc="-20" dirty="0">
+                          <a:latin typeface="Calibri"/>
+                          <a:cs typeface="Calibri"/>
+                        </a:rPr>
+                        <a:t> </a:t>
+                      </a:r>
+                      <a:r>
+                        <a:rPr sz="1600" spc="-25" dirty="0">
+                          <a:latin typeface="Calibri"/>
+                          <a:cs typeface="Calibri"/>
+                        </a:rPr>
+                        <a:t>°C</a:t>
+                      </a:r>
+                      <a:endParaRPr sz="1600">
+                        <a:latin typeface="Calibri"/>
+                        <a:cs typeface="Calibri"/>
+                      </a:endParaRPr>
+                    </a:p>
+                  </a:txBody>
+                  <a:tcPr marL="0" marR="0" marT="33655" marB="0">
+                    <a:lnT w="12700">
+                      <a:solidFill>
+                        <a:srgbClr val="000000"/>
+                      </a:solidFill>
+                      <a:prstDash val="solid"/>
+                    </a:lnT>
+                    <a:solidFill>
+                      <a:srgbClr val="000000">
+                        <a:alpha val="19999"/>
+                      </a:srgbClr>
+                    </a:solidFill>
+                  </a:tcPr>
+                </a:tc>
+                <a:tc>
+                  <a:txBody>
+                    <a:bodyPr/>
+                    <a:lstStyle/>
+                    <a:p>
+                      <a:pPr marL="145415">
+                        <a:lnSpc>
+                          <a:spcPct val="100000"/>
+                        </a:lnSpc>
+                        <a:spcBef>
+                          <a:spcPts val="265"/>
+                        </a:spcBef>
+                      </a:pPr>
+                      <a:r>
+                        <a:rPr sz="1600" dirty="0">
+                          <a:latin typeface="Calibri"/>
+                          <a:cs typeface="Calibri"/>
+                        </a:rPr>
+                        <a:t>Zero</a:t>
+                      </a:r>
+                      <a:r>
+                        <a:rPr sz="1600" spc="-35" dirty="0">
+                          <a:latin typeface="Calibri"/>
+                          <a:cs typeface="Calibri"/>
+                        </a:rPr>
+                        <a:t> </a:t>
+                      </a:r>
+                      <a:r>
+                        <a:rPr sz="1600" dirty="0">
+                          <a:latin typeface="Calibri"/>
+                          <a:cs typeface="Calibri"/>
+                        </a:rPr>
+                        <a:t>by</a:t>
+                      </a:r>
+                      <a:r>
+                        <a:rPr sz="1600" spc="-50" dirty="0">
+                          <a:latin typeface="Calibri"/>
+                          <a:cs typeface="Calibri"/>
+                        </a:rPr>
+                        <a:t> </a:t>
+                      </a:r>
+                      <a:r>
+                        <a:rPr sz="1600" spc="-20" dirty="0">
+                          <a:latin typeface="Calibri"/>
+                          <a:cs typeface="Calibri"/>
+                        </a:rPr>
+                        <a:t>2050</a:t>
+                      </a:r>
+                      <a:endParaRPr sz="1600">
+                        <a:latin typeface="Calibri"/>
+                        <a:cs typeface="Calibri"/>
+                      </a:endParaRPr>
+                    </a:p>
+                  </a:txBody>
+                  <a:tcPr marL="0" marR="0" marT="33655" marB="0">
+                    <a:lnT w="12700">
+                      <a:solidFill>
+                        <a:srgbClr val="000000"/>
+                      </a:solidFill>
+                      <a:prstDash val="solid"/>
+                    </a:lnT>
+                    <a:solidFill>
+                      <a:srgbClr val="000000">
+                        <a:alpha val="19999"/>
+                      </a:srgbClr>
+                    </a:solidFill>
+                  </a:tcPr>
+                </a:tc>
+                <a:extLst>
+                  <a:ext uri="{0D108BD9-81ED-4DB2-BD59-A6C34878D82A}">
+                    <a16:rowId xmlns:a16="http://schemas.microsoft.com/office/drawing/2014/main" val="10001"/>
+                  </a:ext>
+                </a:extLst>
+              </a:tr>
+              <a:tr h="370205">
+                <a:tc>
+                  <a:txBody>
+                    <a:bodyPr/>
+                    <a:lstStyle/>
+                    <a:p>
+                      <a:pPr marL="91440">
+                        <a:lnSpc>
+                          <a:spcPct val="100000"/>
+                        </a:lnSpc>
+                        <a:spcBef>
+                          <a:spcPts val="265"/>
+                        </a:spcBef>
+                      </a:pPr>
+                      <a:r>
+                        <a:rPr sz="1600" spc="-25" dirty="0">
+                          <a:latin typeface="Calibri"/>
+                          <a:cs typeface="Calibri"/>
+                        </a:rPr>
+                        <a:t>2.6</a:t>
+                      </a:r>
+                      <a:endParaRPr sz="1600">
+                        <a:latin typeface="Calibri"/>
+                        <a:cs typeface="Calibri"/>
+                      </a:endParaRPr>
+                    </a:p>
+                  </a:txBody>
+                  <a:tcPr marL="0" marR="0" marT="33655" marB="0"/>
+                </a:tc>
+                <a:tc>
+                  <a:txBody>
+                    <a:bodyPr/>
+                    <a:lstStyle/>
+                    <a:p>
+                      <a:pPr marL="648970">
+                        <a:lnSpc>
+                          <a:spcPct val="100000"/>
+                        </a:lnSpc>
+                        <a:spcBef>
+                          <a:spcPts val="265"/>
+                        </a:spcBef>
+                      </a:pPr>
+                      <a:r>
+                        <a:rPr sz="1600" dirty="0">
+                          <a:latin typeface="Calibri"/>
+                          <a:cs typeface="Calibri"/>
+                        </a:rPr>
+                        <a:t>2.6</a:t>
+                      </a:r>
+                      <a:r>
+                        <a:rPr sz="1600" spc="-25" dirty="0">
+                          <a:latin typeface="Calibri"/>
+                          <a:cs typeface="Calibri"/>
+                        </a:rPr>
+                        <a:t> </a:t>
+                      </a:r>
+                      <a:r>
+                        <a:rPr sz="1600" spc="-20" dirty="0">
+                          <a:latin typeface="Calibri"/>
+                          <a:cs typeface="Calibri"/>
+                        </a:rPr>
+                        <a:t>W/m</a:t>
+                      </a:r>
+                      <a:r>
+                        <a:rPr sz="1575" spc="-30" baseline="26455" dirty="0">
+                          <a:latin typeface="Calibri"/>
+                          <a:cs typeface="Calibri"/>
+                        </a:rPr>
+                        <a:t>2</a:t>
+                      </a:r>
+                      <a:endParaRPr sz="1575" baseline="26455">
+                        <a:latin typeface="Calibri"/>
+                        <a:cs typeface="Calibri"/>
+                      </a:endParaRPr>
+                    </a:p>
+                  </a:txBody>
+                  <a:tcPr marL="0" marR="0" marT="33655" marB="0"/>
+                </a:tc>
+                <a:tc>
+                  <a:txBody>
+                    <a:bodyPr/>
+                    <a:lstStyle/>
+                    <a:p>
+                      <a:pPr marL="130175">
+                        <a:lnSpc>
+                          <a:spcPct val="100000"/>
+                        </a:lnSpc>
+                        <a:spcBef>
+                          <a:spcPts val="265"/>
+                        </a:spcBef>
+                      </a:pPr>
+                      <a:r>
+                        <a:rPr sz="1600" dirty="0">
+                          <a:latin typeface="Calibri"/>
+                          <a:cs typeface="Calibri"/>
+                        </a:rPr>
+                        <a:t>490</a:t>
+                      </a:r>
+                      <a:r>
+                        <a:rPr sz="1600" spc="-20" dirty="0">
+                          <a:latin typeface="Calibri"/>
+                          <a:cs typeface="Calibri"/>
+                        </a:rPr>
+                        <a:t> </a:t>
+                      </a:r>
+                      <a:r>
+                        <a:rPr sz="1600" spc="-25" dirty="0">
+                          <a:latin typeface="Calibri"/>
+                          <a:cs typeface="Calibri"/>
+                        </a:rPr>
+                        <a:t>ppm</a:t>
+                      </a:r>
+                      <a:endParaRPr sz="1600">
+                        <a:latin typeface="Calibri"/>
+                        <a:cs typeface="Calibri"/>
+                      </a:endParaRPr>
+                    </a:p>
+                  </a:txBody>
+                  <a:tcPr marL="0" marR="0" marT="33655" marB="0"/>
+                </a:tc>
+                <a:tc>
+                  <a:txBody>
+                    <a:bodyPr/>
+                    <a:lstStyle/>
+                    <a:p>
+                      <a:pPr marL="395605">
+                        <a:lnSpc>
+                          <a:spcPct val="100000"/>
+                        </a:lnSpc>
+                        <a:spcBef>
+                          <a:spcPts val="265"/>
+                        </a:spcBef>
+                      </a:pPr>
+                      <a:r>
+                        <a:rPr sz="1600" dirty="0">
+                          <a:latin typeface="Calibri"/>
+                          <a:cs typeface="Calibri"/>
+                        </a:rPr>
+                        <a:t>2</a:t>
+                      </a:r>
+                      <a:r>
+                        <a:rPr sz="1600" spc="-5" dirty="0">
+                          <a:latin typeface="Calibri"/>
+                          <a:cs typeface="Calibri"/>
+                        </a:rPr>
+                        <a:t> </a:t>
+                      </a:r>
+                      <a:r>
+                        <a:rPr sz="1600" spc="-25" dirty="0">
+                          <a:latin typeface="Calibri"/>
+                          <a:cs typeface="Calibri"/>
+                        </a:rPr>
+                        <a:t>°C</a:t>
+                      </a:r>
+                      <a:endParaRPr sz="1600">
+                        <a:latin typeface="Calibri"/>
+                        <a:cs typeface="Calibri"/>
+                      </a:endParaRPr>
+                    </a:p>
+                  </a:txBody>
+                  <a:tcPr marL="0" marR="0" marT="33655" marB="0"/>
+                </a:tc>
+                <a:tc>
+                  <a:txBody>
+                    <a:bodyPr/>
+                    <a:lstStyle/>
+                    <a:p>
+                      <a:pPr marL="145415">
+                        <a:lnSpc>
+                          <a:spcPct val="100000"/>
+                        </a:lnSpc>
+                        <a:spcBef>
+                          <a:spcPts val="265"/>
+                        </a:spcBef>
+                      </a:pPr>
+                      <a:r>
+                        <a:rPr sz="1600" dirty="0">
+                          <a:latin typeface="Calibri"/>
+                          <a:cs typeface="Calibri"/>
+                        </a:rPr>
+                        <a:t>Zero</a:t>
+                      </a:r>
+                      <a:r>
+                        <a:rPr sz="1600" spc="-35" dirty="0">
+                          <a:latin typeface="Calibri"/>
+                          <a:cs typeface="Calibri"/>
+                        </a:rPr>
+                        <a:t> </a:t>
+                      </a:r>
+                      <a:r>
+                        <a:rPr sz="1600" dirty="0">
+                          <a:latin typeface="Calibri"/>
+                          <a:cs typeface="Calibri"/>
+                        </a:rPr>
+                        <a:t>by</a:t>
+                      </a:r>
+                      <a:r>
+                        <a:rPr sz="1600" spc="-50" dirty="0">
+                          <a:latin typeface="Calibri"/>
+                          <a:cs typeface="Calibri"/>
+                        </a:rPr>
+                        <a:t> </a:t>
+                      </a:r>
+                      <a:r>
+                        <a:rPr sz="1600" spc="-20" dirty="0">
+                          <a:latin typeface="Calibri"/>
+                          <a:cs typeface="Calibri"/>
+                        </a:rPr>
+                        <a:t>2075</a:t>
+                      </a:r>
+                      <a:endParaRPr sz="1600">
+                        <a:latin typeface="Calibri"/>
+                        <a:cs typeface="Calibri"/>
+                      </a:endParaRPr>
+                    </a:p>
+                  </a:txBody>
+                  <a:tcPr marL="0" marR="0" marT="33655" marB="0"/>
+                </a:tc>
+                <a:extLst>
+                  <a:ext uri="{0D108BD9-81ED-4DB2-BD59-A6C34878D82A}">
+                    <a16:rowId xmlns:a16="http://schemas.microsoft.com/office/drawing/2014/main" val="10002"/>
+                  </a:ext>
+                </a:extLst>
+              </a:tr>
+              <a:tr h="370205">
+                <a:tc>
+                  <a:txBody>
+                    <a:bodyPr/>
+                    <a:lstStyle/>
+                    <a:p>
+                      <a:pPr marL="91440">
+                        <a:lnSpc>
+                          <a:spcPct val="100000"/>
+                        </a:lnSpc>
+                        <a:spcBef>
+                          <a:spcPts val="270"/>
+                        </a:spcBef>
+                      </a:pPr>
+                      <a:r>
+                        <a:rPr sz="1600" spc="-25" dirty="0">
+                          <a:latin typeface="Calibri"/>
+                          <a:cs typeface="Calibri"/>
+                        </a:rPr>
+                        <a:t>4.5</a:t>
+                      </a:r>
+                      <a:endParaRPr sz="1600">
+                        <a:latin typeface="Calibri"/>
+                        <a:cs typeface="Calibri"/>
+                      </a:endParaRPr>
+                    </a:p>
+                  </a:txBody>
+                  <a:tcPr marL="0" marR="0" marT="34290" marB="0">
+                    <a:solidFill>
+                      <a:srgbClr val="000000">
+                        <a:alpha val="19999"/>
+                      </a:srgbClr>
+                    </a:solidFill>
+                  </a:tcPr>
+                </a:tc>
+                <a:tc>
+                  <a:txBody>
+                    <a:bodyPr/>
+                    <a:lstStyle/>
+                    <a:p>
+                      <a:pPr marL="648970">
+                        <a:lnSpc>
+                          <a:spcPct val="100000"/>
+                        </a:lnSpc>
+                        <a:spcBef>
+                          <a:spcPts val="270"/>
+                        </a:spcBef>
+                      </a:pPr>
+                      <a:r>
+                        <a:rPr sz="1600" dirty="0">
+                          <a:latin typeface="Calibri"/>
+                          <a:cs typeface="Calibri"/>
+                        </a:rPr>
+                        <a:t>4.5</a:t>
+                      </a:r>
+                      <a:r>
+                        <a:rPr sz="1600" spc="-25" dirty="0">
+                          <a:latin typeface="Calibri"/>
+                          <a:cs typeface="Calibri"/>
+                        </a:rPr>
+                        <a:t> </a:t>
+                      </a:r>
+                      <a:r>
+                        <a:rPr sz="1600" spc="-20" dirty="0">
+                          <a:latin typeface="Calibri"/>
+                          <a:cs typeface="Calibri"/>
+                        </a:rPr>
+                        <a:t>W/m</a:t>
+                      </a:r>
+                      <a:r>
+                        <a:rPr sz="1575" spc="-30" baseline="26455" dirty="0">
+                          <a:latin typeface="Calibri"/>
+                          <a:cs typeface="Calibri"/>
+                        </a:rPr>
+                        <a:t>2</a:t>
+                      </a:r>
+                      <a:endParaRPr sz="1575" baseline="26455">
+                        <a:latin typeface="Calibri"/>
+                        <a:cs typeface="Calibri"/>
+                      </a:endParaRPr>
+                    </a:p>
+                  </a:txBody>
+                  <a:tcPr marL="0" marR="0" marT="34290" marB="0">
+                    <a:solidFill>
+                      <a:srgbClr val="000000">
+                        <a:alpha val="19999"/>
+                      </a:srgbClr>
+                    </a:solidFill>
+                  </a:tcPr>
+                </a:tc>
+                <a:tc>
+                  <a:txBody>
+                    <a:bodyPr/>
+                    <a:lstStyle/>
+                    <a:p>
+                      <a:pPr marL="130175">
+                        <a:lnSpc>
+                          <a:spcPct val="100000"/>
+                        </a:lnSpc>
+                        <a:spcBef>
+                          <a:spcPts val="270"/>
+                        </a:spcBef>
+                      </a:pPr>
+                      <a:r>
+                        <a:rPr sz="1600" dirty="0">
+                          <a:latin typeface="Calibri"/>
+                          <a:cs typeface="Calibri"/>
+                        </a:rPr>
+                        <a:t>650</a:t>
+                      </a:r>
+                      <a:r>
+                        <a:rPr sz="1600" spc="-20" dirty="0">
+                          <a:latin typeface="Calibri"/>
+                          <a:cs typeface="Calibri"/>
+                        </a:rPr>
+                        <a:t> </a:t>
+                      </a:r>
+                      <a:r>
+                        <a:rPr sz="1600" spc="-25" dirty="0">
+                          <a:latin typeface="Calibri"/>
+                          <a:cs typeface="Calibri"/>
+                        </a:rPr>
+                        <a:t>ppm</a:t>
+                      </a:r>
+                      <a:endParaRPr sz="1600">
+                        <a:latin typeface="Calibri"/>
+                        <a:cs typeface="Calibri"/>
+                      </a:endParaRPr>
+                    </a:p>
+                  </a:txBody>
+                  <a:tcPr marL="0" marR="0" marT="34290" marB="0">
+                    <a:solidFill>
+                      <a:srgbClr val="000000">
+                        <a:alpha val="19999"/>
+                      </a:srgbClr>
+                    </a:solidFill>
+                  </a:tcPr>
+                </a:tc>
+                <a:tc>
+                  <a:txBody>
+                    <a:bodyPr/>
+                    <a:lstStyle/>
+                    <a:p>
+                      <a:pPr marL="395605">
+                        <a:lnSpc>
+                          <a:spcPct val="100000"/>
+                        </a:lnSpc>
+                        <a:spcBef>
+                          <a:spcPts val="270"/>
+                        </a:spcBef>
+                      </a:pPr>
+                      <a:r>
+                        <a:rPr sz="1600" dirty="0">
+                          <a:latin typeface="Calibri"/>
+                          <a:cs typeface="Calibri"/>
+                        </a:rPr>
+                        <a:t>3</a:t>
+                      </a:r>
+                      <a:r>
+                        <a:rPr sz="1600" spc="-5" dirty="0">
+                          <a:latin typeface="Calibri"/>
+                          <a:cs typeface="Calibri"/>
+                        </a:rPr>
+                        <a:t> </a:t>
+                      </a:r>
+                      <a:r>
+                        <a:rPr sz="1600" spc="-25" dirty="0">
+                          <a:latin typeface="Calibri"/>
+                          <a:cs typeface="Calibri"/>
+                        </a:rPr>
+                        <a:t>°C</a:t>
+                      </a:r>
+                      <a:endParaRPr sz="1600">
+                        <a:latin typeface="Calibri"/>
+                        <a:cs typeface="Calibri"/>
+                      </a:endParaRPr>
+                    </a:p>
+                  </a:txBody>
+                  <a:tcPr marL="0" marR="0" marT="34290" marB="0">
+                    <a:solidFill>
+                      <a:srgbClr val="000000">
+                        <a:alpha val="19999"/>
+                      </a:srgbClr>
+                    </a:solidFill>
+                  </a:tcPr>
+                </a:tc>
+                <a:tc>
+                  <a:txBody>
+                    <a:bodyPr/>
+                    <a:lstStyle/>
+                    <a:p>
+                      <a:pPr marL="145415">
+                        <a:lnSpc>
+                          <a:spcPct val="100000"/>
+                        </a:lnSpc>
+                        <a:spcBef>
+                          <a:spcPts val="270"/>
+                        </a:spcBef>
+                      </a:pPr>
+                      <a:r>
+                        <a:rPr sz="1600" dirty="0">
+                          <a:latin typeface="Calibri"/>
+                          <a:cs typeface="Calibri"/>
+                        </a:rPr>
+                        <a:t>Falling</a:t>
+                      </a:r>
+                      <a:r>
+                        <a:rPr sz="1600" spc="-65" dirty="0">
+                          <a:latin typeface="Calibri"/>
+                          <a:cs typeface="Calibri"/>
+                        </a:rPr>
+                        <a:t> </a:t>
+                      </a:r>
+                      <a:r>
+                        <a:rPr sz="1600" dirty="0">
+                          <a:latin typeface="Calibri"/>
+                          <a:cs typeface="Calibri"/>
+                        </a:rPr>
+                        <a:t>after</a:t>
+                      </a:r>
+                      <a:r>
+                        <a:rPr sz="1600" spc="-55" dirty="0">
+                          <a:latin typeface="Calibri"/>
+                          <a:cs typeface="Calibri"/>
+                        </a:rPr>
+                        <a:t> </a:t>
+                      </a:r>
+                      <a:r>
+                        <a:rPr sz="1600" spc="-20" dirty="0">
+                          <a:latin typeface="Calibri"/>
+                          <a:cs typeface="Calibri"/>
+                        </a:rPr>
+                        <a:t>2050</a:t>
+                      </a:r>
+                      <a:endParaRPr sz="1600">
+                        <a:latin typeface="Calibri"/>
+                        <a:cs typeface="Calibri"/>
+                      </a:endParaRPr>
+                    </a:p>
+                  </a:txBody>
+                  <a:tcPr marL="0" marR="0" marT="34290" marB="0">
+                    <a:solidFill>
+                      <a:srgbClr val="000000">
+                        <a:alpha val="19999"/>
+                      </a:srgbClr>
+                    </a:solidFill>
+                  </a:tcPr>
+                </a:tc>
+                <a:extLst>
+                  <a:ext uri="{0D108BD9-81ED-4DB2-BD59-A6C34878D82A}">
+                    <a16:rowId xmlns:a16="http://schemas.microsoft.com/office/drawing/2014/main" val="10003"/>
+                  </a:ext>
+                </a:extLst>
+              </a:tr>
+              <a:tr h="370840">
+                <a:tc>
+                  <a:txBody>
+                    <a:bodyPr/>
+                    <a:lstStyle/>
+                    <a:p>
+                      <a:pPr marL="91440">
+                        <a:lnSpc>
+                          <a:spcPct val="100000"/>
+                        </a:lnSpc>
+                        <a:spcBef>
+                          <a:spcPts val="265"/>
+                        </a:spcBef>
+                      </a:pPr>
+                      <a:r>
+                        <a:rPr sz="1600" spc="-25" dirty="0">
+                          <a:latin typeface="Calibri"/>
+                          <a:cs typeface="Calibri"/>
+                        </a:rPr>
+                        <a:t>8.5</a:t>
+                      </a:r>
+                      <a:endParaRPr sz="1600">
+                        <a:latin typeface="Calibri"/>
+                        <a:cs typeface="Calibri"/>
+                      </a:endParaRPr>
+                    </a:p>
+                  </a:txBody>
+                  <a:tcPr marL="0" marR="0" marT="33655" marB="0">
+                    <a:lnB w="12700">
+                      <a:solidFill>
+                        <a:srgbClr val="000000"/>
+                      </a:solidFill>
+                      <a:prstDash val="solid"/>
+                    </a:lnB>
+                  </a:tcPr>
+                </a:tc>
+                <a:tc>
+                  <a:txBody>
+                    <a:bodyPr/>
+                    <a:lstStyle/>
+                    <a:p>
+                      <a:pPr marL="648970">
+                        <a:lnSpc>
+                          <a:spcPct val="100000"/>
+                        </a:lnSpc>
+                        <a:spcBef>
+                          <a:spcPts val="265"/>
+                        </a:spcBef>
+                      </a:pPr>
+                      <a:r>
+                        <a:rPr sz="1600" dirty="0">
+                          <a:latin typeface="Calibri"/>
+                          <a:cs typeface="Calibri"/>
+                        </a:rPr>
+                        <a:t>8.5</a:t>
+                      </a:r>
+                      <a:r>
+                        <a:rPr sz="1600" spc="-30" dirty="0">
+                          <a:latin typeface="Calibri"/>
+                          <a:cs typeface="Calibri"/>
+                        </a:rPr>
+                        <a:t> </a:t>
+                      </a:r>
+                      <a:r>
+                        <a:rPr sz="1600" spc="-20" dirty="0">
+                          <a:latin typeface="Calibri"/>
+                          <a:cs typeface="Calibri"/>
+                        </a:rPr>
+                        <a:t>W/m</a:t>
+                      </a:r>
+                      <a:r>
+                        <a:rPr sz="1575" spc="-30" baseline="26455" dirty="0">
+                          <a:latin typeface="Calibri"/>
+                          <a:cs typeface="Calibri"/>
+                        </a:rPr>
+                        <a:t>2</a:t>
+                      </a:r>
+                      <a:endParaRPr sz="1575" baseline="26455">
+                        <a:latin typeface="Calibri"/>
+                        <a:cs typeface="Calibri"/>
+                      </a:endParaRPr>
+                    </a:p>
+                  </a:txBody>
+                  <a:tcPr marL="0" marR="0" marT="33655" marB="0">
+                    <a:lnB w="12700">
+                      <a:solidFill>
+                        <a:srgbClr val="000000"/>
+                      </a:solidFill>
+                      <a:prstDash val="solid"/>
+                    </a:lnB>
+                  </a:tcPr>
+                </a:tc>
+                <a:tc>
+                  <a:txBody>
+                    <a:bodyPr/>
+                    <a:lstStyle/>
+                    <a:p>
+                      <a:pPr marL="130175">
+                        <a:lnSpc>
+                          <a:spcPct val="100000"/>
+                        </a:lnSpc>
+                        <a:spcBef>
+                          <a:spcPts val="265"/>
+                        </a:spcBef>
+                      </a:pPr>
+                      <a:r>
+                        <a:rPr sz="1600" dirty="0">
+                          <a:latin typeface="Calibri"/>
+                          <a:cs typeface="Calibri"/>
+                        </a:rPr>
+                        <a:t>1370</a:t>
+                      </a:r>
+                      <a:r>
+                        <a:rPr sz="1600" spc="-40" dirty="0">
+                          <a:latin typeface="Calibri"/>
+                          <a:cs typeface="Calibri"/>
+                        </a:rPr>
+                        <a:t> </a:t>
+                      </a:r>
+                      <a:r>
+                        <a:rPr sz="1600" spc="-25" dirty="0">
+                          <a:latin typeface="Calibri"/>
+                          <a:cs typeface="Calibri"/>
+                        </a:rPr>
+                        <a:t>ppm</a:t>
+                      </a:r>
+                      <a:endParaRPr sz="1600">
+                        <a:latin typeface="Calibri"/>
+                        <a:cs typeface="Calibri"/>
+                      </a:endParaRPr>
+                    </a:p>
+                  </a:txBody>
+                  <a:tcPr marL="0" marR="0" marT="33655" marB="0">
+                    <a:lnB w="12700">
+                      <a:solidFill>
+                        <a:srgbClr val="000000"/>
+                      </a:solidFill>
+                      <a:prstDash val="solid"/>
+                    </a:lnB>
+                  </a:tcPr>
+                </a:tc>
+                <a:tc>
+                  <a:txBody>
+                    <a:bodyPr/>
+                    <a:lstStyle/>
+                    <a:p>
+                      <a:pPr marL="395605">
+                        <a:lnSpc>
+                          <a:spcPct val="100000"/>
+                        </a:lnSpc>
+                        <a:spcBef>
+                          <a:spcPts val="265"/>
+                        </a:spcBef>
+                      </a:pPr>
+                      <a:r>
+                        <a:rPr sz="1600" dirty="0">
+                          <a:latin typeface="Calibri"/>
+                          <a:cs typeface="Calibri"/>
+                        </a:rPr>
+                        <a:t>5</a:t>
+                      </a:r>
+                      <a:r>
+                        <a:rPr sz="1600" spc="-10" dirty="0">
+                          <a:latin typeface="Calibri"/>
+                          <a:cs typeface="Calibri"/>
+                        </a:rPr>
+                        <a:t> </a:t>
+                      </a:r>
+                      <a:r>
+                        <a:rPr sz="1600" spc="-25" dirty="0">
+                          <a:latin typeface="Calibri"/>
+                          <a:cs typeface="Calibri"/>
+                        </a:rPr>
+                        <a:t>°C</a:t>
+                      </a:r>
+                      <a:endParaRPr sz="1600">
+                        <a:latin typeface="Calibri"/>
+                        <a:cs typeface="Calibri"/>
+                      </a:endParaRPr>
+                    </a:p>
+                  </a:txBody>
+                  <a:tcPr marL="0" marR="0" marT="33655" marB="0">
+                    <a:lnB w="12700">
+                      <a:solidFill>
+                        <a:srgbClr val="000000"/>
+                      </a:solidFill>
+                      <a:prstDash val="solid"/>
+                    </a:lnB>
+                  </a:tcPr>
+                </a:tc>
+                <a:tc>
+                  <a:txBody>
+                    <a:bodyPr/>
+                    <a:lstStyle/>
+                    <a:p>
+                      <a:pPr marL="145415">
+                        <a:lnSpc>
+                          <a:spcPct val="100000"/>
+                        </a:lnSpc>
+                        <a:spcBef>
+                          <a:spcPts val="265"/>
+                        </a:spcBef>
+                      </a:pPr>
+                      <a:r>
+                        <a:rPr sz="1600" dirty="0">
+                          <a:latin typeface="Calibri"/>
+                          <a:cs typeface="Calibri"/>
+                        </a:rPr>
+                        <a:t>Keep</a:t>
+                      </a:r>
+                      <a:r>
+                        <a:rPr sz="1600" spc="-45" dirty="0">
+                          <a:latin typeface="Calibri"/>
+                          <a:cs typeface="Calibri"/>
+                        </a:rPr>
+                        <a:t> </a:t>
+                      </a:r>
+                      <a:r>
+                        <a:rPr sz="1600" spc="-10" dirty="0">
+                          <a:latin typeface="Calibri"/>
+                          <a:cs typeface="Calibri"/>
+                        </a:rPr>
+                        <a:t>rising</a:t>
+                      </a:r>
+                      <a:endParaRPr sz="1600">
+                        <a:latin typeface="Calibri"/>
+                        <a:cs typeface="Calibri"/>
+                      </a:endParaRPr>
+                    </a:p>
+                  </a:txBody>
+                  <a:tcPr marL="0" marR="0" marT="33655" marB="0">
+                    <a:lnB w="12700">
+                      <a:solidFill>
+                        <a:srgbClr val="000000"/>
+                      </a:solidFill>
+                      <a:prstDash val="solid"/>
+                    </a:lnB>
+                  </a:tcPr>
+                </a:tc>
+                <a:extLst>
+                  <a:ext uri="{0D108BD9-81ED-4DB2-BD59-A6C34878D82A}">
+                    <a16:rowId xmlns:a16="http://schemas.microsoft.com/office/drawing/2014/main" val="10004"/>
+                  </a:ext>
+                </a:extLst>
+              </a:tr>
+            </a:tbl>
+          </a:graphicData>
+        </a:graphic>
+      </p:graphicFrame>
+    </p:spTree>
+    <p:extLst>
+      <p:ext uri="{BB962C8B-B14F-4D97-AF65-F5344CB8AC3E}">
+        <p14:creationId xmlns:p14="http://schemas.microsoft.com/office/powerpoint/2010/main" val="648572586"/>
+      </p:ext>
+    </p:extLst>
+  </p:cSld>
+  <p:clrMapOvr>
+    <a:masterClrMapping/>
+  </p:clrMapOvr>
+</p:sld>
+</file>
+
+<file path=ppt/slides/slide19.xml><?xml version="1.0" encoding="utf-8"?>
+<p:sld xmlns:a="http://schemas.openxmlformats.org/drawingml/2006/main" xmlns:r="http://schemas.openxmlformats.org/officeDocument/2006/relationships" xmlns:p="http://schemas.openxmlformats.org/presentationml/2006/main">
+  <p:cSld>
+    <p:spTree>
+      <p:nvGrpSpPr>
+        <p:cNvPr id="1" name="">
+          <a:extLst>
+            <a:ext uri="{FF2B5EF4-FFF2-40B4-BE49-F238E27FC236}">
+              <a16:creationId xmlns:a16="http://schemas.microsoft.com/office/drawing/2014/main" id="{49F9080C-6AC5-E53C-A135-DE65B269C572}"/>
+            </a:ext>
+          </a:extLst>
+        </p:cNvPr>
+        <p:cNvGrpSpPr/>
+        <p:nvPr/>
+      </p:nvGrpSpPr>
+      <p:grpSpPr>
+        <a:xfrm>
+          <a:off x="0" y="0"/>
+          <a:ext cx="0" cy="0"/>
+          <a:chOff x="0" y="0"/>
+          <a:chExt cx="0" cy="0"/>
+        </a:xfrm>
+      </p:grpSpPr>
+      <p:sp>
+        <p:nvSpPr>
+          <p:cNvPr id="2" name="Title 1">
+            <a:extLst>
+              <a:ext uri="{FF2B5EF4-FFF2-40B4-BE49-F238E27FC236}">
+                <a16:creationId xmlns:a16="http://schemas.microsoft.com/office/drawing/2014/main" id="{1ABCCA04-102D-F2B1-65BA-CB2B6E3F3AD1}"/>
+              </a:ext>
+            </a:extLst>
+          </p:cNvPr>
+          <p:cNvSpPr>
+            <a:spLocks noGrp="1"/>
+          </p:cNvSpPr>
+          <p:nvPr>
+            <p:ph type="ctrTitle"/>
+          </p:nvPr>
+        </p:nvSpPr>
+        <p:spPr>
+          <a:xfrm>
+            <a:off x="1523999" y="2060179"/>
+            <a:ext cx="9144000" cy="1655762"/>
+          </a:xfrm>
+        </p:spPr>
+        <p:txBody>
+          <a:bodyPr>
+            <a:normAutofit fontScale="90000"/>
+          </a:bodyPr>
+          <a:lstStyle/>
+          <a:p>
+            <a:pPr>
+              <a:lnSpc>
+                <a:spcPct val="150000"/>
+              </a:lnSpc>
+            </a:pPr>
+            <a:r>
+              <a:rPr lang="en-US" sz="2400" dirty="0">
+                <a:solidFill>
+                  <a:srgbClr val="0070C0"/>
+                </a:solidFill>
+                <a:latin typeface="Arial"/>
+                <a:cs typeface="Arial"/>
+              </a:rPr>
+              <a:t>Technical workshop for GCF project: </a:t>
+            </a:r>
+            <a:r>
+              <a:rPr lang="en-GB" sz="2400" dirty="0">
+                <a:solidFill>
+                  <a:srgbClr val="0070C0"/>
+                </a:solidFill>
+                <a:latin typeface="Arial"/>
+                <a:cs typeface="Arial"/>
+              </a:rPr>
+              <a:t>Climate change and climate change impacts on São Tomé and Príncipe with a focus on fishery and tourism sectors in a Blue Economy context</a:t>
+            </a:r>
+            <a:br>
+              <a:rPr lang="en-US" sz="3600" dirty="0">
+                <a:latin typeface="Arial" panose="020B0604020202020204" pitchFamily="34" charset="0"/>
+                <a:cs typeface="Arial" panose="020B0604020202020204" pitchFamily="34" charset="0"/>
+              </a:rPr>
+            </a:br>
+            <a:r>
+              <a:rPr lang="en-US" sz="1800" dirty="0">
+                <a:solidFill>
+                  <a:srgbClr val="0070C0"/>
+                </a:solidFill>
+                <a:latin typeface="Arial"/>
+                <a:cs typeface="Arial"/>
+              </a:rPr>
+              <a:t>Sao Tome and Principe, November/December 2025</a:t>
+            </a:r>
+            <a:endParaRPr lang="en-US" sz="3600" dirty="0">
+              <a:solidFill>
+                <a:srgbClr val="0070C0"/>
+              </a:solidFill>
+              <a:latin typeface="Arial"/>
+              <a:cs typeface="Arial"/>
+            </a:endParaRPr>
+          </a:p>
+        </p:txBody>
+      </p:sp>
+      <p:sp>
+        <p:nvSpPr>
+          <p:cNvPr id="3" name="Subtitle 2">
+            <a:extLst>
+              <a:ext uri="{FF2B5EF4-FFF2-40B4-BE49-F238E27FC236}">
+                <a16:creationId xmlns:a16="http://schemas.microsoft.com/office/drawing/2014/main" id="{46C59519-E653-D508-8579-3D3283F21AE5}"/>
+              </a:ext>
+            </a:extLst>
+          </p:cNvPr>
+          <p:cNvSpPr>
+            <a:spLocks noGrp="1"/>
+          </p:cNvSpPr>
+          <p:nvPr>
+            <p:ph type="subTitle" idx="1"/>
+          </p:nvPr>
+        </p:nvSpPr>
+        <p:spPr>
+          <a:xfrm>
+            <a:off x="882502" y="4373677"/>
+            <a:ext cx="10621925" cy="1655762"/>
+          </a:xfrm>
+        </p:spPr>
+        <p:txBody>
+          <a:bodyPr>
+            <a:normAutofit/>
+          </a:bodyPr>
+          <a:lstStyle/>
+          <a:p>
+            <a:r>
+              <a:rPr lang="it-IT" b="1" cap="all" dirty="0" err="1">
+                <a:solidFill>
+                  <a:schemeClr val="accent5">
+                    <a:lumMod val="75000"/>
+                  </a:schemeClr>
+                </a:solidFill>
+                <a:latin typeface="Georgia" panose="02040502050405020303" pitchFamily="18" charset="0"/>
+              </a:rPr>
+              <a:t>Conceitos-chave</a:t>
+            </a:r>
+            <a:r>
+              <a:rPr lang="it-IT" b="1" cap="all" dirty="0">
+                <a:solidFill>
+                  <a:schemeClr val="accent5">
+                    <a:lumMod val="75000"/>
+                  </a:schemeClr>
+                </a:solidFill>
+                <a:latin typeface="Georgia" panose="02040502050405020303" pitchFamily="18" charset="0"/>
+              </a:rPr>
+              <a:t> em </a:t>
+            </a:r>
+            <a:r>
+              <a:rPr lang="it-IT" b="1" cap="all" dirty="0" err="1">
+                <a:solidFill>
+                  <a:schemeClr val="accent5">
+                    <a:lumMod val="75000"/>
+                  </a:schemeClr>
+                </a:solidFill>
+                <a:latin typeface="Georgia" panose="02040502050405020303" pitchFamily="18" charset="0"/>
+              </a:rPr>
+              <a:t>adaptação</a:t>
+            </a:r>
+            <a:r>
+              <a:rPr lang="it-IT" b="1" cap="all" dirty="0">
+                <a:solidFill>
+                  <a:schemeClr val="accent5">
+                    <a:lumMod val="75000"/>
+                  </a:schemeClr>
+                </a:solidFill>
+                <a:latin typeface="Georgia" panose="02040502050405020303" pitchFamily="18" charset="0"/>
+              </a:rPr>
+              <a:t> </a:t>
+            </a:r>
+            <a:r>
+              <a:rPr lang="it-IT" b="1" cap="all" dirty="0" err="1">
+                <a:solidFill>
+                  <a:schemeClr val="accent5">
+                    <a:lumMod val="75000"/>
+                  </a:schemeClr>
+                </a:solidFill>
+                <a:latin typeface="Georgia" panose="02040502050405020303" pitchFamily="18" charset="0"/>
+              </a:rPr>
+              <a:t>às</a:t>
+            </a:r>
+            <a:r>
+              <a:rPr lang="it-IT" b="1" cap="all" dirty="0">
+                <a:solidFill>
+                  <a:schemeClr val="accent5">
+                    <a:lumMod val="75000"/>
+                  </a:schemeClr>
+                </a:solidFill>
+                <a:latin typeface="Georgia" panose="02040502050405020303" pitchFamily="18" charset="0"/>
+              </a:rPr>
+              <a:t> </a:t>
+            </a:r>
+            <a:r>
+              <a:rPr lang="it-IT" b="1" cap="all" dirty="0" err="1">
+                <a:solidFill>
+                  <a:schemeClr val="accent5">
+                    <a:lumMod val="75000"/>
+                  </a:schemeClr>
+                </a:solidFill>
+                <a:latin typeface="Georgia" panose="02040502050405020303" pitchFamily="18" charset="0"/>
+              </a:rPr>
+              <a:t>mudanças</a:t>
+            </a:r>
+            <a:r>
+              <a:rPr lang="it-IT" b="1" cap="all" dirty="0">
+                <a:solidFill>
+                  <a:schemeClr val="accent5">
+                    <a:lumMod val="75000"/>
+                  </a:schemeClr>
+                </a:solidFill>
+                <a:latin typeface="Georgia" panose="02040502050405020303" pitchFamily="18" charset="0"/>
+              </a:rPr>
+              <a:t> </a:t>
+            </a:r>
+            <a:r>
+              <a:rPr lang="it-IT" b="1" cap="all" dirty="0" err="1">
+                <a:solidFill>
+                  <a:schemeClr val="accent5">
+                    <a:lumMod val="75000"/>
+                  </a:schemeClr>
+                </a:solidFill>
+                <a:latin typeface="Georgia" panose="02040502050405020303" pitchFamily="18" charset="0"/>
+              </a:rPr>
+              <a:t>climáticas</a:t>
+            </a:r>
+            <a:endParaRPr lang="it-IT" b="1" cap="all" dirty="0">
+              <a:solidFill>
+                <a:schemeClr val="accent5">
+                  <a:lumMod val="75000"/>
+                </a:schemeClr>
+              </a:solidFill>
+              <a:latin typeface="Georgia" panose="02040502050405020303" pitchFamily="18" charset="0"/>
+            </a:endParaRPr>
+          </a:p>
+          <a:p>
+            <a:r>
+              <a:rPr lang="en-US" sz="1500" dirty="0">
+                <a:solidFill>
+                  <a:schemeClr val="accent1">
+                    <a:lumMod val="50000"/>
+                  </a:schemeClr>
+                </a:solidFill>
+                <a:latin typeface="Georgia" panose="02040502050405020303" pitchFamily="18" charset="0"/>
+              </a:rPr>
+              <a:t>By: Riccardo Soldan</a:t>
+            </a:r>
+          </a:p>
+        </p:txBody>
+      </p:sp>
+      <p:pic>
+        <p:nvPicPr>
+          <p:cNvPr id="7" name="Picture 6" descr="Graphical user interface, text&#10;&#10;Description automatically generated">
+            <a:extLst>
+              <a:ext uri="{FF2B5EF4-FFF2-40B4-BE49-F238E27FC236}">
+                <a16:creationId xmlns:a16="http://schemas.microsoft.com/office/drawing/2014/main" id="{61B87815-A54C-F0E2-78B3-631838D673F7}"/>
+              </a:ext>
+            </a:extLst>
+          </p:cNvPr>
+          <p:cNvPicPr>
+            <a:picLocks noChangeAspect="1"/>
+          </p:cNvPicPr>
+          <p:nvPr/>
+        </p:nvPicPr>
+        <p:blipFill>
+          <a:blip r:embed="rId2"/>
+          <a:srcRect r="31257"/>
+          <a:stretch>
+            <a:fillRect/>
+          </a:stretch>
+        </p:blipFill>
+        <p:spPr>
+          <a:xfrm>
+            <a:off x="594821" y="257459"/>
+            <a:ext cx="3014653" cy="1003438"/>
+          </a:xfrm>
+          <a:prstGeom prst="rect">
+            <a:avLst/>
+          </a:prstGeom>
+        </p:spPr>
+      </p:pic>
+      <p:cxnSp>
+        <p:nvCxnSpPr>
+          <p:cNvPr id="10" name="Straight Connector 9">
+            <a:extLst>
+              <a:ext uri="{FF2B5EF4-FFF2-40B4-BE49-F238E27FC236}">
+                <a16:creationId xmlns:a16="http://schemas.microsoft.com/office/drawing/2014/main" id="{5A46510B-820E-856F-B56A-111D06BC1D88}"/>
+              </a:ext>
+            </a:extLst>
+          </p:cNvPr>
+          <p:cNvCxnSpPr/>
+          <p:nvPr/>
+        </p:nvCxnSpPr>
+        <p:spPr>
+          <a:xfrm>
+            <a:off x="968828" y="3935186"/>
+            <a:ext cx="10254343" cy="0"/>
+          </a:xfrm>
+          <a:prstGeom prst="line">
+            <a:avLst/>
+          </a:prstGeom>
+        </p:spPr>
+        <p:style>
+          <a:lnRef idx="1">
+            <a:schemeClr val="accent1"/>
+          </a:lnRef>
+          <a:fillRef idx="0">
+            <a:schemeClr val="accent1"/>
+          </a:fillRef>
+          <a:effectRef idx="0">
+            <a:schemeClr val="accent1"/>
+          </a:effectRef>
+          <a:fontRef idx="minor">
+            <a:schemeClr val="tx1"/>
+          </a:fontRef>
+        </p:style>
+      </p:cxnSp>
+      <p:grpSp>
+        <p:nvGrpSpPr>
+          <p:cNvPr id="14" name="Group 13">
+            <a:extLst>
+              <a:ext uri="{FF2B5EF4-FFF2-40B4-BE49-F238E27FC236}">
+                <a16:creationId xmlns:a16="http://schemas.microsoft.com/office/drawing/2014/main" id="{2DCE3ECC-91FB-A57C-A26C-FDCD22386657}"/>
+              </a:ext>
+            </a:extLst>
+          </p:cNvPr>
+          <p:cNvGrpSpPr/>
+          <p:nvPr/>
+        </p:nvGrpSpPr>
+        <p:grpSpPr>
+          <a:xfrm>
+            <a:off x="-16329" y="1390670"/>
+            <a:ext cx="12208329" cy="262452"/>
+            <a:chOff x="-16329" y="6677194"/>
+            <a:chExt cx="12208329" cy="262452"/>
+          </a:xfrm>
+        </p:grpSpPr>
+        <p:sp>
+          <p:nvSpPr>
+            <p:cNvPr id="12" name="Rectangle 11">
+              <a:extLst>
+                <a:ext uri="{FF2B5EF4-FFF2-40B4-BE49-F238E27FC236}">
+                  <a16:creationId xmlns:a16="http://schemas.microsoft.com/office/drawing/2014/main" id="{13939686-A17F-2E53-FB5B-A46B82751F32}"/>
+                </a:ext>
+              </a:extLst>
+            </p:cNvPr>
+            <p:cNvSpPr/>
+            <p:nvPr/>
+          </p:nvSpPr>
+          <p:spPr>
+            <a:xfrm>
+              <a:off x="6384471" y="6678386"/>
+              <a:ext cx="3804558" cy="261259"/>
+            </a:xfrm>
+            <a:prstGeom prst="rect">
+              <a:avLst/>
+            </a:prstGeom>
+            <a:ln>
+              <a:noFill/>
+            </a:ln>
+          </p:spPr>
+          <p:style>
+            <a:lnRef idx="2">
+              <a:schemeClr val="accent1">
+                <a:shade val="50000"/>
+              </a:schemeClr>
+            </a:lnRef>
+            <a:fillRef idx="1">
+              <a:schemeClr val="accent1"/>
+            </a:fillRef>
+            <a:effectRef idx="0">
+              <a:schemeClr val="accent1"/>
+            </a:effectRef>
+            <a:fontRef idx="minor">
+              <a:schemeClr val="lt1"/>
+            </a:fontRef>
+          </p:style>
+          <p:txBody>
+            <a:bodyPr rtlCol="0" anchor="ctr"/>
+            <a:lstStyle/>
+            <a:p>
+              <a:pPr algn="ctr"/>
+              <a:endParaRPr lang="en-US"/>
+            </a:p>
+          </p:txBody>
+        </p:sp>
+        <p:sp>
+          <p:nvSpPr>
+            <p:cNvPr id="11" name="Rectangle 10">
+              <a:extLst>
+                <a:ext uri="{FF2B5EF4-FFF2-40B4-BE49-F238E27FC236}">
+                  <a16:creationId xmlns:a16="http://schemas.microsoft.com/office/drawing/2014/main" id="{79A304BA-74F0-2317-8D7C-D014089C2B57}"/>
+                </a:ext>
+              </a:extLst>
+            </p:cNvPr>
+            <p:cNvSpPr/>
+            <p:nvPr/>
+          </p:nvSpPr>
+          <p:spPr>
+            <a:xfrm>
+              <a:off x="-16329" y="6678388"/>
+              <a:ext cx="6400800" cy="261258"/>
+            </a:xfrm>
+            <a:prstGeom prst="rect">
+              <a:avLst/>
+            </a:prstGeom>
+            <a:solidFill>
+              <a:schemeClr val="accent5">
+                <a:lumMod val="50000"/>
+              </a:schemeClr>
+            </a:solidFill>
+            <a:ln>
+              <a:noFill/>
+            </a:ln>
+          </p:spPr>
+          <p:style>
+            <a:lnRef idx="2">
+              <a:schemeClr val="accent1">
+                <a:shade val="50000"/>
+              </a:schemeClr>
+            </a:lnRef>
+            <a:fillRef idx="1">
+              <a:schemeClr val="accent1"/>
+            </a:fillRef>
+            <a:effectRef idx="0">
+              <a:schemeClr val="accent1"/>
+            </a:effectRef>
+            <a:fontRef idx="minor">
+              <a:schemeClr val="lt1"/>
+            </a:fontRef>
+          </p:style>
+          <p:txBody>
+            <a:bodyPr rtlCol="0" anchor="ctr"/>
+            <a:lstStyle/>
+            <a:p>
+              <a:pPr algn="ctr"/>
+              <a:endParaRPr lang="en-US"/>
+            </a:p>
+          </p:txBody>
+        </p:sp>
+        <p:sp>
+          <p:nvSpPr>
+            <p:cNvPr id="13" name="Rectangle 12">
+              <a:extLst>
+                <a:ext uri="{FF2B5EF4-FFF2-40B4-BE49-F238E27FC236}">
+                  <a16:creationId xmlns:a16="http://schemas.microsoft.com/office/drawing/2014/main" id="{14F652BD-9097-41CC-BB0C-761AF64AAAFA}"/>
+                </a:ext>
+              </a:extLst>
+            </p:cNvPr>
+            <p:cNvSpPr/>
+            <p:nvPr/>
+          </p:nvSpPr>
+          <p:spPr>
+            <a:xfrm>
+              <a:off x="10189029" y="6677194"/>
+              <a:ext cx="2002971" cy="262451"/>
+            </a:xfrm>
+            <a:prstGeom prst="rect">
+              <a:avLst/>
+            </a:prstGeom>
+            <a:solidFill>
+              <a:schemeClr val="accent4"/>
+            </a:solidFill>
+            <a:ln>
+              <a:noFill/>
+            </a:ln>
+          </p:spPr>
+          <p:style>
+            <a:lnRef idx="2">
+              <a:schemeClr val="accent1">
+                <a:shade val="50000"/>
+              </a:schemeClr>
+            </a:lnRef>
+            <a:fillRef idx="1">
+              <a:schemeClr val="accent1"/>
+            </a:fillRef>
+            <a:effectRef idx="0">
+              <a:schemeClr val="accent1"/>
+            </a:effectRef>
+            <a:fontRef idx="minor">
+              <a:schemeClr val="lt1"/>
+            </a:fontRef>
+          </p:style>
+          <p:txBody>
+            <a:bodyPr rtlCol="0" anchor="ctr"/>
+            <a:lstStyle/>
+            <a:p>
+              <a:pPr algn="ctr"/>
+              <a:endParaRPr lang="en-US"/>
+            </a:p>
+          </p:txBody>
+        </p:sp>
+      </p:grpSp>
+      <p:pic>
+        <p:nvPicPr>
+          <p:cNvPr id="3074" name="Picture 2">
+            <a:extLst>
+              <a:ext uri="{FF2B5EF4-FFF2-40B4-BE49-F238E27FC236}">
+                <a16:creationId xmlns:a16="http://schemas.microsoft.com/office/drawing/2014/main" id="{0E0D06CA-ED84-40E5-FE5D-AACB614FEF3C}"/>
+              </a:ext>
+            </a:extLst>
+          </p:cNvPr>
+          <p:cNvPicPr>
+            <a:picLocks noChangeAspect="1" noChangeArrowheads="1"/>
+          </p:cNvPicPr>
+          <p:nvPr/>
+        </p:nvPicPr>
+        <p:blipFill>
+          <a:blip r:embed="rId3">
+            <a:extLst>
+              <a:ext uri="{28A0092B-C50C-407E-A947-70E740481C1C}">
+                <a14:useLocalDpi xmlns:a14="http://schemas.microsoft.com/office/drawing/2010/main" val="0"/>
+              </a:ext>
+            </a:extLst>
+          </a:blip>
+          <a:srcRect/>
+          <a:stretch>
+            <a:fillRect/>
+          </a:stretch>
+        </p:blipFill>
+        <p:spPr bwMode="auto">
+          <a:xfrm>
+            <a:off x="9102166" y="174034"/>
+            <a:ext cx="2173726" cy="1086863"/>
+          </a:xfrm>
+          <a:prstGeom prst="rect">
+            <a:avLst/>
+          </a:prstGeom>
+          <a:noFill/>
+          <a:extLst>
+            <a:ext uri="{909E8E84-426E-40DD-AFC4-6F175D3DCCD1}">
+              <a14:hiddenFill xmlns:a14="http://schemas.microsoft.com/office/drawing/2010/main">
+                <a:solidFill>
+                  <a:srgbClr val="FFFFFF"/>
+                </a:solidFill>
+              </a14:hiddenFill>
+            </a:ext>
+          </a:extLst>
+        </p:spPr>
+      </p:pic>
+      <p:sp>
+        <p:nvSpPr>
+          <p:cNvPr id="4" name="TextBox 3">
+            <a:extLst>
+              <a:ext uri="{FF2B5EF4-FFF2-40B4-BE49-F238E27FC236}">
+                <a16:creationId xmlns:a16="http://schemas.microsoft.com/office/drawing/2014/main" id="{C4B5BD66-018B-3FDD-C07D-316E691ED7D5}"/>
+              </a:ext>
+            </a:extLst>
+          </p:cNvPr>
+          <p:cNvSpPr txBox="1"/>
+          <p:nvPr/>
+        </p:nvSpPr>
+        <p:spPr>
+          <a:xfrm>
+            <a:off x="7044825" y="6581001"/>
+            <a:ext cx="5147175" cy="276999"/>
+          </a:xfrm>
+          <a:prstGeom prst="rect">
+            <a:avLst/>
+          </a:prstGeom>
+          <a:noFill/>
+        </p:spPr>
+        <p:txBody>
+          <a:bodyPr wrap="square" rtlCol="0">
+            <a:spAutoFit/>
+          </a:bodyPr>
+          <a:lstStyle/>
+          <a:p>
+            <a:r>
+              <a:rPr lang="en-GB" sz="1200" dirty="0"/>
+              <a:t>Link to all materials: </a:t>
+            </a:r>
+            <a:r>
+              <a:rPr lang="en-GB" sz="1200" dirty="0">
+                <a:solidFill>
+                  <a:srgbClr val="00B0F0"/>
+                </a:solidFill>
+              </a:rPr>
+              <a:t>https://</a:t>
+            </a:r>
+            <a:r>
+              <a:rPr lang="en-GB" sz="1200" dirty="0" err="1">
+                <a:solidFill>
+                  <a:srgbClr val="00B0F0"/>
+                </a:solidFill>
+              </a:rPr>
+              <a:t>github.com</a:t>
+            </a:r>
+            <a:r>
+              <a:rPr lang="en-GB" sz="1200" dirty="0">
+                <a:solidFill>
+                  <a:srgbClr val="00B0F0"/>
+                </a:solidFill>
+              </a:rPr>
+              <a:t>/Risk-Team/trainings/tree/main/STP</a:t>
+            </a:r>
+            <a:endParaRPr lang="en-IT" sz="1200" dirty="0">
+              <a:solidFill>
+                <a:srgbClr val="00B0F0"/>
+              </a:solidFill>
+            </a:endParaRPr>
+          </a:p>
+        </p:txBody>
+      </p:sp>
+    </p:spTree>
+    <p:extLst>
+      <p:ext uri="{BB962C8B-B14F-4D97-AF65-F5344CB8AC3E}">
+        <p14:creationId xmlns:p14="http://schemas.microsoft.com/office/powerpoint/2010/main" val="3970767987"/>
+      </p:ext>
+    </p:extLst>
+  </p:cSld>
+  <p:clrMapOvr>
+    <a:masterClrMapping/>
+  </p:clrMapOvr>
+</p:sld>
+</file>
+
 <file path=ppt/slides/slide2.xml><?xml version="1.0" encoding="utf-8"?>
 <p:sld xmlns:a="http://schemas.openxmlformats.org/drawingml/2006/main" xmlns:r="http://schemas.openxmlformats.org/officeDocument/2006/relationships" xmlns:p="http://schemas.openxmlformats.org/presentationml/2006/main">
   <p:cSld>
@@ -14080,6 +18989,3171 @@
     <p:extLst>
       <p:ext uri="{BB962C8B-B14F-4D97-AF65-F5344CB8AC3E}">
         <p14:creationId xmlns:p14="http://schemas.microsoft.com/office/powerpoint/2010/main" val="2066429760"/>
+      </p:ext>
+    </p:extLst>
+  </p:cSld>
+  <p:clrMapOvr>
+    <a:masterClrMapping/>
+  </p:clrMapOvr>
+</p:sld>
+</file>
+
+<file path=ppt/slides/slide20.xml><?xml version="1.0" encoding="utf-8"?>
+<p:sld xmlns:a="http://schemas.openxmlformats.org/drawingml/2006/main" xmlns:r="http://schemas.openxmlformats.org/officeDocument/2006/relationships" xmlns:p="http://schemas.openxmlformats.org/presentationml/2006/main">
+  <p:cSld>
+    <p:spTree>
+      <p:nvGrpSpPr>
+        <p:cNvPr id="1" name="">
+          <a:extLst>
+            <a:ext uri="{FF2B5EF4-FFF2-40B4-BE49-F238E27FC236}">
+              <a16:creationId xmlns:a16="http://schemas.microsoft.com/office/drawing/2014/main" id="{FC27E5DC-7CF3-CA50-DFF4-753723BAE0C5}"/>
+            </a:ext>
+          </a:extLst>
+        </p:cNvPr>
+        <p:cNvGrpSpPr/>
+        <p:nvPr/>
+      </p:nvGrpSpPr>
+      <p:grpSpPr>
+        <a:xfrm>
+          <a:off x="0" y="0"/>
+          <a:ext cx="0" cy="0"/>
+          <a:chOff x="0" y="0"/>
+          <a:chExt cx="0" cy="0"/>
+        </a:xfrm>
+      </p:grpSpPr>
+      <p:sp>
+        <p:nvSpPr>
+          <p:cNvPr id="2" name="Title 1">
+            <a:extLst>
+              <a:ext uri="{FF2B5EF4-FFF2-40B4-BE49-F238E27FC236}">
+                <a16:creationId xmlns:a16="http://schemas.microsoft.com/office/drawing/2014/main" id="{4439049A-A1D3-8B5F-48BA-F4A8F87AC108}"/>
+              </a:ext>
+            </a:extLst>
+          </p:cNvPr>
+          <p:cNvSpPr>
+            <a:spLocks noGrp="1"/>
+          </p:cNvSpPr>
+          <p:nvPr>
+            <p:ph type="title"/>
+          </p:nvPr>
+        </p:nvSpPr>
+        <p:spPr>
+          <a:xfrm>
+            <a:off x="582983" y="512502"/>
+            <a:ext cx="11208272" cy="1243578"/>
+          </a:xfrm>
+        </p:spPr>
+        <p:txBody>
+          <a:bodyPr>
+            <a:noAutofit/>
+          </a:bodyPr>
+          <a:lstStyle/>
+          <a:p>
+            <a:r>
+              <a:rPr lang="en-US" sz="2900" b="1" dirty="0">
+                <a:solidFill>
+                  <a:srgbClr val="0070C0"/>
+                </a:solidFill>
+                <a:latin typeface="Arial" panose="020B0604020202020204" pitchFamily="34" charset="0"/>
+                <a:cs typeface="Arial" panose="020B0604020202020204" pitchFamily="34" charset="0"/>
+              </a:rPr>
+              <a:t>Climate change impacts and risks. What are they?</a:t>
+            </a:r>
+          </a:p>
+        </p:txBody>
+      </p:sp>
+      <p:grpSp>
+        <p:nvGrpSpPr>
+          <p:cNvPr id="6" name="Group 5">
+            <a:extLst>
+              <a:ext uri="{FF2B5EF4-FFF2-40B4-BE49-F238E27FC236}">
+                <a16:creationId xmlns:a16="http://schemas.microsoft.com/office/drawing/2014/main" id="{34F6AB6F-0078-5D69-6B5D-AB62457ED494}"/>
+              </a:ext>
+            </a:extLst>
+          </p:cNvPr>
+          <p:cNvGrpSpPr/>
+          <p:nvPr/>
+        </p:nvGrpSpPr>
+        <p:grpSpPr>
+          <a:xfrm>
+            <a:off x="-16329" y="-38779"/>
+            <a:ext cx="12393386" cy="316366"/>
+            <a:chOff x="-16329" y="5228994"/>
+            <a:chExt cx="12208329" cy="575436"/>
+          </a:xfrm>
+        </p:grpSpPr>
+        <p:sp>
+          <p:nvSpPr>
+            <p:cNvPr id="8" name="Rectangle 7">
+              <a:extLst>
+                <a:ext uri="{FF2B5EF4-FFF2-40B4-BE49-F238E27FC236}">
+                  <a16:creationId xmlns:a16="http://schemas.microsoft.com/office/drawing/2014/main" id="{728710EA-4996-CE61-C2FF-0C7CA911875B}"/>
+                </a:ext>
+              </a:extLst>
+            </p:cNvPr>
+            <p:cNvSpPr/>
+            <p:nvPr/>
+          </p:nvSpPr>
+          <p:spPr>
+            <a:xfrm>
+              <a:off x="-16329" y="5228994"/>
+              <a:ext cx="10205358" cy="575436"/>
+            </a:xfrm>
+            <a:prstGeom prst="rect">
+              <a:avLst/>
+            </a:prstGeom>
+            <a:solidFill>
+              <a:schemeClr val="accent5">
+                <a:lumMod val="50000"/>
+              </a:schemeClr>
+            </a:solidFill>
+            <a:ln>
+              <a:noFill/>
+            </a:ln>
+          </p:spPr>
+          <p:style>
+            <a:lnRef idx="2">
+              <a:schemeClr val="accent1">
+                <a:shade val="50000"/>
+              </a:schemeClr>
+            </a:lnRef>
+            <a:fillRef idx="1">
+              <a:schemeClr val="accent1"/>
+            </a:fillRef>
+            <a:effectRef idx="0">
+              <a:schemeClr val="accent1"/>
+            </a:effectRef>
+            <a:fontRef idx="minor">
+              <a:schemeClr val="lt1"/>
+            </a:fontRef>
+          </p:style>
+          <p:txBody>
+            <a:bodyPr rtlCol="0" anchor="ctr"/>
+            <a:lstStyle/>
+            <a:p>
+              <a:pPr algn="ctr"/>
+              <a:endParaRPr lang="en-US"/>
+            </a:p>
+          </p:txBody>
+        </p:sp>
+        <p:sp>
+          <p:nvSpPr>
+            <p:cNvPr id="9" name="Rectangle 8">
+              <a:extLst>
+                <a:ext uri="{FF2B5EF4-FFF2-40B4-BE49-F238E27FC236}">
+                  <a16:creationId xmlns:a16="http://schemas.microsoft.com/office/drawing/2014/main" id="{ED7E3C5C-E7CE-89B2-5001-C0C6B6657646}"/>
+                </a:ext>
+              </a:extLst>
+            </p:cNvPr>
+            <p:cNvSpPr/>
+            <p:nvPr/>
+          </p:nvSpPr>
+          <p:spPr>
+            <a:xfrm>
+              <a:off x="10189029" y="5228994"/>
+              <a:ext cx="2002971" cy="575435"/>
+            </a:xfrm>
+            <a:prstGeom prst="rect">
+              <a:avLst/>
+            </a:prstGeom>
+            <a:solidFill>
+              <a:schemeClr val="accent4"/>
+            </a:solidFill>
+            <a:ln>
+              <a:noFill/>
+            </a:ln>
+          </p:spPr>
+          <p:style>
+            <a:lnRef idx="2">
+              <a:schemeClr val="accent1">
+                <a:shade val="50000"/>
+              </a:schemeClr>
+            </a:lnRef>
+            <a:fillRef idx="1">
+              <a:schemeClr val="accent1"/>
+            </a:fillRef>
+            <a:effectRef idx="0">
+              <a:schemeClr val="accent1"/>
+            </a:effectRef>
+            <a:fontRef idx="minor">
+              <a:schemeClr val="lt1"/>
+            </a:fontRef>
+          </p:style>
+          <p:txBody>
+            <a:bodyPr rtlCol="0" anchor="ctr"/>
+            <a:lstStyle/>
+            <a:p>
+              <a:pPr algn="ctr"/>
+              <a:endParaRPr lang="en-US"/>
+            </a:p>
+          </p:txBody>
+        </p:sp>
+      </p:grpSp>
+      <p:cxnSp>
+        <p:nvCxnSpPr>
+          <p:cNvPr id="10" name="Connecteur droit 6">
+            <a:extLst>
+              <a:ext uri="{FF2B5EF4-FFF2-40B4-BE49-F238E27FC236}">
+                <a16:creationId xmlns:a16="http://schemas.microsoft.com/office/drawing/2014/main" id="{3E0D34A3-D9DD-0C0A-7F88-522EC20C22F7}"/>
+              </a:ext>
+            </a:extLst>
+          </p:cNvPr>
+          <p:cNvCxnSpPr>
+            <a:cxnSpLocks/>
+          </p:cNvCxnSpPr>
+          <p:nvPr/>
+        </p:nvCxnSpPr>
+        <p:spPr>
+          <a:xfrm>
+            <a:off x="-16329" y="395044"/>
+            <a:ext cx="12208329" cy="0"/>
+          </a:xfrm>
+          <a:prstGeom prst="line">
+            <a:avLst/>
+          </a:prstGeom>
+          <a:ln w="28575"/>
+        </p:spPr>
+        <p:style>
+          <a:lnRef idx="1">
+            <a:schemeClr val="accent1"/>
+          </a:lnRef>
+          <a:fillRef idx="0">
+            <a:schemeClr val="accent1"/>
+          </a:fillRef>
+          <a:effectRef idx="0">
+            <a:schemeClr val="accent1"/>
+          </a:effectRef>
+          <a:fontRef idx="minor">
+            <a:schemeClr val="tx1"/>
+          </a:fontRef>
+        </p:style>
+      </p:cxnSp>
+      <p:pic>
+        <p:nvPicPr>
+          <p:cNvPr id="17" name="object 13">
+            <a:extLst>
+              <a:ext uri="{FF2B5EF4-FFF2-40B4-BE49-F238E27FC236}">
+                <a16:creationId xmlns:a16="http://schemas.microsoft.com/office/drawing/2014/main" id="{A3CA4953-25C3-72A3-BEC6-4E0885A2E4CA}"/>
+              </a:ext>
+            </a:extLst>
+          </p:cNvPr>
+          <p:cNvPicPr/>
+          <p:nvPr/>
+        </p:nvPicPr>
+        <p:blipFill>
+          <a:blip r:embed="rId2" cstate="print"/>
+          <a:stretch>
+            <a:fillRect/>
+          </a:stretch>
+        </p:blipFill>
+        <p:spPr>
+          <a:xfrm>
+            <a:off x="7002239" y="4201335"/>
+            <a:ext cx="3847151" cy="1086673"/>
+          </a:xfrm>
+          <a:prstGeom prst="rect">
+            <a:avLst/>
+          </a:prstGeom>
+        </p:spPr>
+      </p:pic>
+      <p:pic>
+        <p:nvPicPr>
+          <p:cNvPr id="5" name="Picture 4">
+            <a:extLst>
+              <a:ext uri="{FF2B5EF4-FFF2-40B4-BE49-F238E27FC236}">
+                <a16:creationId xmlns:a16="http://schemas.microsoft.com/office/drawing/2014/main" id="{EFD8E5EB-C3BF-F49C-09A7-8A5C1F008995}"/>
+              </a:ext>
+            </a:extLst>
+          </p:cNvPr>
+          <p:cNvPicPr>
+            <a:picLocks noChangeAspect="1"/>
+          </p:cNvPicPr>
+          <p:nvPr/>
+        </p:nvPicPr>
+        <p:blipFill>
+          <a:blip r:embed="rId3">
+            <a:extLst>
+              <a:ext uri="{28A0092B-C50C-407E-A947-70E740481C1C}">
+                <a14:useLocalDpi xmlns:a14="http://schemas.microsoft.com/office/drawing/2010/main" val="0"/>
+              </a:ext>
+            </a:extLst>
+          </a:blip>
+          <a:stretch>
+            <a:fillRect/>
+          </a:stretch>
+        </p:blipFill>
+        <p:spPr>
+          <a:xfrm>
+            <a:off x="2726439" y="2489487"/>
+            <a:ext cx="3973469" cy="3973469"/>
+          </a:xfrm>
+          <a:prstGeom prst="rect">
+            <a:avLst/>
+          </a:prstGeom>
+        </p:spPr>
+      </p:pic>
+      <p:sp>
+        <p:nvSpPr>
+          <p:cNvPr id="7" name="object 7">
+            <a:extLst>
+              <a:ext uri="{FF2B5EF4-FFF2-40B4-BE49-F238E27FC236}">
+                <a16:creationId xmlns:a16="http://schemas.microsoft.com/office/drawing/2014/main" id="{35E77BD8-014C-E3CB-637B-6D3E5D5E0F2A}"/>
+              </a:ext>
+            </a:extLst>
+          </p:cNvPr>
+          <p:cNvSpPr txBox="1"/>
+          <p:nvPr/>
+        </p:nvSpPr>
+        <p:spPr>
+          <a:xfrm>
+            <a:off x="6715497" y="1729136"/>
+            <a:ext cx="5522595" cy="721351"/>
+          </a:xfrm>
+          <a:prstGeom prst="rect">
+            <a:avLst/>
+          </a:prstGeom>
+        </p:spPr>
+        <p:txBody>
+          <a:bodyPr vert="horz" wrap="square" lIns="0" tIns="13335" rIns="0" bIns="0" rtlCol="0">
+            <a:spAutoFit/>
+          </a:bodyPr>
+          <a:lstStyle/>
+          <a:p>
+            <a:pPr marL="333375" indent="-285750">
+              <a:lnSpc>
+                <a:spcPct val="100000"/>
+              </a:lnSpc>
+              <a:spcBef>
+                <a:spcPts val="1230"/>
+              </a:spcBef>
+              <a:buFont typeface="Wingdings" pitchFamily="2" charset="2"/>
+              <a:buChar char="Ø"/>
+              <a:tabLst>
+                <a:tab pos="377825" algn="l"/>
+              </a:tabLst>
+            </a:pPr>
+            <a:r>
+              <a:rPr dirty="0">
+                <a:solidFill>
+                  <a:srgbClr val="464648"/>
+                </a:solidFill>
+                <a:latin typeface="Calibri" panose="020F0502020204030204" pitchFamily="34" charset="0"/>
+                <a:cs typeface="Calibri" panose="020F0502020204030204" pitchFamily="34" charset="0"/>
+              </a:rPr>
+              <a:t>Reduced</a:t>
+            </a:r>
+            <a:r>
+              <a:rPr spc="-30" dirty="0">
+                <a:solidFill>
+                  <a:srgbClr val="464648"/>
+                </a:solidFill>
+                <a:latin typeface="Calibri" panose="020F0502020204030204" pitchFamily="34" charset="0"/>
+                <a:cs typeface="Calibri" panose="020F0502020204030204" pitchFamily="34" charset="0"/>
+              </a:rPr>
+              <a:t> </a:t>
+            </a:r>
+            <a:r>
+              <a:rPr dirty="0">
+                <a:solidFill>
+                  <a:srgbClr val="464648"/>
+                </a:solidFill>
+                <a:latin typeface="Calibri" panose="020F0502020204030204" pitchFamily="34" charset="0"/>
+                <a:cs typeface="Calibri" panose="020F0502020204030204" pitchFamily="34" charset="0"/>
+              </a:rPr>
+              <a:t>climate</a:t>
+            </a:r>
+            <a:r>
+              <a:rPr spc="-35" dirty="0">
+                <a:solidFill>
+                  <a:srgbClr val="464648"/>
+                </a:solidFill>
+                <a:latin typeface="Calibri" panose="020F0502020204030204" pitchFamily="34" charset="0"/>
+                <a:cs typeface="Calibri" panose="020F0502020204030204" pitchFamily="34" charset="0"/>
+              </a:rPr>
+              <a:t> </a:t>
+            </a:r>
+            <a:r>
+              <a:rPr dirty="0">
+                <a:solidFill>
+                  <a:srgbClr val="464648"/>
+                </a:solidFill>
+                <a:latin typeface="Calibri" panose="020F0502020204030204" pitchFamily="34" charset="0"/>
+                <a:cs typeface="Calibri" panose="020F0502020204030204" pitchFamily="34" charset="0"/>
+              </a:rPr>
+              <a:t>risks</a:t>
+            </a:r>
+            <a:r>
+              <a:rPr spc="-10" dirty="0">
+                <a:solidFill>
+                  <a:srgbClr val="464648"/>
+                </a:solidFill>
+                <a:latin typeface="Calibri" panose="020F0502020204030204" pitchFamily="34" charset="0"/>
+                <a:cs typeface="Calibri" panose="020F0502020204030204" pitchFamily="34" charset="0"/>
+              </a:rPr>
+              <a:t> </a:t>
+            </a:r>
+            <a:r>
+              <a:rPr dirty="0">
+                <a:solidFill>
+                  <a:srgbClr val="464648"/>
+                </a:solidFill>
+                <a:latin typeface="Calibri" panose="020F0502020204030204" pitchFamily="34" charset="0"/>
+                <a:cs typeface="Calibri" panose="020F0502020204030204" pitchFamily="34" charset="0"/>
+              </a:rPr>
+              <a:t>–</a:t>
+            </a:r>
+            <a:r>
+              <a:rPr spc="-30" dirty="0">
+                <a:solidFill>
+                  <a:srgbClr val="464648"/>
+                </a:solidFill>
+                <a:latin typeface="Calibri" panose="020F0502020204030204" pitchFamily="34" charset="0"/>
+                <a:cs typeface="Calibri" panose="020F0502020204030204" pitchFamily="34" charset="0"/>
+              </a:rPr>
+              <a:t> </a:t>
+            </a:r>
+            <a:r>
+              <a:rPr b="1" dirty="0">
+                <a:solidFill>
+                  <a:srgbClr val="464648"/>
+                </a:solidFill>
+                <a:latin typeface="Calibri" panose="020F0502020204030204" pitchFamily="34" charset="0"/>
+                <a:cs typeface="Calibri" panose="020F0502020204030204" pitchFamily="34" charset="0"/>
+              </a:rPr>
+              <a:t>adaptation</a:t>
+            </a:r>
+            <a:r>
+              <a:rPr b="1" spc="-25" dirty="0">
+                <a:solidFill>
+                  <a:srgbClr val="464648"/>
+                </a:solidFill>
+                <a:latin typeface="Calibri" panose="020F0502020204030204" pitchFamily="34" charset="0"/>
+                <a:cs typeface="Calibri" panose="020F0502020204030204" pitchFamily="34" charset="0"/>
+              </a:rPr>
+              <a:t> </a:t>
+            </a:r>
+            <a:r>
+              <a:rPr b="1" dirty="0">
+                <a:solidFill>
+                  <a:srgbClr val="464648"/>
+                </a:solidFill>
+                <a:latin typeface="Calibri" panose="020F0502020204030204" pitchFamily="34" charset="0"/>
+                <a:cs typeface="Calibri" panose="020F0502020204030204" pitchFamily="34" charset="0"/>
+              </a:rPr>
+              <a:t>and</a:t>
+            </a:r>
+            <a:r>
+              <a:rPr b="1" spc="-15" dirty="0">
+                <a:solidFill>
+                  <a:srgbClr val="464648"/>
+                </a:solidFill>
+                <a:latin typeface="Calibri" panose="020F0502020204030204" pitchFamily="34" charset="0"/>
+                <a:cs typeface="Calibri" panose="020F0502020204030204" pitchFamily="34" charset="0"/>
+              </a:rPr>
+              <a:t> </a:t>
+            </a:r>
+            <a:r>
+              <a:rPr b="1" spc="-10" dirty="0">
+                <a:solidFill>
+                  <a:srgbClr val="464648"/>
+                </a:solidFill>
+                <a:latin typeface="Calibri" panose="020F0502020204030204" pitchFamily="34" charset="0"/>
+                <a:cs typeface="Calibri" panose="020F0502020204030204" pitchFamily="34" charset="0"/>
+              </a:rPr>
+              <a:t>mitigation</a:t>
+            </a:r>
+            <a:endParaRPr lang="it-IT" b="1" spc="-10" dirty="0">
+              <a:latin typeface="Calibri" panose="020F0502020204030204" pitchFamily="34" charset="0"/>
+              <a:cs typeface="Calibri" panose="020F0502020204030204" pitchFamily="34" charset="0"/>
+            </a:endParaRPr>
+          </a:p>
+          <a:p>
+            <a:pPr marL="333375" indent="-285750">
+              <a:lnSpc>
+                <a:spcPct val="100000"/>
+              </a:lnSpc>
+              <a:spcBef>
+                <a:spcPts val="1230"/>
+              </a:spcBef>
+              <a:buFont typeface="Wingdings" pitchFamily="2" charset="2"/>
+              <a:buChar char="Ø"/>
+              <a:tabLst>
+                <a:tab pos="377825" algn="l"/>
+              </a:tabLst>
+            </a:pPr>
+            <a:r>
+              <a:rPr dirty="0">
+                <a:solidFill>
+                  <a:srgbClr val="464648"/>
+                </a:solidFill>
+                <a:latin typeface="Calibri" panose="020F0502020204030204" pitchFamily="34" charset="0"/>
+                <a:cs typeface="Calibri" panose="020F0502020204030204" pitchFamily="34" charset="0"/>
+              </a:rPr>
+              <a:t>Reduced</a:t>
+            </a:r>
+            <a:r>
+              <a:rPr spc="-40" dirty="0">
+                <a:solidFill>
+                  <a:srgbClr val="464648"/>
+                </a:solidFill>
+                <a:latin typeface="Calibri" panose="020F0502020204030204" pitchFamily="34" charset="0"/>
+                <a:cs typeface="Calibri" panose="020F0502020204030204" pitchFamily="34" charset="0"/>
+              </a:rPr>
+              <a:t> </a:t>
+            </a:r>
+            <a:r>
+              <a:rPr dirty="0">
+                <a:solidFill>
+                  <a:srgbClr val="464648"/>
+                </a:solidFill>
+                <a:latin typeface="Calibri" panose="020F0502020204030204" pitchFamily="34" charset="0"/>
+                <a:cs typeface="Calibri" panose="020F0502020204030204" pitchFamily="34" charset="0"/>
+              </a:rPr>
+              <a:t>greenhouse</a:t>
+            </a:r>
+            <a:r>
+              <a:rPr spc="-40" dirty="0">
+                <a:solidFill>
+                  <a:srgbClr val="464648"/>
+                </a:solidFill>
+                <a:latin typeface="Calibri" panose="020F0502020204030204" pitchFamily="34" charset="0"/>
+                <a:cs typeface="Calibri" panose="020F0502020204030204" pitchFamily="34" charset="0"/>
+              </a:rPr>
+              <a:t> </a:t>
+            </a:r>
+            <a:r>
+              <a:rPr dirty="0">
+                <a:solidFill>
+                  <a:srgbClr val="464648"/>
+                </a:solidFill>
+                <a:latin typeface="Calibri" panose="020F0502020204030204" pitchFamily="34" charset="0"/>
+                <a:cs typeface="Calibri" panose="020F0502020204030204" pitchFamily="34" charset="0"/>
+              </a:rPr>
+              <a:t>gas</a:t>
+            </a:r>
+            <a:r>
+              <a:rPr spc="-15" dirty="0">
+                <a:solidFill>
+                  <a:srgbClr val="464648"/>
+                </a:solidFill>
+                <a:latin typeface="Calibri" panose="020F0502020204030204" pitchFamily="34" charset="0"/>
+                <a:cs typeface="Calibri" panose="020F0502020204030204" pitchFamily="34" charset="0"/>
+              </a:rPr>
+              <a:t> </a:t>
+            </a:r>
+            <a:r>
+              <a:rPr dirty="0">
+                <a:solidFill>
+                  <a:srgbClr val="464648"/>
+                </a:solidFill>
+                <a:latin typeface="Calibri" panose="020F0502020204030204" pitchFamily="34" charset="0"/>
+                <a:cs typeface="Calibri" panose="020F0502020204030204" pitchFamily="34" charset="0"/>
+              </a:rPr>
+              <a:t>emissions</a:t>
+            </a:r>
+            <a:r>
+              <a:rPr spc="-45" dirty="0">
+                <a:solidFill>
+                  <a:srgbClr val="464648"/>
+                </a:solidFill>
+                <a:latin typeface="Calibri" panose="020F0502020204030204" pitchFamily="34" charset="0"/>
+                <a:cs typeface="Calibri" panose="020F0502020204030204" pitchFamily="34" charset="0"/>
+              </a:rPr>
+              <a:t> </a:t>
+            </a:r>
+            <a:r>
+              <a:rPr dirty="0">
+                <a:solidFill>
+                  <a:srgbClr val="464648"/>
+                </a:solidFill>
+                <a:latin typeface="Calibri" panose="020F0502020204030204" pitchFamily="34" charset="0"/>
+                <a:cs typeface="Calibri" panose="020F0502020204030204" pitchFamily="34" charset="0"/>
+              </a:rPr>
+              <a:t>–</a:t>
+            </a:r>
+            <a:r>
+              <a:rPr spc="-40" dirty="0">
+                <a:solidFill>
+                  <a:srgbClr val="464648"/>
+                </a:solidFill>
+                <a:latin typeface="Calibri" panose="020F0502020204030204" pitchFamily="34" charset="0"/>
+                <a:cs typeface="Calibri" panose="020F0502020204030204" pitchFamily="34" charset="0"/>
+              </a:rPr>
+              <a:t> </a:t>
+            </a:r>
+            <a:r>
+              <a:rPr b="1" spc="-10" dirty="0">
+                <a:solidFill>
+                  <a:srgbClr val="464648"/>
+                </a:solidFill>
+                <a:latin typeface="Calibri" panose="020F0502020204030204" pitchFamily="34" charset="0"/>
+                <a:cs typeface="Calibri" panose="020F0502020204030204" pitchFamily="34" charset="0"/>
+              </a:rPr>
+              <a:t>mitigation</a:t>
+            </a:r>
+            <a:endParaRPr b="1" dirty="0">
+              <a:latin typeface="Calibri" panose="020F0502020204030204" pitchFamily="34" charset="0"/>
+              <a:cs typeface="Calibri" panose="020F0502020204030204" pitchFamily="34" charset="0"/>
+            </a:endParaRPr>
+          </a:p>
+        </p:txBody>
+      </p:sp>
+      <p:sp>
+        <p:nvSpPr>
+          <p:cNvPr id="11" name="object 7">
+            <a:extLst>
+              <a:ext uri="{FF2B5EF4-FFF2-40B4-BE49-F238E27FC236}">
+                <a16:creationId xmlns:a16="http://schemas.microsoft.com/office/drawing/2014/main" id="{7FDBF489-7FC9-2C67-B0F8-A569C3B55A9B}"/>
+              </a:ext>
+            </a:extLst>
+          </p:cNvPr>
+          <p:cNvSpPr txBox="1"/>
+          <p:nvPr/>
+        </p:nvSpPr>
+        <p:spPr>
+          <a:xfrm>
+            <a:off x="470442" y="1729135"/>
+            <a:ext cx="5522595" cy="721351"/>
+          </a:xfrm>
+          <a:prstGeom prst="rect">
+            <a:avLst/>
+          </a:prstGeom>
+        </p:spPr>
+        <p:txBody>
+          <a:bodyPr vert="horz" wrap="square" lIns="0" tIns="13335" rIns="0" bIns="0" rtlCol="0">
+            <a:spAutoFit/>
+          </a:bodyPr>
+          <a:lstStyle/>
+          <a:p>
+            <a:pPr marL="333375" indent="-285750">
+              <a:lnSpc>
+                <a:spcPct val="100000"/>
+              </a:lnSpc>
+              <a:spcBef>
+                <a:spcPts val="1230"/>
+              </a:spcBef>
+              <a:buFont typeface="Wingdings" pitchFamily="2" charset="2"/>
+              <a:buChar char="Ø"/>
+              <a:tabLst>
+                <a:tab pos="377825" algn="l"/>
+              </a:tabLst>
+            </a:pPr>
+            <a:r>
+              <a:rPr lang="it-IT" dirty="0">
+                <a:solidFill>
+                  <a:srgbClr val="464648"/>
+                </a:solidFill>
+                <a:latin typeface="Calibri" panose="020F0502020204030204" pitchFamily="34" charset="0"/>
+                <a:cs typeface="Calibri" panose="020F0502020204030204" pitchFamily="34" charset="0"/>
+              </a:rPr>
+              <a:t>C</a:t>
+            </a:r>
+            <a:r>
+              <a:rPr dirty="0" err="1">
+                <a:solidFill>
+                  <a:srgbClr val="464648"/>
+                </a:solidFill>
+                <a:latin typeface="Calibri" panose="020F0502020204030204" pitchFamily="34" charset="0"/>
+                <a:cs typeface="Calibri" panose="020F0502020204030204" pitchFamily="34" charset="0"/>
+              </a:rPr>
+              <a:t>limate</a:t>
+            </a:r>
+            <a:r>
+              <a:rPr spc="-35" dirty="0">
+                <a:solidFill>
+                  <a:srgbClr val="464648"/>
+                </a:solidFill>
+                <a:latin typeface="Calibri" panose="020F0502020204030204" pitchFamily="34" charset="0"/>
+                <a:cs typeface="Calibri" panose="020F0502020204030204" pitchFamily="34" charset="0"/>
+              </a:rPr>
+              <a:t> </a:t>
+            </a:r>
+            <a:r>
+              <a:rPr lang="it-IT" spc="-35" dirty="0">
+                <a:solidFill>
+                  <a:srgbClr val="464648"/>
+                </a:solidFill>
+                <a:latin typeface="Calibri" panose="020F0502020204030204" pitchFamily="34" charset="0"/>
+                <a:cs typeface="Calibri" panose="020F0502020204030204" pitchFamily="34" charset="0"/>
+              </a:rPr>
+              <a:t>Impacts</a:t>
+            </a:r>
+            <a:r>
+              <a:rPr spc="-10" dirty="0">
+                <a:solidFill>
+                  <a:srgbClr val="464648"/>
+                </a:solidFill>
+                <a:latin typeface="Calibri" panose="020F0502020204030204" pitchFamily="34" charset="0"/>
+                <a:cs typeface="Calibri" panose="020F0502020204030204" pitchFamily="34" charset="0"/>
+              </a:rPr>
+              <a:t> </a:t>
+            </a:r>
+            <a:r>
+              <a:rPr dirty="0">
+                <a:solidFill>
+                  <a:srgbClr val="464648"/>
+                </a:solidFill>
+                <a:latin typeface="Calibri" panose="020F0502020204030204" pitchFamily="34" charset="0"/>
+                <a:cs typeface="Calibri" panose="020F0502020204030204" pitchFamily="34" charset="0"/>
+              </a:rPr>
+              <a:t>–</a:t>
+            </a:r>
+            <a:r>
+              <a:rPr spc="-30" dirty="0">
+                <a:solidFill>
+                  <a:srgbClr val="464648"/>
+                </a:solidFill>
+                <a:latin typeface="Calibri" panose="020F0502020204030204" pitchFamily="34" charset="0"/>
+                <a:cs typeface="Calibri" panose="020F0502020204030204" pitchFamily="34" charset="0"/>
+              </a:rPr>
+              <a:t> </a:t>
+            </a:r>
+            <a:r>
+              <a:rPr lang="it-IT" b="1" dirty="0">
+                <a:solidFill>
+                  <a:srgbClr val="464648"/>
+                </a:solidFill>
+                <a:latin typeface="Calibri" panose="020F0502020204030204" pitchFamily="34" charset="0"/>
+                <a:cs typeface="Calibri" panose="020F0502020204030204" pitchFamily="34" charset="0"/>
+              </a:rPr>
+              <a:t>Reality</a:t>
+            </a:r>
+            <a:endParaRPr lang="it-IT" b="1" spc="-10" dirty="0">
+              <a:latin typeface="Calibri" panose="020F0502020204030204" pitchFamily="34" charset="0"/>
+              <a:cs typeface="Calibri" panose="020F0502020204030204" pitchFamily="34" charset="0"/>
+            </a:endParaRPr>
+          </a:p>
+          <a:p>
+            <a:pPr marL="333375" indent="-285750">
+              <a:lnSpc>
+                <a:spcPct val="100000"/>
+              </a:lnSpc>
+              <a:spcBef>
+                <a:spcPts val="1230"/>
+              </a:spcBef>
+              <a:buFont typeface="Wingdings" pitchFamily="2" charset="2"/>
+              <a:buChar char="Ø"/>
+              <a:tabLst>
+                <a:tab pos="377825" algn="l"/>
+              </a:tabLst>
+            </a:pPr>
+            <a:r>
+              <a:rPr lang="it-IT" dirty="0" err="1">
+                <a:solidFill>
+                  <a:srgbClr val="464648"/>
+                </a:solidFill>
+                <a:latin typeface="Calibri" panose="020F0502020204030204" pitchFamily="34" charset="0"/>
+                <a:cs typeface="Calibri" panose="020F0502020204030204" pitchFamily="34" charset="0"/>
+              </a:rPr>
+              <a:t>Climate</a:t>
+            </a:r>
+            <a:r>
+              <a:rPr lang="it-IT" dirty="0">
+                <a:solidFill>
+                  <a:srgbClr val="464648"/>
+                </a:solidFill>
+                <a:latin typeface="Calibri" panose="020F0502020204030204" pitchFamily="34" charset="0"/>
+                <a:cs typeface="Calibri" panose="020F0502020204030204" pitchFamily="34" charset="0"/>
+              </a:rPr>
+              <a:t> Risks</a:t>
+            </a:r>
+            <a:r>
+              <a:rPr dirty="0">
+                <a:solidFill>
+                  <a:srgbClr val="464648"/>
+                </a:solidFill>
+                <a:latin typeface="Calibri" panose="020F0502020204030204" pitchFamily="34" charset="0"/>
+                <a:cs typeface="Calibri" panose="020F0502020204030204" pitchFamily="34" charset="0"/>
+              </a:rPr>
+              <a:t>–</a:t>
+            </a:r>
+            <a:r>
+              <a:rPr spc="-40" dirty="0">
+                <a:solidFill>
+                  <a:srgbClr val="464648"/>
+                </a:solidFill>
+                <a:latin typeface="Calibri" panose="020F0502020204030204" pitchFamily="34" charset="0"/>
+                <a:cs typeface="Calibri" panose="020F0502020204030204" pitchFamily="34" charset="0"/>
+              </a:rPr>
+              <a:t> </a:t>
+            </a:r>
+            <a:r>
+              <a:rPr lang="it-IT" b="1" spc="-10" dirty="0" err="1">
+                <a:solidFill>
+                  <a:srgbClr val="464648"/>
+                </a:solidFill>
+                <a:latin typeface="Calibri" panose="020F0502020204030204" pitchFamily="34" charset="0"/>
+                <a:cs typeface="Calibri" panose="020F0502020204030204" pitchFamily="34" charset="0"/>
+              </a:rPr>
+              <a:t>Probability</a:t>
+            </a:r>
+            <a:endParaRPr b="1" dirty="0">
+              <a:latin typeface="Calibri" panose="020F0502020204030204" pitchFamily="34" charset="0"/>
+              <a:cs typeface="Calibri" panose="020F0502020204030204" pitchFamily="34" charset="0"/>
+            </a:endParaRPr>
+          </a:p>
+        </p:txBody>
+      </p:sp>
+    </p:spTree>
+    <p:extLst>
+      <p:ext uri="{BB962C8B-B14F-4D97-AF65-F5344CB8AC3E}">
+        <p14:creationId xmlns:p14="http://schemas.microsoft.com/office/powerpoint/2010/main" val="3039982660"/>
+      </p:ext>
+    </p:extLst>
+  </p:cSld>
+  <p:clrMapOvr>
+    <a:masterClrMapping/>
+  </p:clrMapOvr>
+</p:sld>
+</file>
+
+<file path=ppt/slides/slide21.xml><?xml version="1.0" encoding="utf-8"?>
+<p:sld xmlns:a="http://schemas.openxmlformats.org/drawingml/2006/main" xmlns:r="http://schemas.openxmlformats.org/officeDocument/2006/relationships" xmlns:p="http://schemas.openxmlformats.org/presentationml/2006/main">
+  <p:cSld>
+    <p:spTree>
+      <p:nvGrpSpPr>
+        <p:cNvPr id="1" name="">
+          <a:extLst>
+            <a:ext uri="{FF2B5EF4-FFF2-40B4-BE49-F238E27FC236}">
+              <a16:creationId xmlns:a16="http://schemas.microsoft.com/office/drawing/2014/main" id="{F2557797-98C1-8978-F4B1-EB6111C39A2B}"/>
+            </a:ext>
+          </a:extLst>
+        </p:cNvPr>
+        <p:cNvGrpSpPr/>
+        <p:nvPr/>
+      </p:nvGrpSpPr>
+      <p:grpSpPr>
+        <a:xfrm>
+          <a:off x="0" y="0"/>
+          <a:ext cx="0" cy="0"/>
+          <a:chOff x="0" y="0"/>
+          <a:chExt cx="0" cy="0"/>
+        </a:xfrm>
+      </p:grpSpPr>
+      <p:sp>
+        <p:nvSpPr>
+          <p:cNvPr id="2" name="Title 1">
+            <a:extLst>
+              <a:ext uri="{FF2B5EF4-FFF2-40B4-BE49-F238E27FC236}">
+                <a16:creationId xmlns:a16="http://schemas.microsoft.com/office/drawing/2014/main" id="{DD429220-CBBA-D2EE-F5E5-9F128AE1BC8D}"/>
+              </a:ext>
+            </a:extLst>
+          </p:cNvPr>
+          <p:cNvSpPr>
+            <a:spLocks noGrp="1"/>
+          </p:cNvSpPr>
+          <p:nvPr>
+            <p:ph type="title"/>
+          </p:nvPr>
+        </p:nvSpPr>
+        <p:spPr>
+          <a:xfrm>
+            <a:off x="582983" y="512502"/>
+            <a:ext cx="11208272" cy="1243578"/>
+          </a:xfrm>
+        </p:spPr>
+        <p:txBody>
+          <a:bodyPr>
+            <a:noAutofit/>
+          </a:bodyPr>
+          <a:lstStyle/>
+          <a:p>
+            <a:r>
+              <a:rPr lang="en-US" sz="2900" b="1" dirty="0">
+                <a:solidFill>
+                  <a:srgbClr val="0070C0"/>
+                </a:solidFill>
+                <a:latin typeface="Arial" panose="020B0604020202020204" pitchFamily="34" charset="0"/>
+                <a:cs typeface="Arial" panose="020B0604020202020204" pitchFamily="34" charset="0"/>
+              </a:rPr>
+              <a:t>Climate change impacts and risks in fishery</a:t>
+            </a:r>
+          </a:p>
+        </p:txBody>
+      </p:sp>
+      <p:grpSp>
+        <p:nvGrpSpPr>
+          <p:cNvPr id="6" name="Group 5">
+            <a:extLst>
+              <a:ext uri="{FF2B5EF4-FFF2-40B4-BE49-F238E27FC236}">
+                <a16:creationId xmlns:a16="http://schemas.microsoft.com/office/drawing/2014/main" id="{B4499469-5041-FEF9-CF16-50BFC3ABE177}"/>
+              </a:ext>
+            </a:extLst>
+          </p:cNvPr>
+          <p:cNvGrpSpPr/>
+          <p:nvPr/>
+        </p:nvGrpSpPr>
+        <p:grpSpPr>
+          <a:xfrm>
+            <a:off x="-16329" y="-38779"/>
+            <a:ext cx="12393386" cy="316366"/>
+            <a:chOff x="-16329" y="5228994"/>
+            <a:chExt cx="12208329" cy="575436"/>
+          </a:xfrm>
+        </p:grpSpPr>
+        <p:sp>
+          <p:nvSpPr>
+            <p:cNvPr id="8" name="Rectangle 7">
+              <a:extLst>
+                <a:ext uri="{FF2B5EF4-FFF2-40B4-BE49-F238E27FC236}">
+                  <a16:creationId xmlns:a16="http://schemas.microsoft.com/office/drawing/2014/main" id="{47F1D641-D9E5-430F-6F5E-48E1C24F4DFB}"/>
+                </a:ext>
+              </a:extLst>
+            </p:cNvPr>
+            <p:cNvSpPr/>
+            <p:nvPr/>
+          </p:nvSpPr>
+          <p:spPr>
+            <a:xfrm>
+              <a:off x="-16329" y="5228994"/>
+              <a:ext cx="10205358" cy="575436"/>
+            </a:xfrm>
+            <a:prstGeom prst="rect">
+              <a:avLst/>
+            </a:prstGeom>
+            <a:solidFill>
+              <a:schemeClr val="accent5">
+                <a:lumMod val="50000"/>
+              </a:schemeClr>
+            </a:solidFill>
+            <a:ln>
+              <a:noFill/>
+            </a:ln>
+          </p:spPr>
+          <p:style>
+            <a:lnRef idx="2">
+              <a:schemeClr val="accent1">
+                <a:shade val="50000"/>
+              </a:schemeClr>
+            </a:lnRef>
+            <a:fillRef idx="1">
+              <a:schemeClr val="accent1"/>
+            </a:fillRef>
+            <a:effectRef idx="0">
+              <a:schemeClr val="accent1"/>
+            </a:effectRef>
+            <a:fontRef idx="minor">
+              <a:schemeClr val="lt1"/>
+            </a:fontRef>
+          </p:style>
+          <p:txBody>
+            <a:bodyPr rtlCol="0" anchor="ctr"/>
+            <a:lstStyle/>
+            <a:p>
+              <a:pPr algn="ctr"/>
+              <a:endParaRPr lang="en-US"/>
+            </a:p>
+          </p:txBody>
+        </p:sp>
+        <p:sp>
+          <p:nvSpPr>
+            <p:cNvPr id="9" name="Rectangle 8">
+              <a:extLst>
+                <a:ext uri="{FF2B5EF4-FFF2-40B4-BE49-F238E27FC236}">
+                  <a16:creationId xmlns:a16="http://schemas.microsoft.com/office/drawing/2014/main" id="{0A497C2A-E085-7D13-02D1-DCC6CC29A95A}"/>
+                </a:ext>
+              </a:extLst>
+            </p:cNvPr>
+            <p:cNvSpPr/>
+            <p:nvPr/>
+          </p:nvSpPr>
+          <p:spPr>
+            <a:xfrm>
+              <a:off x="10189029" y="5228994"/>
+              <a:ext cx="2002971" cy="575435"/>
+            </a:xfrm>
+            <a:prstGeom prst="rect">
+              <a:avLst/>
+            </a:prstGeom>
+            <a:solidFill>
+              <a:schemeClr val="accent4"/>
+            </a:solidFill>
+            <a:ln>
+              <a:noFill/>
+            </a:ln>
+          </p:spPr>
+          <p:style>
+            <a:lnRef idx="2">
+              <a:schemeClr val="accent1">
+                <a:shade val="50000"/>
+              </a:schemeClr>
+            </a:lnRef>
+            <a:fillRef idx="1">
+              <a:schemeClr val="accent1"/>
+            </a:fillRef>
+            <a:effectRef idx="0">
+              <a:schemeClr val="accent1"/>
+            </a:effectRef>
+            <a:fontRef idx="minor">
+              <a:schemeClr val="lt1"/>
+            </a:fontRef>
+          </p:style>
+          <p:txBody>
+            <a:bodyPr rtlCol="0" anchor="ctr"/>
+            <a:lstStyle/>
+            <a:p>
+              <a:pPr algn="ctr"/>
+              <a:endParaRPr lang="en-US"/>
+            </a:p>
+          </p:txBody>
+        </p:sp>
+      </p:grpSp>
+      <p:cxnSp>
+        <p:nvCxnSpPr>
+          <p:cNvPr id="10" name="Connecteur droit 6">
+            <a:extLst>
+              <a:ext uri="{FF2B5EF4-FFF2-40B4-BE49-F238E27FC236}">
+                <a16:creationId xmlns:a16="http://schemas.microsoft.com/office/drawing/2014/main" id="{3F62C17F-2868-0575-8D19-B37C7685B1EA}"/>
+              </a:ext>
+            </a:extLst>
+          </p:cNvPr>
+          <p:cNvCxnSpPr>
+            <a:cxnSpLocks/>
+          </p:cNvCxnSpPr>
+          <p:nvPr/>
+        </p:nvCxnSpPr>
+        <p:spPr>
+          <a:xfrm>
+            <a:off x="-16329" y="395044"/>
+            <a:ext cx="12208329" cy="0"/>
+          </a:xfrm>
+          <a:prstGeom prst="line">
+            <a:avLst/>
+          </a:prstGeom>
+          <a:ln w="28575"/>
+        </p:spPr>
+        <p:style>
+          <a:lnRef idx="1">
+            <a:schemeClr val="accent1"/>
+          </a:lnRef>
+          <a:fillRef idx="0">
+            <a:schemeClr val="accent1"/>
+          </a:fillRef>
+          <a:effectRef idx="0">
+            <a:schemeClr val="accent1"/>
+          </a:effectRef>
+          <a:fontRef idx="minor">
+            <a:schemeClr val="tx1"/>
+          </a:fontRef>
+        </p:style>
+      </p:cxnSp>
+      <p:sp>
+        <p:nvSpPr>
+          <p:cNvPr id="13" name="TextBox 12">
+            <a:extLst>
+              <a:ext uri="{FF2B5EF4-FFF2-40B4-BE49-F238E27FC236}">
+                <a16:creationId xmlns:a16="http://schemas.microsoft.com/office/drawing/2014/main" id="{D36D6E68-2B56-A118-488A-DC79BDC06EC9}"/>
+              </a:ext>
+            </a:extLst>
+          </p:cNvPr>
+          <p:cNvSpPr txBox="1"/>
+          <p:nvPr/>
+        </p:nvSpPr>
+        <p:spPr>
+          <a:xfrm>
+            <a:off x="987658" y="2662753"/>
+            <a:ext cx="11028914" cy="923330"/>
+          </a:xfrm>
+          <a:prstGeom prst="rect">
+            <a:avLst/>
+          </a:prstGeom>
+          <a:noFill/>
+        </p:spPr>
+        <p:txBody>
+          <a:bodyPr wrap="square" rtlCol="0">
+            <a:spAutoFit/>
+          </a:bodyPr>
+          <a:lstStyle/>
+          <a:p>
+            <a:r>
+              <a:rPr lang="en-IT" dirty="0"/>
+              <a:t>Between 1997 and 2016, the range of Atlantic mackerel off the west coast of Norway increased three-fold.</a:t>
+            </a:r>
+          </a:p>
+          <a:p>
+            <a:pPr marL="742950" lvl="1" indent="-285750">
+              <a:buFont typeface="Arial" panose="020B0604020202020204" pitchFamily="34" charset="0"/>
+              <a:buChar char="•"/>
+            </a:pPr>
+            <a:r>
+              <a:rPr lang="en-IT" dirty="0"/>
+              <a:t>The westward range expansion resulted in the commencement of a direct fishery for mackarel inIcelandic waters</a:t>
+            </a:r>
+          </a:p>
+        </p:txBody>
+      </p:sp>
+      <p:sp>
+        <p:nvSpPr>
+          <p:cNvPr id="14" name="TextBox 13">
+            <a:extLst>
+              <a:ext uri="{FF2B5EF4-FFF2-40B4-BE49-F238E27FC236}">
+                <a16:creationId xmlns:a16="http://schemas.microsoft.com/office/drawing/2014/main" id="{E32F11D9-2BA8-D318-A16F-28E291F31BA1}"/>
+              </a:ext>
+            </a:extLst>
+          </p:cNvPr>
+          <p:cNvSpPr txBox="1"/>
+          <p:nvPr/>
+        </p:nvSpPr>
+        <p:spPr>
+          <a:xfrm>
+            <a:off x="987658" y="4099466"/>
+            <a:ext cx="11028914" cy="1477328"/>
+          </a:xfrm>
+          <a:prstGeom prst="rect">
+            <a:avLst/>
+          </a:prstGeom>
+          <a:noFill/>
+        </p:spPr>
+        <p:txBody>
+          <a:bodyPr wrap="square" rtlCol="0">
+            <a:spAutoFit/>
+          </a:bodyPr>
+          <a:lstStyle/>
+          <a:p>
+            <a:r>
+              <a:rPr lang="en-IT" dirty="0"/>
+              <a:t>The Blob heatwave in 2015 stretched from Mexico to Alaska and resulted in increased range for some species and distruction of habitat for others</a:t>
+            </a:r>
+          </a:p>
+          <a:p>
+            <a:pPr marL="742950" lvl="1" indent="-285750">
+              <a:buFont typeface="Arial" panose="020B0604020202020204" pitchFamily="34" charset="0"/>
+              <a:buChar char="•"/>
+            </a:pPr>
+            <a:r>
+              <a:rPr lang="en-IT" dirty="0"/>
+              <a:t>It resulted in a 40 times increase in squid for Oregon</a:t>
+            </a:r>
+          </a:p>
+          <a:p>
+            <a:pPr marL="742950" lvl="1" indent="-285750">
+              <a:buFont typeface="Arial" panose="020B0604020202020204" pitchFamily="34" charset="0"/>
+              <a:buChar char="•"/>
+            </a:pPr>
+            <a:r>
+              <a:rPr lang="en-GB" dirty="0"/>
+              <a:t>I</a:t>
+            </a:r>
+            <a:r>
+              <a:rPr lang="en-IT" dirty="0"/>
+              <a:t>t resulted in reduced abundance of salmon in the Gulf of Alaska (5.6.3 milion in disaster relief payment)</a:t>
+            </a:r>
+          </a:p>
+        </p:txBody>
+      </p:sp>
+      <p:sp>
+        <p:nvSpPr>
+          <p:cNvPr id="15" name="Rectangle 14">
+            <a:extLst>
+              <a:ext uri="{FF2B5EF4-FFF2-40B4-BE49-F238E27FC236}">
+                <a16:creationId xmlns:a16="http://schemas.microsoft.com/office/drawing/2014/main" id="{7E38F82F-5059-9A65-C042-80B523B0DC5B}"/>
+              </a:ext>
+            </a:extLst>
+          </p:cNvPr>
+          <p:cNvSpPr/>
+          <p:nvPr/>
+        </p:nvSpPr>
+        <p:spPr>
+          <a:xfrm>
+            <a:off x="432699" y="2419622"/>
+            <a:ext cx="554959" cy="923330"/>
+          </a:xfrm>
+          <a:prstGeom prst="rect">
+            <a:avLst/>
+          </a:prstGeom>
+          <a:noFill/>
+        </p:spPr>
+        <p:txBody>
+          <a:bodyPr wrap="none" lIns="91440" tIns="45720" rIns="91440" bIns="45720">
+            <a:spAutoFit/>
+          </a:bodyPr>
+          <a:lstStyle/>
+          <a:p>
+            <a:pPr algn="ctr"/>
+            <a:r>
+              <a:rPr lang="en-GB" sz="5400" b="1" cap="none" spc="0" dirty="0">
+                <a:ln w="12700">
+                  <a:solidFill>
+                    <a:schemeClr val="accent1"/>
+                  </a:solidFill>
+                  <a:prstDash val="solid"/>
+                </a:ln>
+                <a:pattFill prst="pct50">
+                  <a:fgClr>
+                    <a:schemeClr val="accent1"/>
+                  </a:fgClr>
+                  <a:bgClr>
+                    <a:schemeClr val="accent1">
+                      <a:lumMod val="20000"/>
+                      <a:lumOff val="80000"/>
+                    </a:schemeClr>
+                  </a:bgClr>
+                </a:pattFill>
+                <a:effectLst>
+                  <a:outerShdw dist="38100" dir="2640000" algn="bl" rotWithShape="0">
+                    <a:schemeClr val="accent1"/>
+                  </a:outerShdw>
+                </a:effectLst>
+              </a:rPr>
+              <a:t>1</a:t>
+            </a:r>
+          </a:p>
+        </p:txBody>
+      </p:sp>
+      <p:sp>
+        <p:nvSpPr>
+          <p:cNvPr id="16" name="Rectangle 15">
+            <a:extLst>
+              <a:ext uri="{FF2B5EF4-FFF2-40B4-BE49-F238E27FC236}">
+                <a16:creationId xmlns:a16="http://schemas.microsoft.com/office/drawing/2014/main" id="{D1B8E8C1-78EB-3218-D631-63D0558431A9}"/>
+              </a:ext>
+            </a:extLst>
+          </p:cNvPr>
+          <p:cNvSpPr/>
+          <p:nvPr/>
+        </p:nvSpPr>
+        <p:spPr>
+          <a:xfrm>
+            <a:off x="432698" y="4358366"/>
+            <a:ext cx="554960" cy="923330"/>
+          </a:xfrm>
+          <a:prstGeom prst="rect">
+            <a:avLst/>
+          </a:prstGeom>
+          <a:noFill/>
+        </p:spPr>
+        <p:txBody>
+          <a:bodyPr wrap="none" lIns="91440" tIns="45720" rIns="91440" bIns="45720">
+            <a:spAutoFit/>
+          </a:bodyPr>
+          <a:lstStyle/>
+          <a:p>
+            <a:pPr algn="ctr"/>
+            <a:r>
+              <a:rPr lang="en-GB" sz="5400" b="1" dirty="0">
+                <a:ln w="12700">
+                  <a:solidFill>
+                    <a:schemeClr val="accent1"/>
+                  </a:solidFill>
+                  <a:prstDash val="solid"/>
+                </a:ln>
+                <a:pattFill prst="pct50">
+                  <a:fgClr>
+                    <a:schemeClr val="accent1"/>
+                  </a:fgClr>
+                  <a:bgClr>
+                    <a:schemeClr val="accent1">
+                      <a:lumMod val="20000"/>
+                      <a:lumOff val="80000"/>
+                    </a:schemeClr>
+                  </a:bgClr>
+                </a:pattFill>
+                <a:effectLst>
+                  <a:outerShdw dist="38100" dir="2640000" algn="bl" rotWithShape="0">
+                    <a:schemeClr val="accent1"/>
+                  </a:outerShdw>
+                </a:effectLst>
+              </a:rPr>
+              <a:t>2</a:t>
+            </a:r>
+            <a:endParaRPr lang="en-GB" sz="5400" b="1" cap="none" spc="0" dirty="0">
+              <a:ln w="12700">
+                <a:solidFill>
+                  <a:schemeClr val="accent1"/>
+                </a:solidFill>
+                <a:prstDash val="solid"/>
+              </a:ln>
+              <a:pattFill prst="pct50">
+                <a:fgClr>
+                  <a:schemeClr val="accent1"/>
+                </a:fgClr>
+                <a:bgClr>
+                  <a:schemeClr val="accent1">
+                    <a:lumMod val="20000"/>
+                    <a:lumOff val="80000"/>
+                  </a:schemeClr>
+                </a:bgClr>
+              </a:pattFill>
+              <a:effectLst>
+                <a:outerShdw dist="38100" dir="2640000" algn="bl" rotWithShape="0">
+                  <a:schemeClr val="accent1"/>
+                </a:outerShdw>
+              </a:effectLst>
+            </a:endParaRPr>
+          </a:p>
+        </p:txBody>
+      </p:sp>
+    </p:spTree>
+    <p:extLst>
+      <p:ext uri="{BB962C8B-B14F-4D97-AF65-F5344CB8AC3E}">
+        <p14:creationId xmlns:p14="http://schemas.microsoft.com/office/powerpoint/2010/main" val="3152580563"/>
+      </p:ext>
+    </p:extLst>
+  </p:cSld>
+  <p:clrMapOvr>
+    <a:masterClrMapping/>
+  </p:clrMapOvr>
+</p:sld>
+</file>
+
+<file path=ppt/slides/slide22.xml><?xml version="1.0" encoding="utf-8"?>
+<p:sld xmlns:a="http://schemas.openxmlformats.org/drawingml/2006/main" xmlns:r="http://schemas.openxmlformats.org/officeDocument/2006/relationships" xmlns:p="http://schemas.openxmlformats.org/presentationml/2006/main">
+  <p:cSld>
+    <p:spTree>
+      <p:nvGrpSpPr>
+        <p:cNvPr id="1" name="">
+          <a:extLst>
+            <a:ext uri="{FF2B5EF4-FFF2-40B4-BE49-F238E27FC236}">
+              <a16:creationId xmlns:a16="http://schemas.microsoft.com/office/drawing/2014/main" id="{F5577A08-7C7B-DD64-C226-7F0543F431A7}"/>
+            </a:ext>
+          </a:extLst>
+        </p:cNvPr>
+        <p:cNvGrpSpPr/>
+        <p:nvPr/>
+      </p:nvGrpSpPr>
+      <p:grpSpPr>
+        <a:xfrm>
+          <a:off x="0" y="0"/>
+          <a:ext cx="0" cy="0"/>
+          <a:chOff x="0" y="0"/>
+          <a:chExt cx="0" cy="0"/>
+        </a:xfrm>
+      </p:grpSpPr>
+      <p:sp>
+        <p:nvSpPr>
+          <p:cNvPr id="2" name="Title 1">
+            <a:extLst>
+              <a:ext uri="{FF2B5EF4-FFF2-40B4-BE49-F238E27FC236}">
+                <a16:creationId xmlns:a16="http://schemas.microsoft.com/office/drawing/2014/main" id="{0B365B33-75A6-EB78-7D10-F518DCCB7571}"/>
+              </a:ext>
+            </a:extLst>
+          </p:cNvPr>
+          <p:cNvSpPr>
+            <a:spLocks noGrp="1"/>
+          </p:cNvSpPr>
+          <p:nvPr>
+            <p:ph type="title"/>
+          </p:nvPr>
+        </p:nvSpPr>
+        <p:spPr>
+          <a:xfrm>
+            <a:off x="582983" y="512502"/>
+            <a:ext cx="11208272" cy="1243578"/>
+          </a:xfrm>
+        </p:spPr>
+        <p:txBody>
+          <a:bodyPr>
+            <a:noAutofit/>
+          </a:bodyPr>
+          <a:lstStyle/>
+          <a:p>
+            <a:r>
+              <a:rPr lang="en-US" sz="2900" b="1" dirty="0">
+                <a:solidFill>
+                  <a:srgbClr val="0070C0"/>
+                </a:solidFill>
+                <a:latin typeface="Arial" panose="020B0604020202020204" pitchFamily="34" charset="0"/>
+                <a:cs typeface="Arial" panose="020B0604020202020204" pitchFamily="34" charset="0"/>
+              </a:rPr>
+              <a:t>Climate change impacts and risks in fishery</a:t>
+            </a:r>
+          </a:p>
+        </p:txBody>
+      </p:sp>
+      <p:grpSp>
+        <p:nvGrpSpPr>
+          <p:cNvPr id="6" name="Group 5">
+            <a:extLst>
+              <a:ext uri="{FF2B5EF4-FFF2-40B4-BE49-F238E27FC236}">
+                <a16:creationId xmlns:a16="http://schemas.microsoft.com/office/drawing/2014/main" id="{E9A8F095-729F-84C8-BFF3-ED2ED8B19D15}"/>
+              </a:ext>
+            </a:extLst>
+          </p:cNvPr>
+          <p:cNvGrpSpPr/>
+          <p:nvPr/>
+        </p:nvGrpSpPr>
+        <p:grpSpPr>
+          <a:xfrm>
+            <a:off x="-16329" y="-38779"/>
+            <a:ext cx="12393386" cy="316366"/>
+            <a:chOff x="-16329" y="5228994"/>
+            <a:chExt cx="12208329" cy="575436"/>
+          </a:xfrm>
+        </p:grpSpPr>
+        <p:sp>
+          <p:nvSpPr>
+            <p:cNvPr id="8" name="Rectangle 7">
+              <a:extLst>
+                <a:ext uri="{FF2B5EF4-FFF2-40B4-BE49-F238E27FC236}">
+                  <a16:creationId xmlns:a16="http://schemas.microsoft.com/office/drawing/2014/main" id="{8FF8308E-3E31-A3D9-506C-64A23BDA8032}"/>
+                </a:ext>
+              </a:extLst>
+            </p:cNvPr>
+            <p:cNvSpPr/>
+            <p:nvPr/>
+          </p:nvSpPr>
+          <p:spPr>
+            <a:xfrm>
+              <a:off x="-16329" y="5228994"/>
+              <a:ext cx="10205358" cy="575436"/>
+            </a:xfrm>
+            <a:prstGeom prst="rect">
+              <a:avLst/>
+            </a:prstGeom>
+            <a:solidFill>
+              <a:schemeClr val="accent5">
+                <a:lumMod val="50000"/>
+              </a:schemeClr>
+            </a:solidFill>
+            <a:ln>
+              <a:noFill/>
+            </a:ln>
+          </p:spPr>
+          <p:style>
+            <a:lnRef idx="2">
+              <a:schemeClr val="accent1">
+                <a:shade val="50000"/>
+              </a:schemeClr>
+            </a:lnRef>
+            <a:fillRef idx="1">
+              <a:schemeClr val="accent1"/>
+            </a:fillRef>
+            <a:effectRef idx="0">
+              <a:schemeClr val="accent1"/>
+            </a:effectRef>
+            <a:fontRef idx="minor">
+              <a:schemeClr val="lt1"/>
+            </a:fontRef>
+          </p:style>
+          <p:txBody>
+            <a:bodyPr rtlCol="0" anchor="ctr"/>
+            <a:lstStyle/>
+            <a:p>
+              <a:pPr algn="ctr"/>
+              <a:endParaRPr lang="en-US"/>
+            </a:p>
+          </p:txBody>
+        </p:sp>
+        <p:sp>
+          <p:nvSpPr>
+            <p:cNvPr id="9" name="Rectangle 8">
+              <a:extLst>
+                <a:ext uri="{FF2B5EF4-FFF2-40B4-BE49-F238E27FC236}">
+                  <a16:creationId xmlns:a16="http://schemas.microsoft.com/office/drawing/2014/main" id="{F4E1CA89-BDA8-1A8C-3CA9-E48DD4DC6FCE}"/>
+                </a:ext>
+              </a:extLst>
+            </p:cNvPr>
+            <p:cNvSpPr/>
+            <p:nvPr/>
+          </p:nvSpPr>
+          <p:spPr>
+            <a:xfrm>
+              <a:off x="10189029" y="5228994"/>
+              <a:ext cx="2002971" cy="575435"/>
+            </a:xfrm>
+            <a:prstGeom prst="rect">
+              <a:avLst/>
+            </a:prstGeom>
+            <a:solidFill>
+              <a:schemeClr val="accent4"/>
+            </a:solidFill>
+            <a:ln>
+              <a:noFill/>
+            </a:ln>
+          </p:spPr>
+          <p:style>
+            <a:lnRef idx="2">
+              <a:schemeClr val="accent1">
+                <a:shade val="50000"/>
+              </a:schemeClr>
+            </a:lnRef>
+            <a:fillRef idx="1">
+              <a:schemeClr val="accent1"/>
+            </a:fillRef>
+            <a:effectRef idx="0">
+              <a:schemeClr val="accent1"/>
+            </a:effectRef>
+            <a:fontRef idx="minor">
+              <a:schemeClr val="lt1"/>
+            </a:fontRef>
+          </p:style>
+          <p:txBody>
+            <a:bodyPr rtlCol="0" anchor="ctr"/>
+            <a:lstStyle/>
+            <a:p>
+              <a:pPr algn="ctr"/>
+              <a:endParaRPr lang="en-US"/>
+            </a:p>
+          </p:txBody>
+        </p:sp>
+      </p:grpSp>
+      <p:cxnSp>
+        <p:nvCxnSpPr>
+          <p:cNvPr id="10" name="Connecteur droit 6">
+            <a:extLst>
+              <a:ext uri="{FF2B5EF4-FFF2-40B4-BE49-F238E27FC236}">
+                <a16:creationId xmlns:a16="http://schemas.microsoft.com/office/drawing/2014/main" id="{67ACD7FA-D3B1-B251-CBE6-0D540FD4C927}"/>
+              </a:ext>
+            </a:extLst>
+          </p:cNvPr>
+          <p:cNvCxnSpPr>
+            <a:cxnSpLocks/>
+          </p:cNvCxnSpPr>
+          <p:nvPr/>
+        </p:nvCxnSpPr>
+        <p:spPr>
+          <a:xfrm>
+            <a:off x="-16329" y="395044"/>
+            <a:ext cx="12208329" cy="0"/>
+          </a:xfrm>
+          <a:prstGeom prst="line">
+            <a:avLst/>
+          </a:prstGeom>
+          <a:ln w="28575"/>
+        </p:spPr>
+        <p:style>
+          <a:lnRef idx="1">
+            <a:schemeClr val="accent1"/>
+          </a:lnRef>
+          <a:fillRef idx="0">
+            <a:schemeClr val="accent1"/>
+          </a:fillRef>
+          <a:effectRef idx="0">
+            <a:schemeClr val="accent1"/>
+          </a:effectRef>
+          <a:fontRef idx="minor">
+            <a:schemeClr val="tx1"/>
+          </a:fontRef>
+        </p:style>
+      </p:cxnSp>
+      <p:sp>
+        <p:nvSpPr>
+          <p:cNvPr id="3" name="TextBox 2">
+            <a:extLst>
+              <a:ext uri="{FF2B5EF4-FFF2-40B4-BE49-F238E27FC236}">
+                <a16:creationId xmlns:a16="http://schemas.microsoft.com/office/drawing/2014/main" id="{6376A563-3DB7-6856-9F4D-543B66CAB1F3}"/>
+              </a:ext>
+            </a:extLst>
+          </p:cNvPr>
+          <p:cNvSpPr txBox="1"/>
+          <p:nvPr/>
+        </p:nvSpPr>
+        <p:spPr>
+          <a:xfrm>
+            <a:off x="582983" y="1628501"/>
+            <a:ext cx="11208271" cy="883383"/>
+          </a:xfrm>
+          <a:prstGeom prst="rect">
+            <a:avLst/>
+          </a:prstGeom>
+          <a:noFill/>
+        </p:spPr>
+        <p:txBody>
+          <a:bodyPr wrap="square" rtlCol="0">
+            <a:spAutoFit/>
+          </a:bodyPr>
+          <a:lstStyle/>
+          <a:p>
+            <a:pPr>
+              <a:lnSpc>
+                <a:spcPct val="150000"/>
+              </a:lnSpc>
+            </a:pPr>
+            <a:r>
+              <a:rPr lang="en-IT" dirty="0"/>
+              <a:t>Climate change affects </a:t>
+            </a:r>
+            <a:r>
+              <a:rPr lang="en-GB" dirty="0"/>
+              <a:t>all the aspects of an ecosystem that are typically considered in fisheries management decisions including</a:t>
+            </a:r>
+          </a:p>
+        </p:txBody>
+      </p:sp>
+      <p:sp>
+        <p:nvSpPr>
+          <p:cNvPr id="4" name="Rounded Rectangle 3">
+            <a:extLst>
+              <a:ext uri="{FF2B5EF4-FFF2-40B4-BE49-F238E27FC236}">
+                <a16:creationId xmlns:a16="http://schemas.microsoft.com/office/drawing/2014/main" id="{865CFFF1-F3B2-2BDF-3A0F-C4134157558F}"/>
+              </a:ext>
+            </a:extLst>
+          </p:cNvPr>
+          <p:cNvSpPr/>
+          <p:nvPr/>
+        </p:nvSpPr>
+        <p:spPr>
+          <a:xfrm>
+            <a:off x="2448233" y="2872079"/>
+            <a:ext cx="2133600" cy="1524000"/>
+          </a:xfrm>
+          <a:prstGeom prst="roundRect">
+            <a:avLst/>
+          </a:prstGeom>
+          <a:solidFill>
+            <a:schemeClr val="accent2">
+              <a:lumMod val="75000"/>
+            </a:schemeClr>
+          </a:solidFill>
+        </p:spPr>
+        <p:style>
+          <a:lnRef idx="2">
+            <a:schemeClr val="accent1">
+              <a:shade val="15000"/>
+            </a:schemeClr>
+          </a:lnRef>
+          <a:fillRef idx="1">
+            <a:schemeClr val="accent1"/>
+          </a:fillRef>
+          <a:effectRef idx="0">
+            <a:schemeClr val="accent1"/>
+          </a:effectRef>
+          <a:fontRef idx="minor">
+            <a:schemeClr val="lt1"/>
+          </a:fontRef>
+        </p:style>
+        <p:txBody>
+          <a:bodyPr rtlCol="0" anchor="ctr"/>
+          <a:lstStyle/>
+          <a:p>
+            <a:pPr algn="ctr"/>
+            <a:r>
+              <a:rPr lang="en-IT" dirty="0"/>
+              <a:t>Water temperature</a:t>
+            </a:r>
+          </a:p>
+        </p:txBody>
+      </p:sp>
+      <p:sp>
+        <p:nvSpPr>
+          <p:cNvPr id="5" name="Rounded Rectangle 4">
+            <a:extLst>
+              <a:ext uri="{FF2B5EF4-FFF2-40B4-BE49-F238E27FC236}">
+                <a16:creationId xmlns:a16="http://schemas.microsoft.com/office/drawing/2014/main" id="{8F608C79-A1EC-3203-E2C7-D3736C38E102}"/>
+              </a:ext>
+            </a:extLst>
+          </p:cNvPr>
+          <p:cNvSpPr/>
+          <p:nvPr/>
+        </p:nvSpPr>
+        <p:spPr>
+          <a:xfrm>
+            <a:off x="4994788" y="2872079"/>
+            <a:ext cx="2133600" cy="1524000"/>
+          </a:xfrm>
+          <a:prstGeom prst="roundRect">
+            <a:avLst/>
+          </a:prstGeom>
+          <a:solidFill>
+            <a:schemeClr val="accent5">
+              <a:lumMod val="60000"/>
+              <a:lumOff val="40000"/>
+            </a:schemeClr>
+          </a:solidFill>
+        </p:spPr>
+        <p:style>
+          <a:lnRef idx="2">
+            <a:schemeClr val="accent1">
+              <a:shade val="15000"/>
+            </a:schemeClr>
+          </a:lnRef>
+          <a:fillRef idx="1">
+            <a:schemeClr val="accent1"/>
+          </a:fillRef>
+          <a:effectRef idx="0">
+            <a:schemeClr val="accent1"/>
+          </a:effectRef>
+          <a:fontRef idx="minor">
+            <a:schemeClr val="lt1"/>
+          </a:fontRef>
+        </p:style>
+        <p:txBody>
+          <a:bodyPr rtlCol="0" anchor="ctr"/>
+          <a:lstStyle/>
+          <a:p>
+            <a:pPr algn="ctr"/>
+            <a:r>
+              <a:rPr lang="en-GB" dirty="0"/>
+              <a:t>A</a:t>
+            </a:r>
+            <a:r>
+              <a:rPr lang="en-IT" dirty="0"/>
+              <a:t>bundance of predator and prey species</a:t>
+            </a:r>
+          </a:p>
+        </p:txBody>
+      </p:sp>
+      <p:sp>
+        <p:nvSpPr>
+          <p:cNvPr id="7" name="Rounded Rectangle 6">
+            <a:extLst>
+              <a:ext uri="{FF2B5EF4-FFF2-40B4-BE49-F238E27FC236}">
+                <a16:creationId xmlns:a16="http://schemas.microsoft.com/office/drawing/2014/main" id="{C6E24879-7606-2EFA-C706-4EE686D9BB85}"/>
+              </a:ext>
+            </a:extLst>
+          </p:cNvPr>
+          <p:cNvSpPr/>
+          <p:nvPr/>
+        </p:nvSpPr>
+        <p:spPr>
+          <a:xfrm>
+            <a:off x="7541343" y="2872079"/>
+            <a:ext cx="2133600" cy="1524000"/>
+          </a:xfrm>
+          <a:prstGeom prst="roundRect">
+            <a:avLst/>
+          </a:prstGeom>
+          <a:solidFill>
+            <a:srgbClr val="7030A0"/>
+          </a:solidFill>
+        </p:spPr>
+        <p:style>
+          <a:lnRef idx="2">
+            <a:schemeClr val="accent1">
+              <a:shade val="15000"/>
+            </a:schemeClr>
+          </a:lnRef>
+          <a:fillRef idx="1">
+            <a:schemeClr val="accent1"/>
+          </a:fillRef>
+          <a:effectRef idx="0">
+            <a:schemeClr val="accent1"/>
+          </a:effectRef>
+          <a:fontRef idx="minor">
+            <a:schemeClr val="lt1"/>
+          </a:fontRef>
+        </p:style>
+        <p:txBody>
+          <a:bodyPr rtlCol="0" anchor="ctr"/>
+          <a:lstStyle/>
+          <a:p>
+            <a:pPr algn="ctr"/>
+            <a:r>
+              <a:rPr lang="en-GB" dirty="0"/>
+              <a:t>Quality of habitats</a:t>
+            </a:r>
+            <a:endParaRPr lang="en-IT" dirty="0"/>
+          </a:p>
+        </p:txBody>
+      </p:sp>
+      <p:sp>
+        <p:nvSpPr>
+          <p:cNvPr id="11" name="Rounded Rectangle 10">
+            <a:extLst>
+              <a:ext uri="{FF2B5EF4-FFF2-40B4-BE49-F238E27FC236}">
+                <a16:creationId xmlns:a16="http://schemas.microsoft.com/office/drawing/2014/main" id="{A77D981C-3892-429F-6102-34CDB5FF3BBD}"/>
+              </a:ext>
+            </a:extLst>
+          </p:cNvPr>
+          <p:cNvSpPr/>
+          <p:nvPr/>
+        </p:nvSpPr>
+        <p:spPr>
+          <a:xfrm>
+            <a:off x="4994788" y="4704041"/>
+            <a:ext cx="2133600" cy="1524000"/>
+          </a:xfrm>
+          <a:prstGeom prst="roundRect">
+            <a:avLst/>
+          </a:prstGeom>
+          <a:solidFill>
+            <a:schemeClr val="accent3">
+              <a:lumMod val="75000"/>
+            </a:schemeClr>
+          </a:solidFill>
+        </p:spPr>
+        <p:style>
+          <a:lnRef idx="2">
+            <a:schemeClr val="accent1">
+              <a:shade val="15000"/>
+            </a:schemeClr>
+          </a:lnRef>
+          <a:fillRef idx="1">
+            <a:schemeClr val="accent1"/>
+          </a:fillRef>
+          <a:effectRef idx="0">
+            <a:schemeClr val="accent1"/>
+          </a:effectRef>
+          <a:fontRef idx="minor">
+            <a:schemeClr val="lt1"/>
+          </a:fontRef>
+        </p:style>
+        <p:txBody>
+          <a:bodyPr rtlCol="0" anchor="ctr"/>
+          <a:lstStyle/>
+          <a:p>
+            <a:pPr algn="ctr"/>
+            <a:r>
+              <a:rPr lang="en-GB" dirty="0"/>
+              <a:t>Strength of currents</a:t>
+            </a:r>
+            <a:endParaRPr lang="en-IT" dirty="0"/>
+          </a:p>
+        </p:txBody>
+      </p:sp>
+      <p:sp>
+        <p:nvSpPr>
+          <p:cNvPr id="12" name="Rounded Rectangle 11">
+            <a:extLst>
+              <a:ext uri="{FF2B5EF4-FFF2-40B4-BE49-F238E27FC236}">
+                <a16:creationId xmlns:a16="http://schemas.microsoft.com/office/drawing/2014/main" id="{9410FEF9-14A2-6B54-C1F1-04BF90F1CBF5}"/>
+              </a:ext>
+            </a:extLst>
+          </p:cNvPr>
+          <p:cNvSpPr/>
+          <p:nvPr/>
+        </p:nvSpPr>
+        <p:spPr>
+          <a:xfrm>
+            <a:off x="2448233" y="4671204"/>
+            <a:ext cx="2133600" cy="1524000"/>
+          </a:xfrm>
+          <a:prstGeom prst="roundRect">
+            <a:avLst/>
+          </a:prstGeom>
+          <a:solidFill>
+            <a:schemeClr val="tx2">
+              <a:lumMod val="75000"/>
+              <a:lumOff val="25000"/>
+            </a:schemeClr>
+          </a:solidFill>
+        </p:spPr>
+        <p:style>
+          <a:lnRef idx="2">
+            <a:schemeClr val="accent1">
+              <a:shade val="15000"/>
+            </a:schemeClr>
+          </a:lnRef>
+          <a:fillRef idx="1">
+            <a:schemeClr val="accent1"/>
+          </a:fillRef>
+          <a:effectRef idx="0">
+            <a:schemeClr val="accent1"/>
+          </a:effectRef>
+          <a:fontRef idx="minor">
+            <a:schemeClr val="lt1"/>
+          </a:fontRef>
+        </p:style>
+        <p:txBody>
+          <a:bodyPr rtlCol="0" anchor="ctr"/>
+          <a:lstStyle/>
+          <a:p>
+            <a:pPr algn="ctr"/>
+            <a:r>
+              <a:rPr lang="en-GB" dirty="0"/>
+              <a:t>Winds, rainfall</a:t>
+            </a:r>
+            <a:endParaRPr lang="en-IT" dirty="0"/>
+          </a:p>
+        </p:txBody>
+      </p:sp>
+      <p:sp>
+        <p:nvSpPr>
+          <p:cNvPr id="17" name="Rounded Rectangle 16">
+            <a:extLst>
+              <a:ext uri="{FF2B5EF4-FFF2-40B4-BE49-F238E27FC236}">
+                <a16:creationId xmlns:a16="http://schemas.microsoft.com/office/drawing/2014/main" id="{F552A83B-B33B-97D5-603C-CDD5F501A87B}"/>
+              </a:ext>
+            </a:extLst>
+          </p:cNvPr>
+          <p:cNvSpPr/>
+          <p:nvPr/>
+        </p:nvSpPr>
+        <p:spPr>
+          <a:xfrm>
+            <a:off x="7541343" y="4704041"/>
+            <a:ext cx="2133600" cy="1524000"/>
+          </a:xfrm>
+          <a:prstGeom prst="roundRect">
+            <a:avLst/>
+          </a:prstGeom>
+          <a:solidFill>
+            <a:schemeClr val="accent4"/>
+          </a:solidFill>
+        </p:spPr>
+        <p:style>
+          <a:lnRef idx="2">
+            <a:schemeClr val="accent1">
+              <a:shade val="15000"/>
+            </a:schemeClr>
+          </a:lnRef>
+          <a:fillRef idx="1">
+            <a:schemeClr val="accent1"/>
+          </a:fillRef>
+          <a:effectRef idx="0">
+            <a:schemeClr val="accent1"/>
+          </a:effectRef>
+          <a:fontRef idx="minor">
+            <a:schemeClr val="lt1"/>
+          </a:fontRef>
+        </p:style>
+        <p:txBody>
+          <a:bodyPr rtlCol="0" anchor="ctr"/>
+          <a:lstStyle/>
+          <a:p>
+            <a:pPr algn="ctr"/>
+            <a:r>
+              <a:rPr lang="en-GB" dirty="0"/>
+              <a:t>Water pH</a:t>
+            </a:r>
+            <a:endParaRPr lang="en-IT" dirty="0"/>
+          </a:p>
+        </p:txBody>
+      </p:sp>
+    </p:spTree>
+    <p:extLst>
+      <p:ext uri="{BB962C8B-B14F-4D97-AF65-F5344CB8AC3E}">
+        <p14:creationId xmlns:p14="http://schemas.microsoft.com/office/powerpoint/2010/main" val="550082958"/>
+      </p:ext>
+    </p:extLst>
+  </p:cSld>
+  <p:clrMapOvr>
+    <a:masterClrMapping/>
+  </p:clrMapOvr>
+</p:sld>
+</file>
+
+<file path=ppt/slides/slide23.xml><?xml version="1.0" encoding="utf-8"?>
+<p:sld xmlns:a="http://schemas.openxmlformats.org/drawingml/2006/main" xmlns:r="http://schemas.openxmlformats.org/officeDocument/2006/relationships" xmlns:p="http://schemas.openxmlformats.org/presentationml/2006/main">
+  <p:cSld>
+    <p:spTree>
+      <p:nvGrpSpPr>
+        <p:cNvPr id="1" name="">
+          <a:extLst>
+            <a:ext uri="{FF2B5EF4-FFF2-40B4-BE49-F238E27FC236}">
+              <a16:creationId xmlns:a16="http://schemas.microsoft.com/office/drawing/2014/main" id="{6D0FDCFA-D14D-CEEC-E669-23AAB71AB51A}"/>
+            </a:ext>
+          </a:extLst>
+        </p:cNvPr>
+        <p:cNvGrpSpPr/>
+        <p:nvPr/>
+      </p:nvGrpSpPr>
+      <p:grpSpPr>
+        <a:xfrm>
+          <a:off x="0" y="0"/>
+          <a:ext cx="0" cy="0"/>
+          <a:chOff x="0" y="0"/>
+          <a:chExt cx="0" cy="0"/>
+        </a:xfrm>
+      </p:grpSpPr>
+      <p:sp>
+        <p:nvSpPr>
+          <p:cNvPr id="2" name="Title 1">
+            <a:extLst>
+              <a:ext uri="{FF2B5EF4-FFF2-40B4-BE49-F238E27FC236}">
+                <a16:creationId xmlns:a16="http://schemas.microsoft.com/office/drawing/2014/main" id="{E0C0717A-AF59-C153-4A9D-34C1603FA87A}"/>
+              </a:ext>
+            </a:extLst>
+          </p:cNvPr>
+          <p:cNvSpPr>
+            <a:spLocks noGrp="1"/>
+          </p:cNvSpPr>
+          <p:nvPr>
+            <p:ph type="title"/>
+          </p:nvPr>
+        </p:nvSpPr>
+        <p:spPr>
+          <a:xfrm>
+            <a:off x="582983" y="512502"/>
+            <a:ext cx="11208272" cy="1243578"/>
+          </a:xfrm>
+        </p:spPr>
+        <p:txBody>
+          <a:bodyPr>
+            <a:noAutofit/>
+          </a:bodyPr>
+          <a:lstStyle/>
+          <a:p>
+            <a:r>
+              <a:rPr lang="en-US" sz="2900" b="1" dirty="0">
+                <a:solidFill>
+                  <a:srgbClr val="0070C0"/>
+                </a:solidFill>
+                <a:latin typeface="Arial" panose="020B0604020202020204" pitchFamily="34" charset="0"/>
+                <a:cs typeface="Arial" panose="020B0604020202020204" pitchFamily="34" charset="0"/>
+              </a:rPr>
+              <a:t>Exacerbating climate risks</a:t>
+            </a:r>
+          </a:p>
+        </p:txBody>
+      </p:sp>
+      <p:grpSp>
+        <p:nvGrpSpPr>
+          <p:cNvPr id="6" name="Group 5">
+            <a:extLst>
+              <a:ext uri="{FF2B5EF4-FFF2-40B4-BE49-F238E27FC236}">
+                <a16:creationId xmlns:a16="http://schemas.microsoft.com/office/drawing/2014/main" id="{9AE56F59-2813-1468-E263-66203A1CF2A6}"/>
+              </a:ext>
+            </a:extLst>
+          </p:cNvPr>
+          <p:cNvGrpSpPr/>
+          <p:nvPr/>
+        </p:nvGrpSpPr>
+        <p:grpSpPr>
+          <a:xfrm>
+            <a:off x="-16329" y="-38779"/>
+            <a:ext cx="12393386" cy="316366"/>
+            <a:chOff x="-16329" y="5228994"/>
+            <a:chExt cx="12208329" cy="575436"/>
+          </a:xfrm>
+        </p:grpSpPr>
+        <p:sp>
+          <p:nvSpPr>
+            <p:cNvPr id="8" name="Rectangle 7">
+              <a:extLst>
+                <a:ext uri="{FF2B5EF4-FFF2-40B4-BE49-F238E27FC236}">
+                  <a16:creationId xmlns:a16="http://schemas.microsoft.com/office/drawing/2014/main" id="{93D90B8F-D3ED-5839-FA0E-C5BAAFAE2E13}"/>
+                </a:ext>
+              </a:extLst>
+            </p:cNvPr>
+            <p:cNvSpPr/>
+            <p:nvPr/>
+          </p:nvSpPr>
+          <p:spPr>
+            <a:xfrm>
+              <a:off x="-16329" y="5228994"/>
+              <a:ext cx="10205358" cy="575436"/>
+            </a:xfrm>
+            <a:prstGeom prst="rect">
+              <a:avLst/>
+            </a:prstGeom>
+            <a:solidFill>
+              <a:schemeClr val="accent5">
+                <a:lumMod val="50000"/>
+              </a:schemeClr>
+            </a:solidFill>
+            <a:ln>
+              <a:noFill/>
+            </a:ln>
+          </p:spPr>
+          <p:style>
+            <a:lnRef idx="2">
+              <a:schemeClr val="accent1">
+                <a:shade val="50000"/>
+              </a:schemeClr>
+            </a:lnRef>
+            <a:fillRef idx="1">
+              <a:schemeClr val="accent1"/>
+            </a:fillRef>
+            <a:effectRef idx="0">
+              <a:schemeClr val="accent1"/>
+            </a:effectRef>
+            <a:fontRef idx="minor">
+              <a:schemeClr val="lt1"/>
+            </a:fontRef>
+          </p:style>
+          <p:txBody>
+            <a:bodyPr rtlCol="0" anchor="ctr"/>
+            <a:lstStyle/>
+            <a:p>
+              <a:pPr algn="ctr"/>
+              <a:endParaRPr lang="en-US"/>
+            </a:p>
+          </p:txBody>
+        </p:sp>
+        <p:sp>
+          <p:nvSpPr>
+            <p:cNvPr id="9" name="Rectangle 8">
+              <a:extLst>
+                <a:ext uri="{FF2B5EF4-FFF2-40B4-BE49-F238E27FC236}">
+                  <a16:creationId xmlns:a16="http://schemas.microsoft.com/office/drawing/2014/main" id="{56C21B55-504E-F7C7-F979-A0123139D0E8}"/>
+                </a:ext>
+              </a:extLst>
+            </p:cNvPr>
+            <p:cNvSpPr/>
+            <p:nvPr/>
+          </p:nvSpPr>
+          <p:spPr>
+            <a:xfrm>
+              <a:off x="10189029" y="5228994"/>
+              <a:ext cx="2002971" cy="575435"/>
+            </a:xfrm>
+            <a:prstGeom prst="rect">
+              <a:avLst/>
+            </a:prstGeom>
+            <a:solidFill>
+              <a:schemeClr val="accent4"/>
+            </a:solidFill>
+            <a:ln>
+              <a:noFill/>
+            </a:ln>
+          </p:spPr>
+          <p:style>
+            <a:lnRef idx="2">
+              <a:schemeClr val="accent1">
+                <a:shade val="50000"/>
+              </a:schemeClr>
+            </a:lnRef>
+            <a:fillRef idx="1">
+              <a:schemeClr val="accent1"/>
+            </a:fillRef>
+            <a:effectRef idx="0">
+              <a:schemeClr val="accent1"/>
+            </a:effectRef>
+            <a:fontRef idx="minor">
+              <a:schemeClr val="lt1"/>
+            </a:fontRef>
+          </p:style>
+          <p:txBody>
+            <a:bodyPr rtlCol="0" anchor="ctr"/>
+            <a:lstStyle/>
+            <a:p>
+              <a:pPr algn="ctr"/>
+              <a:endParaRPr lang="en-US"/>
+            </a:p>
+          </p:txBody>
+        </p:sp>
+      </p:grpSp>
+      <p:cxnSp>
+        <p:nvCxnSpPr>
+          <p:cNvPr id="10" name="Connecteur droit 6">
+            <a:extLst>
+              <a:ext uri="{FF2B5EF4-FFF2-40B4-BE49-F238E27FC236}">
+                <a16:creationId xmlns:a16="http://schemas.microsoft.com/office/drawing/2014/main" id="{C49E2C51-4AF5-94BA-DD9B-F4FB4841DC0D}"/>
+              </a:ext>
+            </a:extLst>
+          </p:cNvPr>
+          <p:cNvCxnSpPr>
+            <a:cxnSpLocks/>
+          </p:cNvCxnSpPr>
+          <p:nvPr/>
+        </p:nvCxnSpPr>
+        <p:spPr>
+          <a:xfrm>
+            <a:off x="-16329" y="395044"/>
+            <a:ext cx="12208329" cy="0"/>
+          </a:xfrm>
+          <a:prstGeom prst="line">
+            <a:avLst/>
+          </a:prstGeom>
+          <a:ln w="28575"/>
+        </p:spPr>
+        <p:style>
+          <a:lnRef idx="1">
+            <a:schemeClr val="accent1"/>
+          </a:lnRef>
+          <a:fillRef idx="0">
+            <a:schemeClr val="accent1"/>
+          </a:fillRef>
+          <a:effectRef idx="0">
+            <a:schemeClr val="accent1"/>
+          </a:effectRef>
+          <a:fontRef idx="minor">
+            <a:schemeClr val="tx1"/>
+          </a:fontRef>
+        </p:style>
+      </p:cxnSp>
+      <p:pic>
+        <p:nvPicPr>
+          <p:cNvPr id="11" name="Picture 10" descr="A chart with different colored squares&#10;&#10;AI-generated content may be incorrect.">
+            <a:extLst>
+              <a:ext uri="{FF2B5EF4-FFF2-40B4-BE49-F238E27FC236}">
+                <a16:creationId xmlns:a16="http://schemas.microsoft.com/office/drawing/2014/main" id="{8A037E5E-F9C5-C837-7150-1BC01992F6DE}"/>
+              </a:ext>
+            </a:extLst>
+          </p:cNvPr>
+          <p:cNvPicPr>
+            <a:picLocks noChangeAspect="1"/>
+          </p:cNvPicPr>
+          <p:nvPr/>
+        </p:nvPicPr>
+        <p:blipFill>
+          <a:blip r:embed="rId2">
+            <a:extLst>
+              <a:ext uri="{28A0092B-C50C-407E-A947-70E740481C1C}">
+                <a14:useLocalDpi xmlns:a14="http://schemas.microsoft.com/office/drawing/2010/main" val="0"/>
+              </a:ext>
+            </a:extLst>
+          </a:blip>
+          <a:stretch>
+            <a:fillRect/>
+          </a:stretch>
+        </p:blipFill>
+        <p:spPr>
+          <a:xfrm>
+            <a:off x="2276463" y="2539306"/>
+            <a:ext cx="7772400" cy="2490186"/>
+          </a:xfrm>
+          <a:prstGeom prst="rect">
+            <a:avLst/>
+          </a:prstGeom>
+        </p:spPr>
+      </p:pic>
+      <p:sp>
+        <p:nvSpPr>
+          <p:cNvPr id="12" name="TextBox 11">
+            <a:extLst>
+              <a:ext uri="{FF2B5EF4-FFF2-40B4-BE49-F238E27FC236}">
+                <a16:creationId xmlns:a16="http://schemas.microsoft.com/office/drawing/2014/main" id="{8145571B-14F6-BC0B-9A80-C58DC6565CEC}"/>
+              </a:ext>
+            </a:extLst>
+          </p:cNvPr>
+          <p:cNvSpPr txBox="1"/>
+          <p:nvPr/>
+        </p:nvSpPr>
+        <p:spPr>
+          <a:xfrm>
+            <a:off x="2495124" y="5154006"/>
+            <a:ext cx="7335078" cy="307777"/>
+          </a:xfrm>
+          <a:prstGeom prst="rect">
+            <a:avLst/>
+          </a:prstGeom>
+          <a:noFill/>
+        </p:spPr>
+        <p:txBody>
+          <a:bodyPr wrap="square" rtlCol="0">
+            <a:spAutoFit/>
+          </a:bodyPr>
+          <a:lstStyle/>
+          <a:p>
+            <a:r>
+              <a:rPr lang="en-IT" sz="1400" dirty="0">
+                <a:solidFill>
+                  <a:schemeClr val="accent6">
+                    <a:lumMod val="50000"/>
+                  </a:schemeClr>
+                </a:solidFill>
+              </a:rPr>
+              <a:t>Source: </a:t>
+            </a:r>
+            <a:r>
+              <a:rPr lang="en-IT" sz="1400" dirty="0">
+                <a:solidFill>
+                  <a:srgbClr val="467886"/>
+                </a:solidFill>
+                <a:hlinkClick r:id="rId3">
+                  <a:extLst>
+                    <a:ext uri="{A12FA001-AC4F-418D-AE19-62706E023703}">
+                      <ahyp:hlinkClr xmlns:ahyp="http://schemas.microsoft.com/office/drawing/2018/hyperlinkcolor" val="tx"/>
+                    </a:ext>
+                  </a:extLst>
+                </a:hlinkClick>
+              </a:rPr>
+              <a:t>Global Assessment report on biodiversity and ecosystem services (2019)</a:t>
+            </a:r>
+            <a:endParaRPr lang="en-IT" sz="1400" dirty="0"/>
+          </a:p>
+        </p:txBody>
+      </p:sp>
+      <p:sp>
+        <p:nvSpPr>
+          <p:cNvPr id="13" name="TextBox 12">
+            <a:extLst>
+              <a:ext uri="{FF2B5EF4-FFF2-40B4-BE49-F238E27FC236}">
+                <a16:creationId xmlns:a16="http://schemas.microsoft.com/office/drawing/2014/main" id="{551E19D3-3319-2E2F-C375-B9D6C0A4E1EA}"/>
+              </a:ext>
+            </a:extLst>
+          </p:cNvPr>
+          <p:cNvSpPr txBox="1"/>
+          <p:nvPr/>
+        </p:nvSpPr>
+        <p:spPr>
+          <a:xfrm>
+            <a:off x="2495123" y="2230126"/>
+            <a:ext cx="7848601" cy="369332"/>
+          </a:xfrm>
+          <a:prstGeom prst="rect">
+            <a:avLst/>
+          </a:prstGeom>
+          <a:noFill/>
+        </p:spPr>
+        <p:txBody>
+          <a:bodyPr wrap="square" rtlCol="0">
+            <a:spAutoFit/>
+          </a:bodyPr>
+          <a:lstStyle/>
+          <a:p>
+            <a:r>
+              <a:rPr lang="en-GB" b="1" dirty="0">
+                <a:solidFill>
+                  <a:schemeClr val="accent1">
+                    <a:lumMod val="75000"/>
+                  </a:schemeClr>
+                </a:solidFill>
+              </a:rPr>
+              <a:t>Effects of different factors on sustainable fish stocks globally</a:t>
+            </a:r>
+            <a:endParaRPr lang="en-IT" b="1" dirty="0">
+              <a:solidFill>
+                <a:schemeClr val="accent1">
+                  <a:lumMod val="75000"/>
+                </a:schemeClr>
+              </a:solidFill>
+            </a:endParaRPr>
+          </a:p>
+        </p:txBody>
+      </p:sp>
+    </p:spTree>
+    <p:extLst>
+      <p:ext uri="{BB962C8B-B14F-4D97-AF65-F5344CB8AC3E}">
+        <p14:creationId xmlns:p14="http://schemas.microsoft.com/office/powerpoint/2010/main" val="153444478"/>
+      </p:ext>
+    </p:extLst>
+  </p:cSld>
+  <p:clrMapOvr>
+    <a:masterClrMapping/>
+  </p:clrMapOvr>
+</p:sld>
+</file>
+
+<file path=ppt/slides/slide24.xml><?xml version="1.0" encoding="utf-8"?>
+<p:sld xmlns:a="http://schemas.openxmlformats.org/drawingml/2006/main" xmlns:r="http://schemas.openxmlformats.org/officeDocument/2006/relationships" xmlns:p="http://schemas.openxmlformats.org/presentationml/2006/main">
+  <p:cSld>
+    <p:spTree>
+      <p:nvGrpSpPr>
+        <p:cNvPr id="1" name="">
+          <a:extLst>
+            <a:ext uri="{FF2B5EF4-FFF2-40B4-BE49-F238E27FC236}">
+              <a16:creationId xmlns:a16="http://schemas.microsoft.com/office/drawing/2014/main" id="{C261ECBE-254B-DCEF-AD5B-517B149F94DB}"/>
+            </a:ext>
+          </a:extLst>
+        </p:cNvPr>
+        <p:cNvGrpSpPr/>
+        <p:nvPr/>
+      </p:nvGrpSpPr>
+      <p:grpSpPr>
+        <a:xfrm>
+          <a:off x="0" y="0"/>
+          <a:ext cx="0" cy="0"/>
+          <a:chOff x="0" y="0"/>
+          <a:chExt cx="0" cy="0"/>
+        </a:xfrm>
+      </p:grpSpPr>
+      <p:sp>
+        <p:nvSpPr>
+          <p:cNvPr id="2" name="Title 1">
+            <a:extLst>
+              <a:ext uri="{FF2B5EF4-FFF2-40B4-BE49-F238E27FC236}">
+                <a16:creationId xmlns:a16="http://schemas.microsoft.com/office/drawing/2014/main" id="{CD261F20-17E4-3A27-3637-53ADEF51F54A}"/>
+              </a:ext>
+            </a:extLst>
+          </p:cNvPr>
+          <p:cNvSpPr>
+            <a:spLocks noGrp="1"/>
+          </p:cNvSpPr>
+          <p:nvPr>
+            <p:ph type="title"/>
+          </p:nvPr>
+        </p:nvSpPr>
+        <p:spPr>
+          <a:xfrm>
+            <a:off x="582983" y="512502"/>
+            <a:ext cx="11208272" cy="1243578"/>
+          </a:xfrm>
+        </p:spPr>
+        <p:txBody>
+          <a:bodyPr>
+            <a:noAutofit/>
+          </a:bodyPr>
+          <a:lstStyle/>
+          <a:p>
+            <a:r>
+              <a:rPr lang="en-US" sz="2900" b="1" dirty="0">
+                <a:solidFill>
+                  <a:srgbClr val="0070C0"/>
+                </a:solidFill>
+                <a:latin typeface="Arial" panose="020B0604020202020204" pitchFamily="34" charset="0"/>
+                <a:cs typeface="Arial" panose="020B0604020202020204" pitchFamily="34" charset="0"/>
+              </a:rPr>
+              <a:t>Adaptation options</a:t>
+            </a:r>
+          </a:p>
+        </p:txBody>
+      </p:sp>
+      <p:grpSp>
+        <p:nvGrpSpPr>
+          <p:cNvPr id="6" name="Group 5">
+            <a:extLst>
+              <a:ext uri="{FF2B5EF4-FFF2-40B4-BE49-F238E27FC236}">
+                <a16:creationId xmlns:a16="http://schemas.microsoft.com/office/drawing/2014/main" id="{63E58648-CFA6-36F4-B251-33A7D4ADAFD7}"/>
+              </a:ext>
+            </a:extLst>
+          </p:cNvPr>
+          <p:cNvGrpSpPr/>
+          <p:nvPr/>
+        </p:nvGrpSpPr>
+        <p:grpSpPr>
+          <a:xfrm>
+            <a:off x="-16329" y="-38779"/>
+            <a:ext cx="12393386" cy="316366"/>
+            <a:chOff x="-16329" y="5228994"/>
+            <a:chExt cx="12208329" cy="575436"/>
+          </a:xfrm>
+        </p:grpSpPr>
+        <p:sp>
+          <p:nvSpPr>
+            <p:cNvPr id="8" name="Rectangle 7">
+              <a:extLst>
+                <a:ext uri="{FF2B5EF4-FFF2-40B4-BE49-F238E27FC236}">
+                  <a16:creationId xmlns:a16="http://schemas.microsoft.com/office/drawing/2014/main" id="{6ED3DDBD-B045-06FD-D90D-BAF852708CE8}"/>
+                </a:ext>
+              </a:extLst>
+            </p:cNvPr>
+            <p:cNvSpPr/>
+            <p:nvPr/>
+          </p:nvSpPr>
+          <p:spPr>
+            <a:xfrm>
+              <a:off x="-16329" y="5228994"/>
+              <a:ext cx="10205358" cy="575436"/>
+            </a:xfrm>
+            <a:prstGeom prst="rect">
+              <a:avLst/>
+            </a:prstGeom>
+            <a:solidFill>
+              <a:schemeClr val="accent5">
+                <a:lumMod val="50000"/>
+              </a:schemeClr>
+            </a:solidFill>
+            <a:ln>
+              <a:noFill/>
+            </a:ln>
+          </p:spPr>
+          <p:style>
+            <a:lnRef idx="2">
+              <a:schemeClr val="accent1">
+                <a:shade val="50000"/>
+              </a:schemeClr>
+            </a:lnRef>
+            <a:fillRef idx="1">
+              <a:schemeClr val="accent1"/>
+            </a:fillRef>
+            <a:effectRef idx="0">
+              <a:schemeClr val="accent1"/>
+            </a:effectRef>
+            <a:fontRef idx="minor">
+              <a:schemeClr val="lt1"/>
+            </a:fontRef>
+          </p:style>
+          <p:txBody>
+            <a:bodyPr rtlCol="0" anchor="ctr"/>
+            <a:lstStyle/>
+            <a:p>
+              <a:pPr algn="ctr"/>
+              <a:endParaRPr lang="en-US"/>
+            </a:p>
+          </p:txBody>
+        </p:sp>
+        <p:sp>
+          <p:nvSpPr>
+            <p:cNvPr id="9" name="Rectangle 8">
+              <a:extLst>
+                <a:ext uri="{FF2B5EF4-FFF2-40B4-BE49-F238E27FC236}">
+                  <a16:creationId xmlns:a16="http://schemas.microsoft.com/office/drawing/2014/main" id="{DBABB1C6-0421-965F-4643-E68A27D63386}"/>
+                </a:ext>
+              </a:extLst>
+            </p:cNvPr>
+            <p:cNvSpPr/>
+            <p:nvPr/>
+          </p:nvSpPr>
+          <p:spPr>
+            <a:xfrm>
+              <a:off x="10189029" y="5228994"/>
+              <a:ext cx="2002971" cy="575435"/>
+            </a:xfrm>
+            <a:prstGeom prst="rect">
+              <a:avLst/>
+            </a:prstGeom>
+            <a:solidFill>
+              <a:schemeClr val="accent4"/>
+            </a:solidFill>
+            <a:ln>
+              <a:noFill/>
+            </a:ln>
+          </p:spPr>
+          <p:style>
+            <a:lnRef idx="2">
+              <a:schemeClr val="accent1">
+                <a:shade val="50000"/>
+              </a:schemeClr>
+            </a:lnRef>
+            <a:fillRef idx="1">
+              <a:schemeClr val="accent1"/>
+            </a:fillRef>
+            <a:effectRef idx="0">
+              <a:schemeClr val="accent1"/>
+            </a:effectRef>
+            <a:fontRef idx="minor">
+              <a:schemeClr val="lt1"/>
+            </a:fontRef>
+          </p:style>
+          <p:txBody>
+            <a:bodyPr rtlCol="0" anchor="ctr"/>
+            <a:lstStyle/>
+            <a:p>
+              <a:pPr algn="ctr"/>
+              <a:endParaRPr lang="en-US"/>
+            </a:p>
+          </p:txBody>
+        </p:sp>
+      </p:grpSp>
+      <p:cxnSp>
+        <p:nvCxnSpPr>
+          <p:cNvPr id="10" name="Connecteur droit 6">
+            <a:extLst>
+              <a:ext uri="{FF2B5EF4-FFF2-40B4-BE49-F238E27FC236}">
+                <a16:creationId xmlns:a16="http://schemas.microsoft.com/office/drawing/2014/main" id="{FFC0B067-115E-FDE2-8342-10716FD02E89}"/>
+              </a:ext>
+            </a:extLst>
+          </p:cNvPr>
+          <p:cNvCxnSpPr>
+            <a:cxnSpLocks/>
+          </p:cNvCxnSpPr>
+          <p:nvPr/>
+        </p:nvCxnSpPr>
+        <p:spPr>
+          <a:xfrm>
+            <a:off x="-16329" y="395044"/>
+            <a:ext cx="12208329" cy="0"/>
+          </a:xfrm>
+          <a:prstGeom prst="line">
+            <a:avLst/>
+          </a:prstGeom>
+          <a:ln w="28575"/>
+        </p:spPr>
+        <p:style>
+          <a:lnRef idx="1">
+            <a:schemeClr val="accent1"/>
+          </a:lnRef>
+          <a:fillRef idx="0">
+            <a:schemeClr val="accent1"/>
+          </a:fillRef>
+          <a:effectRef idx="0">
+            <a:schemeClr val="accent1"/>
+          </a:effectRef>
+          <a:fontRef idx="minor">
+            <a:schemeClr val="tx1"/>
+          </a:fontRef>
+        </p:style>
+      </p:cxnSp>
+      <p:sp>
+        <p:nvSpPr>
+          <p:cNvPr id="5" name="object 8">
+            <a:extLst>
+              <a:ext uri="{FF2B5EF4-FFF2-40B4-BE49-F238E27FC236}">
+                <a16:creationId xmlns:a16="http://schemas.microsoft.com/office/drawing/2014/main" id="{6EFF8A45-88B2-8304-714F-9EB072756640}"/>
+              </a:ext>
+            </a:extLst>
+          </p:cNvPr>
+          <p:cNvSpPr txBox="1"/>
+          <p:nvPr/>
+        </p:nvSpPr>
+        <p:spPr>
+          <a:xfrm>
+            <a:off x="10343724" y="6485565"/>
+            <a:ext cx="1638300" cy="162560"/>
+          </a:xfrm>
+          <a:prstGeom prst="rect">
+            <a:avLst/>
+          </a:prstGeom>
+        </p:spPr>
+        <p:txBody>
+          <a:bodyPr vert="horz" wrap="square" lIns="0" tIns="12700" rIns="0" bIns="0" rtlCol="0">
+            <a:spAutoFit/>
+          </a:bodyPr>
+          <a:lstStyle/>
+          <a:p>
+            <a:pPr marL="12700">
+              <a:lnSpc>
+                <a:spcPct val="100000"/>
+              </a:lnSpc>
+              <a:spcBef>
+                <a:spcPts val="100"/>
+              </a:spcBef>
+            </a:pPr>
+            <a:r>
+              <a:rPr sz="900" dirty="0">
+                <a:solidFill>
+                  <a:srgbClr val="BEBEBE"/>
+                </a:solidFill>
+                <a:latin typeface="Arial MT"/>
+                <a:cs typeface="Arial MT"/>
+              </a:rPr>
+              <a:t>IPCC WGII</a:t>
+            </a:r>
+            <a:r>
+              <a:rPr sz="900" spc="-35" dirty="0">
+                <a:solidFill>
+                  <a:srgbClr val="BEBEBE"/>
+                </a:solidFill>
+                <a:latin typeface="Arial MT"/>
+                <a:cs typeface="Arial MT"/>
+              </a:rPr>
+              <a:t> </a:t>
+            </a:r>
+            <a:r>
+              <a:rPr sz="900" dirty="0">
+                <a:solidFill>
+                  <a:srgbClr val="BEBEBE"/>
+                </a:solidFill>
+                <a:latin typeface="Arial MT"/>
+                <a:cs typeface="Arial MT"/>
+              </a:rPr>
+              <a:t>AR6</a:t>
+            </a:r>
+            <a:r>
+              <a:rPr sz="900" spc="-5" dirty="0">
+                <a:solidFill>
+                  <a:srgbClr val="BEBEBE"/>
+                </a:solidFill>
+                <a:latin typeface="Arial MT"/>
+                <a:cs typeface="Arial MT"/>
+              </a:rPr>
+              <a:t> </a:t>
+            </a:r>
+            <a:r>
+              <a:rPr sz="900" dirty="0">
+                <a:solidFill>
+                  <a:srgbClr val="BEBEBE"/>
+                </a:solidFill>
+                <a:latin typeface="Arial MT"/>
+                <a:cs typeface="Arial MT"/>
+              </a:rPr>
+              <a:t>SPM</a:t>
+            </a:r>
+            <a:r>
+              <a:rPr sz="900" spc="5" dirty="0">
+                <a:solidFill>
+                  <a:srgbClr val="BEBEBE"/>
+                </a:solidFill>
+                <a:latin typeface="Arial MT"/>
+                <a:cs typeface="Arial MT"/>
+              </a:rPr>
+              <a:t> </a:t>
+            </a:r>
+            <a:r>
+              <a:rPr sz="900" dirty="0">
+                <a:solidFill>
+                  <a:srgbClr val="BEBEBE"/>
+                </a:solidFill>
+                <a:latin typeface="Arial MT"/>
+                <a:cs typeface="Arial MT"/>
+              </a:rPr>
+              <a:t>Figure</a:t>
+            </a:r>
+            <a:r>
+              <a:rPr sz="900" spc="-20" dirty="0">
+                <a:solidFill>
+                  <a:srgbClr val="BEBEBE"/>
+                </a:solidFill>
+                <a:latin typeface="Arial MT"/>
+                <a:cs typeface="Arial MT"/>
+              </a:rPr>
+              <a:t> </a:t>
+            </a:r>
+            <a:r>
+              <a:rPr sz="900" spc="-25" dirty="0">
+                <a:solidFill>
+                  <a:srgbClr val="BEBEBE"/>
+                </a:solidFill>
+                <a:latin typeface="Arial MT"/>
+                <a:cs typeface="Arial MT"/>
+              </a:rPr>
+              <a:t>4a</a:t>
+            </a:r>
+            <a:endParaRPr sz="900" dirty="0">
+              <a:latin typeface="Arial MT"/>
+              <a:cs typeface="Arial MT"/>
+            </a:endParaRPr>
+          </a:p>
+        </p:txBody>
+      </p:sp>
+      <p:pic>
+        <p:nvPicPr>
+          <p:cNvPr id="7" name="object 9">
+            <a:extLst>
+              <a:ext uri="{FF2B5EF4-FFF2-40B4-BE49-F238E27FC236}">
+                <a16:creationId xmlns:a16="http://schemas.microsoft.com/office/drawing/2014/main" id="{9977E328-B1BB-920E-47C3-6E50A52E2F15}"/>
+              </a:ext>
+            </a:extLst>
+          </p:cNvPr>
+          <p:cNvPicPr/>
+          <p:nvPr/>
+        </p:nvPicPr>
+        <p:blipFill>
+          <a:blip r:embed="rId2" cstate="print"/>
+          <a:stretch>
+            <a:fillRect/>
+          </a:stretch>
+        </p:blipFill>
+        <p:spPr>
+          <a:xfrm>
+            <a:off x="1266091" y="1527633"/>
+            <a:ext cx="8772211" cy="5039212"/>
+          </a:xfrm>
+          <a:prstGeom prst="rect">
+            <a:avLst/>
+          </a:prstGeom>
+        </p:spPr>
+      </p:pic>
+      <p:sp>
+        <p:nvSpPr>
+          <p:cNvPr id="3" name="Rectangle 2">
+            <a:extLst>
+              <a:ext uri="{FF2B5EF4-FFF2-40B4-BE49-F238E27FC236}">
+                <a16:creationId xmlns:a16="http://schemas.microsoft.com/office/drawing/2014/main" id="{E20DCB61-9862-CEA7-771A-C8BAF5AF951A}"/>
+              </a:ext>
+            </a:extLst>
+          </p:cNvPr>
+          <p:cNvSpPr/>
+          <p:nvPr/>
+        </p:nvSpPr>
+        <p:spPr>
+          <a:xfrm>
+            <a:off x="3603319" y="3224523"/>
+            <a:ext cx="6434983" cy="215781"/>
+          </a:xfrm>
+          <a:prstGeom prst="rect">
+            <a:avLst/>
+          </a:prstGeom>
+          <a:noFill/>
+          <a:ln w="25400">
+            <a:solidFill>
+              <a:srgbClr val="FF0000"/>
+            </a:solidFill>
+          </a:ln>
+        </p:spPr>
+        <p:style>
+          <a:lnRef idx="2">
+            <a:schemeClr val="accent1">
+              <a:shade val="15000"/>
+            </a:schemeClr>
+          </a:lnRef>
+          <a:fillRef idx="1">
+            <a:schemeClr val="accent1"/>
+          </a:fillRef>
+          <a:effectRef idx="0">
+            <a:schemeClr val="accent1"/>
+          </a:effectRef>
+          <a:fontRef idx="minor">
+            <a:schemeClr val="lt1"/>
+          </a:fontRef>
+        </p:style>
+        <p:txBody>
+          <a:bodyPr rtlCol="0" anchor="ctr"/>
+          <a:lstStyle/>
+          <a:p>
+            <a:pPr algn="ctr"/>
+            <a:endParaRPr lang="en-IT"/>
+          </a:p>
+        </p:txBody>
+      </p:sp>
+    </p:spTree>
+    <p:extLst>
+      <p:ext uri="{BB962C8B-B14F-4D97-AF65-F5344CB8AC3E}">
+        <p14:creationId xmlns:p14="http://schemas.microsoft.com/office/powerpoint/2010/main" val="1616310002"/>
+      </p:ext>
+    </p:extLst>
+  </p:cSld>
+  <p:clrMapOvr>
+    <a:masterClrMapping/>
+  </p:clrMapOvr>
+</p:sld>
+</file>
+
+<file path=ppt/slides/slide25.xml><?xml version="1.0" encoding="utf-8"?>
+<p:sld xmlns:a="http://schemas.openxmlformats.org/drawingml/2006/main" xmlns:r="http://schemas.openxmlformats.org/officeDocument/2006/relationships" xmlns:p="http://schemas.openxmlformats.org/presentationml/2006/main">
+  <p:cSld>
+    <p:spTree>
+      <p:nvGrpSpPr>
+        <p:cNvPr id="1" name="">
+          <a:extLst>
+            <a:ext uri="{FF2B5EF4-FFF2-40B4-BE49-F238E27FC236}">
+              <a16:creationId xmlns:a16="http://schemas.microsoft.com/office/drawing/2014/main" id="{DAB6218C-112D-6EB2-77A0-E09C323BC2C8}"/>
+            </a:ext>
+          </a:extLst>
+        </p:cNvPr>
+        <p:cNvGrpSpPr/>
+        <p:nvPr/>
+      </p:nvGrpSpPr>
+      <p:grpSpPr>
+        <a:xfrm>
+          <a:off x="0" y="0"/>
+          <a:ext cx="0" cy="0"/>
+          <a:chOff x="0" y="0"/>
+          <a:chExt cx="0" cy="0"/>
+        </a:xfrm>
+      </p:grpSpPr>
+      <p:sp>
+        <p:nvSpPr>
+          <p:cNvPr id="2" name="Title 1">
+            <a:extLst>
+              <a:ext uri="{FF2B5EF4-FFF2-40B4-BE49-F238E27FC236}">
+                <a16:creationId xmlns:a16="http://schemas.microsoft.com/office/drawing/2014/main" id="{2702CCBA-4D1D-0C60-F196-0289038EDA21}"/>
+              </a:ext>
+            </a:extLst>
+          </p:cNvPr>
+          <p:cNvSpPr>
+            <a:spLocks noGrp="1"/>
+          </p:cNvSpPr>
+          <p:nvPr>
+            <p:ph type="title"/>
+          </p:nvPr>
+        </p:nvSpPr>
+        <p:spPr>
+          <a:xfrm>
+            <a:off x="582983" y="512502"/>
+            <a:ext cx="11208272" cy="1243578"/>
+          </a:xfrm>
+        </p:spPr>
+        <p:txBody>
+          <a:bodyPr>
+            <a:noAutofit/>
+          </a:bodyPr>
+          <a:lstStyle/>
+          <a:p>
+            <a:r>
+              <a:rPr lang="en-US" sz="2900" b="1" dirty="0">
+                <a:solidFill>
+                  <a:srgbClr val="0070C0"/>
+                </a:solidFill>
+                <a:latin typeface="Arial" panose="020B0604020202020204" pitchFamily="34" charset="0"/>
+                <a:cs typeface="Arial" panose="020B0604020202020204" pitchFamily="34" charset="0"/>
+              </a:rPr>
+              <a:t>Adaptive fisheries management</a:t>
+            </a:r>
+          </a:p>
+        </p:txBody>
+      </p:sp>
+      <p:grpSp>
+        <p:nvGrpSpPr>
+          <p:cNvPr id="6" name="Group 5">
+            <a:extLst>
+              <a:ext uri="{FF2B5EF4-FFF2-40B4-BE49-F238E27FC236}">
+                <a16:creationId xmlns:a16="http://schemas.microsoft.com/office/drawing/2014/main" id="{2AB54687-86AD-7582-6186-AF57B5AB6A24}"/>
+              </a:ext>
+            </a:extLst>
+          </p:cNvPr>
+          <p:cNvGrpSpPr/>
+          <p:nvPr/>
+        </p:nvGrpSpPr>
+        <p:grpSpPr>
+          <a:xfrm>
+            <a:off x="-16329" y="-38779"/>
+            <a:ext cx="12393386" cy="316366"/>
+            <a:chOff x="-16329" y="5228994"/>
+            <a:chExt cx="12208329" cy="575436"/>
+          </a:xfrm>
+        </p:grpSpPr>
+        <p:sp>
+          <p:nvSpPr>
+            <p:cNvPr id="8" name="Rectangle 7">
+              <a:extLst>
+                <a:ext uri="{FF2B5EF4-FFF2-40B4-BE49-F238E27FC236}">
+                  <a16:creationId xmlns:a16="http://schemas.microsoft.com/office/drawing/2014/main" id="{EE5AD194-98EC-4E9F-C522-EB7644061BBD}"/>
+                </a:ext>
+              </a:extLst>
+            </p:cNvPr>
+            <p:cNvSpPr/>
+            <p:nvPr/>
+          </p:nvSpPr>
+          <p:spPr>
+            <a:xfrm>
+              <a:off x="-16329" y="5228994"/>
+              <a:ext cx="10205358" cy="575436"/>
+            </a:xfrm>
+            <a:prstGeom prst="rect">
+              <a:avLst/>
+            </a:prstGeom>
+            <a:solidFill>
+              <a:schemeClr val="accent5">
+                <a:lumMod val="50000"/>
+              </a:schemeClr>
+            </a:solidFill>
+            <a:ln>
+              <a:noFill/>
+            </a:ln>
+          </p:spPr>
+          <p:style>
+            <a:lnRef idx="2">
+              <a:schemeClr val="accent1">
+                <a:shade val="50000"/>
+              </a:schemeClr>
+            </a:lnRef>
+            <a:fillRef idx="1">
+              <a:schemeClr val="accent1"/>
+            </a:fillRef>
+            <a:effectRef idx="0">
+              <a:schemeClr val="accent1"/>
+            </a:effectRef>
+            <a:fontRef idx="minor">
+              <a:schemeClr val="lt1"/>
+            </a:fontRef>
+          </p:style>
+          <p:txBody>
+            <a:bodyPr rtlCol="0" anchor="ctr"/>
+            <a:lstStyle/>
+            <a:p>
+              <a:pPr algn="ctr"/>
+              <a:endParaRPr lang="en-US"/>
+            </a:p>
+          </p:txBody>
+        </p:sp>
+        <p:sp>
+          <p:nvSpPr>
+            <p:cNvPr id="9" name="Rectangle 8">
+              <a:extLst>
+                <a:ext uri="{FF2B5EF4-FFF2-40B4-BE49-F238E27FC236}">
+                  <a16:creationId xmlns:a16="http://schemas.microsoft.com/office/drawing/2014/main" id="{F219353F-CC8F-30A5-47BD-081BC56406E5}"/>
+                </a:ext>
+              </a:extLst>
+            </p:cNvPr>
+            <p:cNvSpPr/>
+            <p:nvPr/>
+          </p:nvSpPr>
+          <p:spPr>
+            <a:xfrm>
+              <a:off x="10189029" y="5228994"/>
+              <a:ext cx="2002971" cy="575435"/>
+            </a:xfrm>
+            <a:prstGeom prst="rect">
+              <a:avLst/>
+            </a:prstGeom>
+            <a:solidFill>
+              <a:schemeClr val="accent4"/>
+            </a:solidFill>
+            <a:ln>
+              <a:noFill/>
+            </a:ln>
+          </p:spPr>
+          <p:style>
+            <a:lnRef idx="2">
+              <a:schemeClr val="accent1">
+                <a:shade val="50000"/>
+              </a:schemeClr>
+            </a:lnRef>
+            <a:fillRef idx="1">
+              <a:schemeClr val="accent1"/>
+            </a:fillRef>
+            <a:effectRef idx="0">
+              <a:schemeClr val="accent1"/>
+            </a:effectRef>
+            <a:fontRef idx="minor">
+              <a:schemeClr val="lt1"/>
+            </a:fontRef>
+          </p:style>
+          <p:txBody>
+            <a:bodyPr rtlCol="0" anchor="ctr"/>
+            <a:lstStyle/>
+            <a:p>
+              <a:pPr algn="ctr"/>
+              <a:endParaRPr lang="en-US"/>
+            </a:p>
+          </p:txBody>
+        </p:sp>
+      </p:grpSp>
+      <p:cxnSp>
+        <p:nvCxnSpPr>
+          <p:cNvPr id="10" name="Connecteur droit 6">
+            <a:extLst>
+              <a:ext uri="{FF2B5EF4-FFF2-40B4-BE49-F238E27FC236}">
+                <a16:creationId xmlns:a16="http://schemas.microsoft.com/office/drawing/2014/main" id="{9277E3FC-F072-F6EF-9164-3CFFBE923962}"/>
+              </a:ext>
+            </a:extLst>
+          </p:cNvPr>
+          <p:cNvCxnSpPr>
+            <a:cxnSpLocks/>
+          </p:cNvCxnSpPr>
+          <p:nvPr/>
+        </p:nvCxnSpPr>
+        <p:spPr>
+          <a:xfrm>
+            <a:off x="-16329" y="395044"/>
+            <a:ext cx="12208329" cy="0"/>
+          </a:xfrm>
+          <a:prstGeom prst="line">
+            <a:avLst/>
+          </a:prstGeom>
+          <a:ln w="28575"/>
+        </p:spPr>
+        <p:style>
+          <a:lnRef idx="1">
+            <a:schemeClr val="accent1"/>
+          </a:lnRef>
+          <a:fillRef idx="0">
+            <a:schemeClr val="accent1"/>
+          </a:fillRef>
+          <a:effectRef idx="0">
+            <a:schemeClr val="accent1"/>
+          </a:effectRef>
+          <a:fontRef idx="minor">
+            <a:schemeClr val="tx1"/>
+          </a:fontRef>
+        </p:style>
+      </p:cxnSp>
+      <p:sp>
+        <p:nvSpPr>
+          <p:cNvPr id="5" name="object 8">
+            <a:extLst>
+              <a:ext uri="{FF2B5EF4-FFF2-40B4-BE49-F238E27FC236}">
+                <a16:creationId xmlns:a16="http://schemas.microsoft.com/office/drawing/2014/main" id="{4AEB396A-8954-4E1F-D3B3-44F164D2396C}"/>
+              </a:ext>
+            </a:extLst>
+          </p:cNvPr>
+          <p:cNvSpPr txBox="1"/>
+          <p:nvPr/>
+        </p:nvSpPr>
+        <p:spPr>
+          <a:xfrm>
+            <a:off x="10343724" y="6485565"/>
+            <a:ext cx="1638300" cy="162560"/>
+          </a:xfrm>
+          <a:prstGeom prst="rect">
+            <a:avLst/>
+          </a:prstGeom>
+        </p:spPr>
+        <p:txBody>
+          <a:bodyPr vert="horz" wrap="square" lIns="0" tIns="12700" rIns="0" bIns="0" rtlCol="0">
+            <a:spAutoFit/>
+          </a:bodyPr>
+          <a:lstStyle/>
+          <a:p>
+            <a:pPr marL="12700">
+              <a:lnSpc>
+                <a:spcPct val="100000"/>
+              </a:lnSpc>
+              <a:spcBef>
+                <a:spcPts val="100"/>
+              </a:spcBef>
+            </a:pPr>
+            <a:r>
+              <a:rPr sz="900" dirty="0">
+                <a:solidFill>
+                  <a:srgbClr val="BEBEBE"/>
+                </a:solidFill>
+                <a:latin typeface="Arial MT"/>
+                <a:cs typeface="Arial MT"/>
+              </a:rPr>
+              <a:t>IPCC WGII</a:t>
+            </a:r>
+            <a:r>
+              <a:rPr sz="900" spc="-35" dirty="0">
+                <a:solidFill>
+                  <a:srgbClr val="BEBEBE"/>
+                </a:solidFill>
+                <a:latin typeface="Arial MT"/>
+                <a:cs typeface="Arial MT"/>
+              </a:rPr>
+              <a:t> </a:t>
+            </a:r>
+            <a:r>
+              <a:rPr sz="900" dirty="0">
+                <a:solidFill>
+                  <a:srgbClr val="BEBEBE"/>
+                </a:solidFill>
+                <a:latin typeface="Arial MT"/>
+                <a:cs typeface="Arial MT"/>
+              </a:rPr>
+              <a:t>AR6</a:t>
+            </a:r>
+            <a:r>
+              <a:rPr sz="900" spc="-5" dirty="0">
+                <a:solidFill>
+                  <a:srgbClr val="BEBEBE"/>
+                </a:solidFill>
+                <a:latin typeface="Arial MT"/>
+                <a:cs typeface="Arial MT"/>
+              </a:rPr>
+              <a:t> </a:t>
+            </a:r>
+            <a:r>
+              <a:rPr sz="900" dirty="0">
+                <a:solidFill>
+                  <a:srgbClr val="BEBEBE"/>
+                </a:solidFill>
+                <a:latin typeface="Arial MT"/>
+                <a:cs typeface="Arial MT"/>
+              </a:rPr>
+              <a:t>SPM</a:t>
+            </a:r>
+            <a:r>
+              <a:rPr sz="900" spc="5" dirty="0">
+                <a:solidFill>
+                  <a:srgbClr val="BEBEBE"/>
+                </a:solidFill>
+                <a:latin typeface="Arial MT"/>
+                <a:cs typeface="Arial MT"/>
+              </a:rPr>
+              <a:t> </a:t>
+            </a:r>
+            <a:r>
+              <a:rPr sz="900" dirty="0">
+                <a:solidFill>
+                  <a:srgbClr val="BEBEBE"/>
+                </a:solidFill>
+                <a:latin typeface="Arial MT"/>
+                <a:cs typeface="Arial MT"/>
+              </a:rPr>
+              <a:t>Figure</a:t>
+            </a:r>
+            <a:r>
+              <a:rPr sz="900" spc="-20" dirty="0">
+                <a:solidFill>
+                  <a:srgbClr val="BEBEBE"/>
+                </a:solidFill>
+                <a:latin typeface="Arial MT"/>
+                <a:cs typeface="Arial MT"/>
+              </a:rPr>
+              <a:t> </a:t>
+            </a:r>
+            <a:r>
+              <a:rPr sz="900" spc="-25" dirty="0">
+                <a:solidFill>
+                  <a:srgbClr val="BEBEBE"/>
+                </a:solidFill>
+                <a:latin typeface="Arial MT"/>
+                <a:cs typeface="Arial MT"/>
+              </a:rPr>
+              <a:t>4a</a:t>
+            </a:r>
+            <a:endParaRPr sz="900" dirty="0">
+              <a:latin typeface="Arial MT"/>
+              <a:cs typeface="Arial MT"/>
+            </a:endParaRPr>
+          </a:p>
+        </p:txBody>
+      </p:sp>
+      <p:pic>
+        <p:nvPicPr>
+          <p:cNvPr id="11" name="Picture 10" descr="A white and black text on a white background&#10;&#10;AI-generated content may be incorrect.">
+            <a:extLst>
+              <a:ext uri="{FF2B5EF4-FFF2-40B4-BE49-F238E27FC236}">
+                <a16:creationId xmlns:a16="http://schemas.microsoft.com/office/drawing/2014/main" id="{9C7EB771-D067-F23F-59D5-3633ADCE237C}"/>
+              </a:ext>
+            </a:extLst>
+          </p:cNvPr>
+          <p:cNvPicPr>
+            <a:picLocks noChangeAspect="1"/>
+          </p:cNvPicPr>
+          <p:nvPr/>
+        </p:nvPicPr>
+        <p:blipFill>
+          <a:blip r:embed="rId2">
+            <a:extLst>
+              <a:ext uri="{28A0092B-C50C-407E-A947-70E740481C1C}">
+                <a14:useLocalDpi xmlns:a14="http://schemas.microsoft.com/office/drawing/2010/main" val="0"/>
+              </a:ext>
+            </a:extLst>
+          </a:blip>
+          <a:stretch>
+            <a:fillRect/>
+          </a:stretch>
+        </p:blipFill>
+        <p:spPr>
+          <a:xfrm>
+            <a:off x="1183558" y="2261418"/>
+            <a:ext cx="9824884" cy="3921062"/>
+          </a:xfrm>
+          <a:prstGeom prst="rect">
+            <a:avLst/>
+          </a:prstGeom>
+        </p:spPr>
+      </p:pic>
+    </p:spTree>
+    <p:extLst>
+      <p:ext uri="{BB962C8B-B14F-4D97-AF65-F5344CB8AC3E}">
+        <p14:creationId xmlns:p14="http://schemas.microsoft.com/office/powerpoint/2010/main" val="3862250009"/>
       </p:ext>
     </p:extLst>
   </p:cSld>
@@ -15902,7 +23976,7 @@
                 </a:solidFill>
                 <a:latin typeface="Georgia" panose="02040502050405020303" pitchFamily="18" charset="0"/>
               </a:rPr>
-              <a:t>conceitos</a:t>
+              <a:t>Conceitos</a:t>
             </a:r>
             <a:r>
               <a:rPr lang="it-IT" b="1" cap="all" dirty="0">
@@ -15946,7 +24020,7 @@
                 </a:solidFill>
                 <a:latin typeface="Georgia" panose="02040502050405020303" pitchFamily="18" charset="0"/>
               </a:rPr>
-              <a:t>mudança</a:t>
+              <a:t>ciência</a:t>
             </a:r>
             <a:r>
               <a:rPr lang="it-IT" b="1" cap="all" dirty="0">
@@ -15957,49 +24031,8 @@
                 </a:solidFill>
                 <a:latin typeface="Georgia" panose="02040502050405020303" pitchFamily="18" charset="0"/>
               </a:rPr>
-              <a:t> </a:t>
-            </a:r>
-            <a:r>
-              <a:rPr lang="it-IT" b="1" cap="all" dirty="0" err="1">
-                <a:solidFill>
-                  <a:schemeClr val="accent5">
-                    <a:lumMod val="75000"/>
-                  </a:schemeClr>
-                </a:solidFill>
-                <a:latin typeface="Georgia" panose="02040502050405020303" pitchFamily="18" charset="0"/>
-              </a:rPr>
-              <a:t>climática</a:t>
-            </a:r>
-            <a:r>
-              <a:rPr lang="it-IT" b="1" cap="all" dirty="0">
-                <a:solidFill>
-                  <a:schemeClr val="accent5">
-                    <a:lumMod val="75000"/>
-                  </a:schemeClr>
-                </a:solidFill>
-                <a:latin typeface="Georgia" panose="02040502050405020303" pitchFamily="18" charset="0"/>
-              </a:rPr>
-              <a:t> e </a:t>
-            </a:r>
-            <a:r>
-              <a:rPr lang="it-IT" b="1" cap="all" dirty="0" err="1">
-                <a:solidFill>
-                  <a:schemeClr val="accent5">
-                    <a:lumMod val="75000"/>
-                  </a:schemeClr>
-                </a:solidFill>
-                <a:latin typeface="Georgia" panose="02040502050405020303" pitchFamily="18" charset="0"/>
-              </a:rPr>
-              <a:t>adaptação</a:t>
-            </a:r>
-            <a:endParaRPr lang="it-IT" b="1" cap="all" dirty="0">
-              <a:solidFill>
-                <a:schemeClr val="accent5">
-                  <a:lumMod val="75000"/>
-                </a:schemeClr>
-              </a:solidFill>
-              <a:latin typeface="Georgia" panose="02040502050405020303" pitchFamily="18" charset="0"/>
-            </a:endParaRPr>
+              <a:t> do clima </a:t>
+            </a:r>
           </a:p>
           <a:p>
             <a:r>

--- a/STP/presentations/GCF and climate change adaptation concepts.pptx
+++ b/STP/presentations/GCF and climate change adaptation concepts.pptx
@@ -26984,4 +26984,285 @@
     </a:ext>
   </a:extLst>
 </a:theme>
+</file>
+
+<file path=customXml/item1.xml><?xml version="1.0" encoding="utf-8"?>
+<ct:contentTypeSchema xmlns:ct="http://schemas.microsoft.com/office/2006/metadata/contentType" xmlns:ma="http://schemas.microsoft.com/office/2006/metadata/properties/metaAttributes" ct:_="" ma:_="" ma:contentTypeName="Document" ma:contentTypeID="0x01010072500CC7CC11694381E56D15BD009ABF" ma:contentTypeVersion="17" ma:contentTypeDescription="Create a new document." ma:contentTypeScope="" ma:versionID="5bde0183fae20f930619151b743545d5">
+  <xsd:schema xmlns:xsd="http://www.w3.org/2001/XMLSchema" xmlns:xs="http://www.w3.org/2001/XMLSchema" xmlns:p="http://schemas.microsoft.com/office/2006/metadata/properties" xmlns:ns2="c0caafef-fd22-48d0-85dc-526f5aa604f6" xmlns:ns3="cc7ce8ca-8f52-44ec-9496-3c41d0f5ad18" targetNamespace="http://schemas.microsoft.com/office/2006/metadata/properties" ma:root="true" ma:fieldsID="b93acc077f3eeba91a697f445d89f976" ns2:_="" ns3:_="">
+    <xsd:import namespace="c0caafef-fd22-48d0-85dc-526f5aa604f6"/>
+    <xsd:import namespace="cc7ce8ca-8f52-44ec-9496-3c41d0f5ad18"/>
+    <xsd:element name="properties">
+      <xsd:complexType>
+        <xsd:sequence>
+          <xsd:element name="documentManagement">
+            <xsd:complexType>
+              <xsd:all>
+                <xsd:element ref="ns2:MediaServiceMetadata" minOccurs="0"/>
+                <xsd:element ref="ns2:MediaServiceFastMetadata" minOccurs="0"/>
+                <xsd:element ref="ns2:MediaServiceAutoKeyPoints" minOccurs="0"/>
+                <xsd:element ref="ns2:MediaServiceKeyPoints" minOccurs="0"/>
+                <xsd:element ref="ns2:MediaServiceAutoTags" minOccurs="0"/>
+                <xsd:element ref="ns2:MediaServiceGenerationTime" minOccurs="0"/>
+                <xsd:element ref="ns2:MediaServiceEventHashCode" minOccurs="0"/>
+                <xsd:element ref="ns2:MediaServiceOCR" minOccurs="0"/>
+                <xsd:element ref="ns3:SharedWithUsers" minOccurs="0"/>
+                <xsd:element ref="ns3:SharedWithDetails" minOccurs="0"/>
+                <xsd:element ref="ns2:lcf76f155ced4ddcb4097134ff3c332f" minOccurs="0"/>
+                <xsd:element ref="ns3:TaxCatchAll" minOccurs="0"/>
+                <xsd:element ref="ns2:MediaServiceObjectDetectorVersions" minOccurs="0"/>
+                <xsd:element ref="ns2:MediaServiceDateTaken" minOccurs="0"/>
+                <xsd:element ref="ns2:MediaLengthInSeconds" minOccurs="0"/>
+                <xsd:element ref="ns2:MediaServiceSearchProperties" minOccurs="0"/>
+              </xsd:all>
+            </xsd:complexType>
+          </xsd:element>
+        </xsd:sequence>
+      </xsd:complexType>
+    </xsd:element>
+  </xsd:schema>
+  <xsd:schema xmlns:xsd="http://www.w3.org/2001/XMLSchema" xmlns:xs="http://www.w3.org/2001/XMLSchema" xmlns:dms="http://schemas.microsoft.com/office/2006/documentManagement/types" xmlns:pc="http://schemas.microsoft.com/office/infopath/2007/PartnerControls" targetNamespace="c0caafef-fd22-48d0-85dc-526f5aa604f6" elementFormDefault="qualified">
+    <xsd:import namespace="http://schemas.microsoft.com/office/2006/documentManagement/types"/>
+    <xsd:import namespace="http://schemas.microsoft.com/office/infopath/2007/PartnerControls"/>
+    <xsd:element name="MediaServiceMetadata" ma:index="8" nillable="true" ma:displayName="MediaServiceMetadata" ma:hidden="true" ma:internalName="MediaServiceMetadata" ma:readOnly="true">
+      <xsd:simpleType>
+        <xsd:restriction base="dms:Note"/>
+      </xsd:simpleType>
+    </xsd:element>
+    <xsd:element name="MediaServiceFastMetadata" ma:index="9" nillable="true" ma:displayName="MediaServiceFastMetadata" ma:hidden="true" ma:internalName="MediaServiceFastMetadata" ma:readOnly="true">
+      <xsd:simpleType>
+        <xsd:restriction base="dms:Note"/>
+      </xsd:simpleType>
+    </xsd:element>
+    <xsd:element name="MediaServiceAutoKeyPoints" ma:index="10" nillable="true" ma:displayName="MediaServiceAutoKeyPoints" ma:hidden="true" ma:internalName="MediaServiceAutoKeyPoints" ma:readOnly="true">
+      <xsd:simpleType>
+        <xsd:restriction base="dms:Note"/>
+      </xsd:simpleType>
+    </xsd:element>
+    <xsd:element name="MediaServiceKeyPoints" ma:index="11" nillable="true" ma:displayName="KeyPoints" ma:internalName="MediaServiceKeyPoints" ma:readOnly="true">
+      <xsd:simpleType>
+        <xsd:restriction base="dms:Note">
+          <xsd:maxLength value="255"/>
+        </xsd:restriction>
+      </xsd:simpleType>
+    </xsd:element>
+    <xsd:element name="MediaServiceAutoTags" ma:index="12" nillable="true" ma:displayName="Tags" ma:internalName="MediaServiceAutoTags" ma:readOnly="true">
+      <xsd:simpleType>
+        <xsd:restriction base="dms:Text"/>
+      </xsd:simpleType>
+    </xsd:element>
+    <xsd:element name="MediaServiceGenerationTime" ma:index="13" nillable="true" ma:displayName="MediaServiceGenerationTime" ma:hidden="true" ma:internalName="MediaServiceGenerationTime" ma:readOnly="true">
+      <xsd:simpleType>
+        <xsd:restriction base="dms:Text"/>
+      </xsd:simpleType>
+    </xsd:element>
+    <xsd:element name="MediaServiceEventHashCode" ma:index="14" nillable="true" ma:displayName="MediaServiceEventHashCode" ma:hidden="true" ma:internalName="MediaServiceEventHashCode" ma:readOnly="true">
+      <xsd:simpleType>
+        <xsd:restriction base="dms:Text"/>
+      </xsd:simpleType>
+    </xsd:element>
+    <xsd:element name="MediaServiceOCR" ma:index="15" nillable="true" ma:displayName="Extracted Text" ma:internalName="MediaServiceOCR" ma:readOnly="true">
+      <xsd:simpleType>
+        <xsd:restriction base="dms:Note">
+          <xsd:maxLength value="255"/>
+        </xsd:restriction>
+      </xsd:simpleType>
+    </xsd:element>
+    <xsd:element name="lcf76f155ced4ddcb4097134ff3c332f" ma:index="19" nillable="true" ma:taxonomy="true" ma:internalName="lcf76f155ced4ddcb4097134ff3c332f" ma:taxonomyFieldName="MediaServiceImageTags" ma:displayName="Image Tags" ma:readOnly="false" ma:fieldId="{5cf76f15-5ced-4ddc-b409-7134ff3c332f}" ma:taxonomyMulti="true" ma:sspId="f40eee1e-ad38-437e-be40-fc9f033adc9a" ma:termSetId="09814cd3-568e-fe90-9814-8d621ff8fb84" ma:anchorId="fba54fb3-c3e1-fe81-a776-ca4b69148c4d" ma:open="true" ma:isKeyword="false">
+      <xsd:complexType>
+        <xsd:sequence>
+          <xsd:element ref="pc:Terms" minOccurs="0" maxOccurs="1"/>
+        </xsd:sequence>
+      </xsd:complexType>
+    </xsd:element>
+    <xsd:element name="MediaServiceObjectDetectorVersions" ma:index="21" nillable="true" ma:displayName="MediaServiceObjectDetectorVersions" ma:hidden="true" ma:indexed="true" ma:internalName="MediaServiceObjectDetectorVersions" ma:readOnly="true">
+      <xsd:simpleType>
+        <xsd:restriction base="dms:Text"/>
+      </xsd:simpleType>
+    </xsd:element>
+    <xsd:element name="MediaServiceDateTaken" ma:index="22" nillable="true" ma:displayName="MediaServiceDateTaken" ma:hidden="true" ma:indexed="true" ma:internalName="MediaServiceDateTaken" ma:readOnly="true">
+      <xsd:simpleType>
+        <xsd:restriction base="dms:Text"/>
+      </xsd:simpleType>
+    </xsd:element>
+    <xsd:element name="MediaLengthInSeconds" ma:index="23" nillable="true" ma:displayName="MediaLengthInSeconds" ma:hidden="true" ma:internalName="MediaLengthInSeconds" ma:readOnly="true">
+      <xsd:simpleType>
+        <xsd:restriction base="dms:Unknown"/>
+      </xsd:simpleType>
+    </xsd:element>
+    <xsd:element name="MediaServiceSearchProperties" ma:index="24" nillable="true" ma:displayName="MediaServiceSearchProperties" ma:hidden="true" ma:internalName="MediaServiceSearchProperties" ma:readOnly="true">
+      <xsd:simpleType>
+        <xsd:restriction base="dms:Note"/>
+      </xsd:simpleType>
+    </xsd:element>
+  </xsd:schema>
+  <xsd:schema xmlns:xsd="http://www.w3.org/2001/XMLSchema" xmlns:xs="http://www.w3.org/2001/XMLSchema" xmlns:dms="http://schemas.microsoft.com/office/2006/documentManagement/types" xmlns:pc="http://schemas.microsoft.com/office/infopath/2007/PartnerControls" targetNamespace="cc7ce8ca-8f52-44ec-9496-3c41d0f5ad18" elementFormDefault="qualified">
+    <xsd:import namespace="http://schemas.microsoft.com/office/2006/documentManagement/types"/>
+    <xsd:import namespace="http://schemas.microsoft.com/office/infopath/2007/PartnerControls"/>
+    <xsd:element name="SharedWithUsers" ma:index="16" nillable="true" ma:displayName="Shared With" ma:internalName="SharedWithUsers" ma:readOnly="true">
+      <xsd:complexType>
+        <xsd:complexContent>
+          <xsd:extension base="dms:UserMulti">
+            <xsd:sequence>
+              <xsd:element name="UserInfo" minOccurs="0" maxOccurs="unbounded">
+                <xsd:complexType>
+                  <xsd:sequence>
+                    <xsd:element name="DisplayName" type="xsd:string" minOccurs="0"/>
+                    <xsd:element name="AccountId" type="dms:UserId" minOccurs="0" nillable="true"/>
+                    <xsd:element name="AccountType" type="xsd:string" minOccurs="0"/>
+                  </xsd:sequence>
+                </xsd:complexType>
+              </xsd:element>
+            </xsd:sequence>
+          </xsd:extension>
+        </xsd:complexContent>
+      </xsd:complexType>
+    </xsd:element>
+    <xsd:element name="SharedWithDetails" ma:index="17" nillable="true" ma:displayName="Shared With Details" ma:internalName="SharedWithDetails" ma:readOnly="true">
+      <xsd:simpleType>
+        <xsd:restriction base="dms:Note">
+          <xsd:maxLength value="255"/>
+        </xsd:restriction>
+      </xsd:simpleType>
+    </xsd:element>
+    <xsd:element name="TaxCatchAll" ma:index="20" nillable="true" ma:displayName="Taxonomy Catch All Column" ma:hidden="true" ma:list="{5dfeec75-c9d3-4c39-ba02-38eb92d5f92d}" ma:internalName="TaxCatchAll" ma:showField="CatchAllData" ma:web="cc7ce8ca-8f52-44ec-9496-3c41d0f5ad18">
+      <xsd:complexType>
+        <xsd:complexContent>
+          <xsd:extension base="dms:MultiChoiceLookup">
+            <xsd:sequence>
+              <xsd:element name="Value" type="dms:Lookup" maxOccurs="unbounded" minOccurs="0" nillable="true"/>
+            </xsd:sequence>
+          </xsd:extension>
+        </xsd:complexContent>
+      </xsd:complexType>
+    </xsd:element>
+  </xsd:schema>
+  <xsd:schema xmlns="http://schemas.openxmlformats.org/package/2006/metadata/core-properties" xmlns:xsd="http://www.w3.org/2001/XMLSchema" xmlns:xsi="http://www.w3.org/2001/XMLSchema-instance" xmlns:dc="http://purl.org/dc/elements/1.1/" xmlns:dcterms="http://purl.org/dc/terms/" xmlns:odoc="http://schemas.microsoft.com/internal/obd" targetNamespace="http://schemas.openxmlformats.org/package/2006/metadata/core-properties" elementFormDefault="qualified" attributeFormDefault="unqualified" blockDefault="#all">
+    <xsd:import namespace="http://purl.org/dc/elements/1.1/" schemaLocation="http://dublincore.org/schemas/xmls/qdc/2003/04/02/dc.xsd"/>
+    <xsd:import namespace="http://purl.org/dc/terms/" schemaLocation="http://dublincore.org/schemas/xmls/qdc/2003/04/02/dcterms.xsd"/>
+    <xsd:element name="coreProperties" type="CT_coreProperties"/>
+    <xsd:complexType name="CT_coreProperties">
+      <xsd:all>
+        <xsd:element ref="dc:creator" minOccurs="0" maxOccurs="1"/>
+        <xsd:element ref="dcterms:created" minOccurs="0" maxOccurs="1"/>
+        <xsd:element ref="dc:identifier" minOccurs="0" maxOccurs="1"/>
+        <xsd:element name="contentType" minOccurs="0" maxOccurs="1" type="xsd:string" ma:index="0" ma:displayName="Content Type"/>
+        <xsd:element ref="dc:title" minOccurs="0" maxOccurs="1" ma:index="4" ma:displayName="Title"/>
+        <xsd:element ref="dc:subject" minOccurs="0" maxOccurs="1"/>
+        <xsd:element ref="dc:description" minOccurs="0" maxOccurs="1"/>
+        <xsd:element name="keywords" minOccurs="0" maxOccurs="1" type="xsd:string"/>
+        <xsd:element ref="dc:language" minOccurs="0" maxOccurs="1"/>
+        <xsd:element name="category" minOccurs="0" maxOccurs="1" type="xsd:string"/>
+        <xsd:element name="version" minOccurs="0" maxOccurs="1" type="xsd:string"/>
+        <xsd:element name="revision" minOccurs="0" maxOccurs="1" type="xsd:string">
+          <xsd:annotation>
+            <xsd:documentation>
+                        This value indicates the number of saves or revisions. The application is responsible for updating this value after each revision.
+                    </xsd:documentation>
+          </xsd:annotation>
+        </xsd:element>
+        <xsd:element name="lastModifiedBy" minOccurs="0" maxOccurs="1" type="xsd:string"/>
+        <xsd:element ref="dcterms:modified" minOccurs="0" maxOccurs="1"/>
+        <xsd:element name="contentStatus" minOccurs="0" maxOccurs="1" type="xsd:string"/>
+      </xsd:all>
+    </xsd:complexType>
+  </xsd:schema>
+  <xs:schema xmlns:pc="http://schemas.microsoft.com/office/infopath/2007/PartnerControls" xmlns:xs="http://www.w3.org/2001/XMLSchema" targetNamespace="http://schemas.microsoft.com/office/infopath/2007/PartnerControls" elementFormDefault="qualified" attributeFormDefault="unqualified">
+    <xs:element name="Person">
+      <xs:complexType>
+        <xs:sequence>
+          <xs:element ref="pc:DisplayName" minOccurs="0"/>
+          <xs:element ref="pc:AccountId" minOccurs="0"/>
+          <xs:element ref="pc:AccountType" minOccurs="0"/>
+        </xs:sequence>
+      </xs:complexType>
+    </xs:element>
+    <xs:element name="DisplayName" type="xs:string"/>
+    <xs:element name="AccountId" type="xs:string"/>
+    <xs:element name="AccountType" type="xs:string"/>
+    <xs:element name="BDCAssociatedEntity">
+      <xs:complexType>
+        <xs:sequence>
+          <xs:element ref="pc:BDCEntity" minOccurs="0" maxOccurs="unbounded"/>
+        </xs:sequence>
+        <xs:attribute ref="pc:EntityNamespace"/>
+        <xs:attribute ref="pc:EntityName"/>
+        <xs:attribute ref="pc:SystemInstanceName"/>
+        <xs:attribute ref="pc:AssociationName"/>
+      </xs:complexType>
+    </xs:element>
+    <xs:attribute name="EntityNamespace" type="xs:string"/>
+    <xs:attribute name="EntityName" type="xs:string"/>
+    <xs:attribute name="SystemInstanceName" type="xs:string"/>
+    <xs:attribute name="AssociationName" type="xs:string"/>
+    <xs:element name="BDCEntity">
+      <xs:complexType>
+        <xs:sequence>
+          <xs:element ref="pc:EntityDisplayName" minOccurs="0"/>
+          <xs:element ref="pc:EntityInstanceReference" minOccurs="0"/>
+          <xs:element ref="pc:EntityId1" minOccurs="0"/>
+          <xs:element ref="pc:EntityId2" minOccurs="0"/>
+          <xs:element ref="pc:EntityId3" minOccurs="0"/>
+          <xs:element ref="pc:EntityId4" minOccurs="0"/>
+          <xs:element ref="pc:EntityId5" minOccurs="0"/>
+        </xs:sequence>
+      </xs:complexType>
+    </xs:element>
+    <xs:element name="EntityDisplayName" type="xs:string"/>
+    <xs:element name="EntityInstanceReference" type="xs:string"/>
+    <xs:element name="EntityId1" type="xs:string"/>
+    <xs:element name="EntityId2" type="xs:string"/>
+    <xs:element name="EntityId3" type="xs:string"/>
+    <xs:element name="EntityId4" type="xs:string"/>
+    <xs:element name="EntityId5" type="xs:string"/>
+    <xs:element name="Terms">
+      <xs:complexType>
+        <xs:sequence>
+          <xs:element ref="pc:TermInfo" minOccurs="0" maxOccurs="unbounded"/>
+        </xs:sequence>
+      </xs:complexType>
+    </xs:element>
+    <xs:element name="TermInfo">
+      <xs:complexType>
+        <xs:sequence>
+          <xs:element ref="pc:TermName" minOccurs="0"/>
+          <xs:element ref="pc:TermId" minOccurs="0"/>
+        </xs:sequence>
+      </xs:complexType>
+    </xs:element>
+    <xs:element name="TermName" type="xs:string"/>
+    <xs:element name="TermId" type="xs:string"/>
+  </xs:schema>
+</ct:contentTypeSchema>
+</file>
+
+<file path=customXml/item2.xml><?xml version="1.0" encoding="utf-8"?>
+<?mso-contentType ?>
+<FormTemplates xmlns="http://schemas.microsoft.com/sharepoint/v3/contenttype/forms">
+  <Display>DocumentLibraryForm</Display>
+  <Edit>DocumentLibraryForm</Edit>
+  <New>DocumentLibraryForm</New>
+</FormTemplates>
+</file>
+
+<file path=customXml/item3.xml><?xml version="1.0" encoding="utf-8"?>
+<p:properties xmlns:p="http://schemas.microsoft.com/office/2006/metadata/properties" xmlns:xsi="http://www.w3.org/2001/XMLSchema-instance" xmlns:pc="http://schemas.microsoft.com/office/infopath/2007/PartnerControls">
+  <documentManagement>
+    <lcf76f155ced4ddcb4097134ff3c332f xmlns="c0caafef-fd22-48d0-85dc-526f5aa604f6">
+      <Terms xmlns="http://schemas.microsoft.com/office/infopath/2007/PartnerControls"/>
+    </lcf76f155ced4ddcb4097134ff3c332f>
+    <TaxCatchAll xmlns="cc7ce8ca-8f52-44ec-9496-3c41d0f5ad18" xsi:nil="true"/>
+  </documentManagement>
+</p:properties>
+</file>
+
+<file path=customXml/itemProps1.xml><?xml version="1.0" encoding="utf-8"?>
+<ds:datastoreItem xmlns:ds="http://schemas.openxmlformats.org/officeDocument/2006/customXml" ds:itemID="{311D5BA7-B724-4F84-8F7D-A67A5CD46368}"/>
+</file>
+
+<file path=customXml/itemProps2.xml><?xml version="1.0" encoding="utf-8"?>
+<ds:datastoreItem xmlns:ds="http://schemas.openxmlformats.org/officeDocument/2006/customXml" ds:itemID="{4B6B8520-7C26-437A-A55D-92E184FB503B}"/>
+</file>
+
+<file path=customXml/itemProps3.xml><?xml version="1.0" encoding="utf-8"?>
+<ds:datastoreItem xmlns:ds="http://schemas.openxmlformats.org/officeDocument/2006/customXml" ds:itemID="{0CB5A343-3596-4D1F-9A29-9A0DD8397BD7}"/>
 </file>